--- a/pptx_build/Operations-Intelligence-Overview.pptx
+++ b/pptx_build/Operations-Intelligence-Overview.pptx
@@ -15,9 +15,10 @@
     <p:sldId id="263" r:id="rId9"/>
     <p:sldId id="264" r:id="rId10"/>
     <p:sldId id="265" r:id="rId11"/>
+    <p:sldId id="266" r:id="rId12"/>
   </p:sldIdLst>
   <p:notesMasterIdLst>
-    <p:notesMasterId r:id="rId12"/>
+    <p:notesMasterId r:id="rId13"/>
   </p:notesMasterIdLst>
   <p:sldSz cx="9144000" cy="5143500"/>
   <p:notesSz cx="5143500" cy="9144000"/>
@@ -641,6 +642,94 @@
 </p:notes>
 </file>
 
+<file path=ppt/notesSlides/notesSlide11.xml><?xml version="1.0" encoding="utf-8"?>
+<p:notes xmlns:a="http://schemas.openxmlformats.org/drawingml/2006/main" xmlns:r="http://schemas.openxmlformats.org/officeDocument/2006/relationships" xmlns:p="http://schemas.openxmlformats.org/presentationml/2006/main">
+  <p:cSld>
+    <p:spTree>
+      <p:nvGrpSpPr>
+        <p:cNvPr id="1" name=""/>
+        <p:cNvGrpSpPr/>
+        <p:nvPr/>
+      </p:nvGrpSpPr>
+      <p:grpSpPr>
+        <a:xfrm>
+          <a:off x="0" y="0"/>
+          <a:ext cx="0" cy="0"/>
+          <a:chOff x="0" y="0"/>
+          <a:chExt cx="0" cy="0"/>
+        </a:xfrm>
+      </p:grpSpPr>
+      <p:sp>
+        <p:nvSpPr>
+          <p:cNvPr id="2" name="Slide Image Placeholder 1"/>
+          <p:cNvSpPr>
+            <a:spLocks noGrp="1" noRot="1" noChangeAspect="1"/>
+          </p:cNvSpPr>
+          <p:nvPr>
+            <p:ph type="sldImg"/>
+          </p:nvPr>
+        </p:nvSpPr>
+        <p:spPr/>
+      </p:sp>
+      <p:sp>
+        <p:nvSpPr>
+          <p:cNvPr id="3" name="Notes Placeholder 2"/>
+          <p:cNvSpPr>
+            <a:spLocks noGrp="1"/>
+          </p:cNvSpPr>
+          <p:nvPr>
+            <p:ph type="body" idx="1"/>
+          </p:nvPr>
+        </p:nvSpPr>
+        <p:spPr/>
+        <p:txBody>
+          <a:bodyPr/>
+          <a:lstStyle/>
+          <a:p>
+            <a:r>
+              <a:rPr lang="en-US" dirty="0"/>
+              <a:t/>
+            </a:r>
+            <a:endParaRPr lang="en-US" dirty="0"/>
+          </a:p>
+        </p:txBody>
+      </p:sp>
+      <p:sp>
+        <p:nvSpPr>
+          <p:cNvPr id="4" name="Slide Number Placeholder 3"/>
+          <p:cNvSpPr>
+            <a:spLocks noGrp="1"/>
+          </p:cNvSpPr>
+          <p:nvPr>
+            <p:ph type="sldNum" sz="quarter" idx="10"/>
+          </p:nvPr>
+        </p:nvSpPr>
+        <p:spPr/>
+        <p:txBody>
+          <a:bodyPr/>
+          <a:lstStyle/>
+          <a:p>
+            <a:fld id="{F7021451-1387-4CA6-816F-3879F97B5CBC}" type="slidenum">
+              <a:rPr lang="en-US"/>
+              <a:t>11</a:t>
+            </a:fld>
+            <a:endParaRPr lang="en-US"/>
+          </a:p>
+        </p:txBody>
+      </p:sp>
+    </p:spTree>
+    <p:extLst>
+      <p:ext uri="{BB962C8B-B14F-4D97-AF65-F5344CB8AC3E}">
+        <p14:creationId xmlns:p14="http://schemas.microsoft.com/office/powerpoint/2010/main" val="1024086991"/>
+      </p:ext>
+    </p:extLst>
+  </p:cSld>
+  <p:clrMapOvr>
+    <a:masterClrMapping/>
+  </p:clrMapOvr>
+</p:notes>
+</file>
+
 <file path=ppt/notesSlides/notesSlide2.xml><?xml version="1.0" encoding="utf-8"?>
 <p:notes xmlns:a="http://schemas.openxmlformats.org/drawingml/2006/main" xmlns:r="http://schemas.openxmlformats.org/officeDocument/2006/relationships" xmlns:p="http://schemas.openxmlformats.org/presentationml/2006/main">
   <p:cSld>
@@ -2189,6 +2278,1896 @@
         </p:nvSpPr>
         <p:spPr>
           <a:xfrm>
+            <a:off x="201168" y="146304"/>
+            <a:ext cx="8723376" cy="457200"/>
+          </a:xfrm>
+          <a:prstGeom prst="rect">
+            <a:avLst/>
+          </a:prstGeom>
+          <a:noFill/>
+          <a:ln/>
+        </p:spPr>
+        <p:txBody>
+          <a:bodyPr wrap="square" rtlCol="0" anchor="ctr"/>
+          <a:lstStyle/>
+          <a:p>
+            <a:pPr indent="0" marL="0">
+              <a:buNone/>
+            </a:pPr>
+            <a:r>
+              <a:rPr lang="en-US" sz="2000" dirty="0">
+                <a:solidFill>
+                  <a:srgbClr val="595959"/>
+                </a:solidFill>
+                <a:latin typeface="Arial" pitchFamily="34" charset="0"/>
+                <a:ea typeface="Arial" pitchFamily="34" charset="-122"/>
+                <a:cs typeface="Arial" pitchFamily="34" charset="-120"/>
+              </a:rPr>
+              <a:t>Source Repository</a:t>
+            </a:r>
+            <a:endParaRPr lang="en-US" sz="2000" dirty="0"/>
+          </a:p>
+        </p:txBody>
+      </p:sp>
+      <p:sp>
+        <p:nvSpPr>
+          <p:cNvPr id="3" name="Shape 1"/>
+          <p:cNvSpPr/>
+          <p:nvPr/>
+        </p:nvSpPr>
+        <p:spPr>
+          <a:xfrm>
+            <a:off x="-8961" y="2123968"/>
+            <a:ext cx="104242" cy="865388"/>
+          </a:xfrm>
+          <a:prstGeom prst="rect">
+            <a:avLst/>
+          </a:prstGeom>
+          <a:solidFill>
+            <a:srgbClr val="007CC3"/>
+          </a:solidFill>
+          <a:ln/>
+        </p:spPr>
+      </p:sp>
+      <p:sp>
+        <p:nvSpPr>
+          <p:cNvPr id="4" name="Shape 2"/>
+          <p:cNvSpPr/>
+          <p:nvPr/>
+        </p:nvSpPr>
+        <p:spPr>
+          <a:xfrm>
+            <a:off x="9048720" y="2123968"/>
+            <a:ext cx="104242" cy="865388"/>
+          </a:xfrm>
+          <a:prstGeom prst="rect">
+            <a:avLst/>
+          </a:prstGeom>
+          <a:solidFill>
+            <a:srgbClr val="007CC3"/>
+          </a:solidFill>
+          <a:ln/>
+        </p:spPr>
+      </p:sp>
+      <p:sp>
+        <p:nvSpPr>
+          <p:cNvPr id="5" name="Text 3"/>
+          <p:cNvSpPr/>
+          <p:nvPr/>
+        </p:nvSpPr>
+        <p:spPr>
+          <a:xfrm>
+            <a:off x="201168" y="640080"/>
+            <a:ext cx="8741664" cy="256032"/>
+          </a:xfrm>
+          <a:prstGeom prst="rect">
+            <a:avLst/>
+          </a:prstGeom>
+          <a:noFill/>
+          <a:ln/>
+        </p:spPr>
+        <p:txBody>
+          <a:bodyPr wrap="square" rtlCol="0" anchor="ctr"/>
+          <a:lstStyle/>
+          <a:p>
+            <a:pPr indent="0" marL="0">
+              <a:buNone/>
+            </a:pPr>
+            <a:r>
+              <a:rPr lang="en-US" sz="1050" dirty="0">
+                <a:solidFill>
+                  <a:srgbClr val="007CC3"/>
+                </a:solidFill>
+                <a:latin typeface="Arial" pitchFamily="34" charset="0"/>
+                <a:ea typeface="Arial" pitchFamily="34" charset="-122"/>
+                <a:cs typeface="Arial" pitchFamily="34" charset="-120"/>
+              </a:rPr>
+              <a:t>Single source of truth — all platform documentation, source code, and Copilot AI instructions</a:t>
+            </a:r>
+            <a:endParaRPr lang="en-US" sz="1050" dirty="0"/>
+          </a:p>
+        </p:txBody>
+      </p:sp>
+      <p:sp>
+        <p:nvSpPr>
+          <p:cNvPr id="6" name="Shape 4"/>
+          <p:cNvSpPr/>
+          <p:nvPr/>
+        </p:nvSpPr>
+        <p:spPr>
+          <a:xfrm>
+            <a:off x="201168" y="950976"/>
+            <a:ext cx="8741664" cy="347472"/>
+          </a:xfrm>
+          <a:prstGeom prst="rect">
+            <a:avLst/>
+          </a:prstGeom>
+          <a:solidFill>
+            <a:srgbClr val="007CC3"/>
+          </a:solidFill>
+          <a:ln/>
+        </p:spPr>
+      </p:sp>
+      <p:sp>
+        <p:nvSpPr>
+          <p:cNvPr id="7" name="Text 5"/>
+          <p:cNvSpPr/>
+          <p:nvPr/>
+        </p:nvSpPr>
+        <p:spPr>
+          <a:xfrm>
+            <a:off x="329184" y="950976"/>
+            <a:ext cx="8613648" cy="347472"/>
+          </a:xfrm>
+          <a:prstGeom prst="rect">
+            <a:avLst/>
+          </a:prstGeom>
+          <a:noFill/>
+          <a:ln/>
+        </p:spPr>
+        <p:txBody>
+          <a:bodyPr wrap="square" rtlCol="0" anchor="ctr"/>
+          <a:lstStyle/>
+          <a:p>
+            <a:pPr indent="0" marL="0">
+              <a:buNone/>
+            </a:pPr>
+            <a:r>
+              <a:rPr lang="en-US" sz="1000" dirty="0">
+                <a:solidFill>
+                  <a:srgbClr val="FFFFFF"/>
+                </a:solidFill>
+                <a:latin typeface="Arial" pitchFamily="34" charset="0"/>
+                <a:ea typeface="Arial" pitchFamily="34" charset="-122"/>
+                <a:cs typeface="Arial" pitchFamily="34" charset="-120"/>
+              </a:rPr>
+              <a:t>github.com/Infosys-GithubCopilot-backup/Operations-Intelligence-Source</a:t>
+            </a:r>
+            <a:endParaRPr lang="en-US" sz="1000" dirty="0"/>
+          </a:p>
+        </p:txBody>
+      </p:sp>
+      <p:sp>
+        <p:nvSpPr>
+          <p:cNvPr id="8" name="Shape 6"/>
+          <p:cNvSpPr/>
+          <p:nvPr/>
+        </p:nvSpPr>
+        <p:spPr>
+          <a:xfrm>
+            <a:off x="201168" y="1353312"/>
+            <a:ext cx="6144768" cy="3182112"/>
+          </a:xfrm>
+          <a:prstGeom prst="rect">
+            <a:avLst/>
+          </a:prstGeom>
+          <a:solidFill>
+            <a:srgbClr val="F5FAFF"/>
+          </a:solidFill>
+          <a:ln w="6350">
+            <a:solidFill>
+              <a:srgbClr val="D9D9D9"/>
+            </a:solidFill>
+            <a:prstDash val="solid"/>
+          </a:ln>
+        </p:spPr>
+      </p:sp>
+      <p:sp>
+        <p:nvSpPr>
+          <p:cNvPr id="9" name="Shape 7"/>
+          <p:cNvSpPr/>
+          <p:nvPr/>
+        </p:nvSpPr>
+        <p:spPr>
+          <a:xfrm>
+            <a:off x="201168" y="1353312"/>
+            <a:ext cx="6144768" cy="347472"/>
+          </a:xfrm>
+          <a:prstGeom prst="rect">
+            <a:avLst/>
+          </a:prstGeom>
+          <a:solidFill>
+            <a:srgbClr val="EBF4FB"/>
+          </a:solidFill>
+          <a:ln/>
+        </p:spPr>
+      </p:sp>
+      <p:sp>
+        <p:nvSpPr>
+          <p:cNvPr id="10" name="Text 8"/>
+          <p:cNvSpPr/>
+          <p:nvPr/>
+        </p:nvSpPr>
+        <p:spPr>
+          <a:xfrm>
+            <a:off x="347472" y="1353312"/>
+            <a:ext cx="5998464" cy="347472"/>
+          </a:xfrm>
+          <a:prstGeom prst="rect">
+            <a:avLst/>
+          </a:prstGeom>
+          <a:noFill/>
+          <a:ln/>
+        </p:spPr>
+        <p:txBody>
+          <a:bodyPr wrap="square" rtlCol="0" anchor="ctr"/>
+          <a:lstStyle/>
+          <a:p>
+            <a:pPr indent="0" marL="0">
+              <a:buNone/>
+            </a:pPr>
+            <a:r>
+              <a:rPr lang="en-US" sz="950" b="1" dirty="0">
+                <a:solidFill>
+                  <a:srgbClr val="007CC3"/>
+                </a:solidFill>
+                <a:latin typeface="Arial" pitchFamily="34" charset="0"/>
+                <a:ea typeface="Arial" pitchFamily="34" charset="-122"/>
+                <a:cs typeface="Arial" pitchFamily="34" charset="-120"/>
+              </a:rPr>
+              <a:t>REPOSITORY CONTENTS</a:t>
+            </a:r>
+            <a:endParaRPr lang="en-US" sz="950" dirty="0"/>
+          </a:p>
+        </p:txBody>
+      </p:sp>
+      <p:sp>
+        <p:nvSpPr>
+          <p:cNvPr id="11" name="Text 9"/>
+          <p:cNvSpPr/>
+          <p:nvPr/>
+        </p:nvSpPr>
+        <p:spPr>
+          <a:xfrm>
+            <a:off x="3127248" y="1353312"/>
+            <a:ext cx="3127248" cy="347472"/>
+          </a:xfrm>
+          <a:prstGeom prst="rect">
+            <a:avLst/>
+          </a:prstGeom>
+          <a:noFill/>
+          <a:ln/>
+        </p:spPr>
+        <p:txBody>
+          <a:bodyPr wrap="square" rtlCol="0" anchor="ctr"/>
+          <a:lstStyle/>
+          <a:p>
+            <a:pPr algn="r" indent="0" marL="0">
+              <a:buNone/>
+            </a:pPr>
+            <a:r>
+              <a:rPr lang="en-US" sz="900" dirty="0">
+                <a:solidFill>
+                  <a:srgbClr val="7F7F7F"/>
+                </a:solidFill>
+                <a:latin typeface="Arial" pitchFamily="34" charset="0"/>
+                <a:ea typeface="Arial" pitchFamily="34" charset="-122"/>
+                <a:cs typeface="Arial" pitchFamily="34" charset="-120"/>
+              </a:rPr>
+              <a:t>Operations-Intelligence-Source</a:t>
+            </a:r>
+            <a:endParaRPr lang="en-US" sz="900" dirty="0"/>
+          </a:p>
+        </p:txBody>
+      </p:sp>
+      <p:sp>
+        <p:nvSpPr>
+          <p:cNvPr id="12" name="Shape 10"/>
+          <p:cNvSpPr/>
+          <p:nvPr/>
+        </p:nvSpPr>
+        <p:spPr>
+          <a:xfrm>
+            <a:off x="384048" y="1892808"/>
+            <a:ext cx="91440" cy="91440"/>
+          </a:xfrm>
+          <a:prstGeom prst="rect">
+            <a:avLst/>
+          </a:prstGeom>
+          <a:solidFill>
+            <a:srgbClr val="007CC3"/>
+          </a:solidFill>
+          <a:ln/>
+        </p:spPr>
+      </p:sp>
+      <p:sp>
+        <p:nvSpPr>
+          <p:cNvPr id="13" name="Text 11"/>
+          <p:cNvSpPr/>
+          <p:nvPr/>
+        </p:nvSpPr>
+        <p:spPr>
+          <a:xfrm>
+            <a:off x="530352" y="1773936"/>
+            <a:ext cx="1316736" cy="329184"/>
+          </a:xfrm>
+          <a:prstGeom prst="rect">
+            <a:avLst/>
+          </a:prstGeom>
+          <a:noFill/>
+          <a:ln/>
+        </p:spPr>
+        <p:txBody>
+          <a:bodyPr wrap="square" rtlCol="0" anchor="ctr"/>
+          <a:lstStyle/>
+          <a:p>
+            <a:pPr indent="0" marL="0">
+              <a:buNone/>
+            </a:pPr>
+            <a:r>
+              <a:rPr lang="en-US" sz="950" b="1" dirty="0">
+                <a:solidFill>
+                  <a:srgbClr val="2670C3"/>
+                </a:solidFill>
+                <a:latin typeface="Arial" pitchFamily="34" charset="0"/>
+                <a:ea typeface="Arial" pitchFamily="34" charset="-122"/>
+                <a:cs typeface="Arial" pitchFamily="34" charset="-120"/>
+              </a:rPr>
+              <a:t>.github /</a:t>
+            </a:r>
+            <a:endParaRPr lang="en-US" sz="950" dirty="0"/>
+          </a:p>
+        </p:txBody>
+      </p:sp>
+      <p:sp>
+        <p:nvSpPr>
+          <p:cNvPr id="14" name="Shape 12"/>
+          <p:cNvSpPr/>
+          <p:nvPr/>
+        </p:nvSpPr>
+        <p:spPr>
+          <a:xfrm>
+            <a:off x="1737360" y="1911096"/>
+            <a:ext cx="54864" cy="54864"/>
+          </a:xfrm>
+          <a:prstGeom prst="ellipse">
+            <a:avLst/>
+          </a:prstGeom>
+          <a:solidFill>
+            <a:srgbClr val="D9D9D9"/>
+          </a:solidFill>
+          <a:ln/>
+        </p:spPr>
+      </p:sp>
+      <p:sp>
+        <p:nvSpPr>
+          <p:cNvPr id="15" name="Text 13"/>
+          <p:cNvSpPr/>
+          <p:nvPr/>
+        </p:nvSpPr>
+        <p:spPr>
+          <a:xfrm>
+            <a:off x="1883664" y="1773936"/>
+            <a:ext cx="4315968" cy="329184"/>
+          </a:xfrm>
+          <a:prstGeom prst="rect">
+            <a:avLst/>
+          </a:prstGeom>
+          <a:noFill/>
+          <a:ln/>
+        </p:spPr>
+        <p:txBody>
+          <a:bodyPr wrap="square" rtlCol="0" anchor="ctr"/>
+          <a:lstStyle/>
+          <a:p>
+            <a:pPr indent="0" marL="0">
+              <a:buNone/>
+            </a:pPr>
+            <a:r>
+              <a:rPr lang="en-US" sz="900" dirty="0">
+                <a:solidFill>
+                  <a:srgbClr val="7F7F7F"/>
+                </a:solidFill>
+                <a:latin typeface="Arial" pitchFamily="34" charset="0"/>
+                <a:ea typeface="Arial" pitchFamily="34" charset="-122"/>
+                <a:cs typeface="Arial" pitchFamily="34" charset="-120"/>
+              </a:rPr>
+              <a:t>GitHub Copilot instructions — auto-loaded on repository open</a:t>
+            </a:r>
+            <a:endParaRPr lang="en-US" sz="900" dirty="0"/>
+          </a:p>
+        </p:txBody>
+      </p:sp>
+      <p:sp>
+        <p:nvSpPr>
+          <p:cNvPr id="16" name="Shape 14"/>
+          <p:cNvSpPr/>
+          <p:nvPr/>
+        </p:nvSpPr>
+        <p:spPr>
+          <a:xfrm>
+            <a:off x="384048" y="2276856"/>
+            <a:ext cx="91440" cy="91440"/>
+          </a:xfrm>
+          <a:prstGeom prst="rect">
+            <a:avLst/>
+          </a:prstGeom>
+          <a:solidFill>
+            <a:srgbClr val="007CC3"/>
+          </a:solidFill>
+          <a:ln/>
+        </p:spPr>
+      </p:sp>
+      <p:sp>
+        <p:nvSpPr>
+          <p:cNvPr id="17" name="Text 15"/>
+          <p:cNvSpPr/>
+          <p:nvPr/>
+        </p:nvSpPr>
+        <p:spPr>
+          <a:xfrm>
+            <a:off x="530352" y="2157984"/>
+            <a:ext cx="1316736" cy="329184"/>
+          </a:xfrm>
+          <a:prstGeom prst="rect">
+            <a:avLst/>
+          </a:prstGeom>
+          <a:noFill/>
+          <a:ln/>
+        </p:spPr>
+        <p:txBody>
+          <a:bodyPr wrap="square" rtlCol="0" anchor="ctr"/>
+          <a:lstStyle/>
+          <a:p>
+            <a:pPr indent="0" marL="0">
+              <a:buNone/>
+            </a:pPr>
+            <a:r>
+              <a:rPr lang="en-US" sz="950" b="1" dirty="0">
+                <a:solidFill>
+                  <a:srgbClr val="2670C3"/>
+                </a:solidFill>
+                <a:latin typeface="Arial" pitchFamily="34" charset="0"/>
+                <a:ea typeface="Arial" pitchFamily="34" charset="-122"/>
+                <a:cs typeface="Arial" pitchFamily="34" charset="-120"/>
+              </a:rPr>
+              <a:t>architecture /</a:t>
+            </a:r>
+            <a:endParaRPr lang="en-US" sz="950" dirty="0"/>
+          </a:p>
+        </p:txBody>
+      </p:sp>
+      <p:sp>
+        <p:nvSpPr>
+          <p:cNvPr id="18" name="Shape 16"/>
+          <p:cNvSpPr/>
+          <p:nvPr/>
+        </p:nvSpPr>
+        <p:spPr>
+          <a:xfrm>
+            <a:off x="1737360" y="2295144"/>
+            <a:ext cx="54864" cy="54864"/>
+          </a:xfrm>
+          <a:prstGeom prst="ellipse">
+            <a:avLst/>
+          </a:prstGeom>
+          <a:solidFill>
+            <a:srgbClr val="D9D9D9"/>
+          </a:solidFill>
+          <a:ln/>
+        </p:spPr>
+      </p:sp>
+      <p:sp>
+        <p:nvSpPr>
+          <p:cNvPr id="19" name="Text 17"/>
+          <p:cNvSpPr/>
+          <p:nvPr/>
+        </p:nvSpPr>
+        <p:spPr>
+          <a:xfrm>
+            <a:off x="1883664" y="2157984"/>
+            <a:ext cx="4315968" cy="329184"/>
+          </a:xfrm>
+          <a:prstGeom prst="rect">
+            <a:avLst/>
+          </a:prstGeom>
+          <a:noFill/>
+          <a:ln/>
+        </p:spPr>
+        <p:txBody>
+          <a:bodyPr wrap="square" rtlCol="0" anchor="ctr"/>
+          <a:lstStyle/>
+          <a:p>
+            <a:pPr indent="0" marL="0">
+              <a:buNone/>
+            </a:pPr>
+            <a:r>
+              <a:rPr lang="en-US" sz="900" dirty="0">
+                <a:solidFill>
+                  <a:srgbClr val="7F7F7F"/>
+                </a:solidFill>
+                <a:latin typeface="Arial" pitchFamily="34" charset="0"/>
+                <a:ea typeface="Arial" pitchFamily="34" charset="-122"/>
+                <a:cs typeface="Arial" pitchFamily="34" charset="-120"/>
+              </a:rPr>
+              <a:t>Solution architecture, data model, and role definitions</a:t>
+            </a:r>
+            <a:endParaRPr lang="en-US" sz="900" dirty="0"/>
+          </a:p>
+        </p:txBody>
+      </p:sp>
+      <p:sp>
+        <p:nvSpPr>
+          <p:cNvPr id="20" name="Shape 18"/>
+          <p:cNvSpPr/>
+          <p:nvPr/>
+        </p:nvSpPr>
+        <p:spPr>
+          <a:xfrm>
+            <a:off x="384048" y="2660904"/>
+            <a:ext cx="91440" cy="91440"/>
+          </a:xfrm>
+          <a:prstGeom prst="rect">
+            <a:avLst/>
+          </a:prstGeom>
+          <a:solidFill>
+            <a:srgbClr val="007CC3"/>
+          </a:solidFill>
+          <a:ln/>
+        </p:spPr>
+      </p:sp>
+      <p:sp>
+        <p:nvSpPr>
+          <p:cNvPr id="21" name="Text 19"/>
+          <p:cNvSpPr/>
+          <p:nvPr/>
+        </p:nvSpPr>
+        <p:spPr>
+          <a:xfrm>
+            <a:off x="530352" y="2542032"/>
+            <a:ext cx="1316736" cy="329184"/>
+          </a:xfrm>
+          <a:prstGeom prst="rect">
+            <a:avLst/>
+          </a:prstGeom>
+          <a:noFill/>
+          <a:ln/>
+        </p:spPr>
+        <p:txBody>
+          <a:bodyPr wrap="square" rtlCol="0" anchor="ctr"/>
+          <a:lstStyle/>
+          <a:p>
+            <a:pPr indent="0" marL="0">
+              <a:buNone/>
+            </a:pPr>
+            <a:r>
+              <a:rPr lang="en-US" sz="950" b="1" dirty="0">
+                <a:solidFill>
+                  <a:srgbClr val="2670C3"/>
+                </a:solidFill>
+                <a:latin typeface="Arial" pitchFamily="34" charset="0"/>
+                <a:ea typeface="Arial" pitchFamily="34" charset="-122"/>
+                <a:cs typeface="Arial" pitchFamily="34" charset="-120"/>
+              </a:rPr>
+              <a:t>context /  ·  01–05</a:t>
+            </a:r>
+            <a:endParaRPr lang="en-US" sz="950" dirty="0"/>
+          </a:p>
+        </p:txBody>
+      </p:sp>
+      <p:sp>
+        <p:nvSpPr>
+          <p:cNvPr id="22" name="Shape 20"/>
+          <p:cNvSpPr/>
+          <p:nvPr/>
+        </p:nvSpPr>
+        <p:spPr>
+          <a:xfrm>
+            <a:off x="1737360" y="2679192"/>
+            <a:ext cx="54864" cy="54864"/>
+          </a:xfrm>
+          <a:prstGeom prst="ellipse">
+            <a:avLst/>
+          </a:prstGeom>
+          <a:solidFill>
+            <a:srgbClr val="D9D9D9"/>
+          </a:solidFill>
+          <a:ln/>
+        </p:spPr>
+      </p:sp>
+      <p:sp>
+        <p:nvSpPr>
+          <p:cNvPr id="23" name="Text 21"/>
+          <p:cNvSpPr/>
+          <p:nvPr/>
+        </p:nvSpPr>
+        <p:spPr>
+          <a:xfrm>
+            <a:off x="1883664" y="2542032"/>
+            <a:ext cx="4315968" cy="329184"/>
+          </a:xfrm>
+          <a:prstGeom prst="rect">
+            <a:avLst/>
+          </a:prstGeom>
+          <a:noFill/>
+          <a:ln/>
+        </p:spPr>
+        <p:txBody>
+          <a:bodyPr wrap="square" rtlCol="0" anchor="ctr"/>
+          <a:lstStyle/>
+          <a:p>
+            <a:pPr indent="0" marL="0">
+              <a:buNone/>
+            </a:pPr>
+            <a:r>
+              <a:rPr lang="en-US" sz="900" dirty="0">
+                <a:solidFill>
+                  <a:srgbClr val="7F7F7F"/>
+                </a:solidFill>
+                <a:latin typeface="Arial" pitchFamily="34" charset="0"/>
+                <a:ea typeface="Arial" pitchFamily="34" charset="-122"/>
+                <a:cs typeface="Arial" pitchFamily="34" charset="-120"/>
+              </a:rPr>
+              <a:t>Business context, problem statement, and value canon</a:t>
+            </a:r>
+            <a:endParaRPr lang="en-US" sz="900" dirty="0"/>
+          </a:p>
+        </p:txBody>
+      </p:sp>
+      <p:sp>
+        <p:nvSpPr>
+          <p:cNvPr id="24" name="Shape 22"/>
+          <p:cNvSpPr/>
+          <p:nvPr/>
+        </p:nvSpPr>
+        <p:spPr>
+          <a:xfrm>
+            <a:off x="384048" y="3044952"/>
+            <a:ext cx="91440" cy="91440"/>
+          </a:xfrm>
+          <a:prstGeom prst="rect">
+            <a:avLst/>
+          </a:prstGeom>
+          <a:solidFill>
+            <a:srgbClr val="007CC3"/>
+          </a:solidFill>
+          <a:ln/>
+        </p:spPr>
+      </p:sp>
+      <p:sp>
+        <p:nvSpPr>
+          <p:cNvPr id="25" name="Text 23"/>
+          <p:cNvSpPr/>
+          <p:nvPr/>
+        </p:nvSpPr>
+        <p:spPr>
+          <a:xfrm>
+            <a:off x="530352" y="2926080"/>
+            <a:ext cx="1316736" cy="329184"/>
+          </a:xfrm>
+          <a:prstGeom prst="rect">
+            <a:avLst/>
+          </a:prstGeom>
+          <a:noFill/>
+          <a:ln/>
+        </p:spPr>
+        <p:txBody>
+          <a:bodyPr wrap="square" rtlCol="0" anchor="ctr"/>
+          <a:lstStyle/>
+          <a:p>
+            <a:pPr indent="0" marL="0">
+              <a:buNone/>
+            </a:pPr>
+            <a:r>
+              <a:rPr lang="en-US" sz="950" b="1" dirty="0">
+                <a:solidFill>
+                  <a:srgbClr val="2670C3"/>
+                </a:solidFill>
+                <a:latin typeface="Arial" pitchFamily="34" charset="0"/>
+                <a:ea typeface="Arial" pitchFamily="34" charset="-122"/>
+                <a:cs typeface="Arial" pitchFamily="34" charset="-120"/>
+              </a:rPr>
+              <a:t>implementation /</a:t>
+            </a:r>
+            <a:endParaRPr lang="en-US" sz="950" dirty="0"/>
+          </a:p>
+        </p:txBody>
+      </p:sp>
+      <p:sp>
+        <p:nvSpPr>
+          <p:cNvPr id="26" name="Shape 24"/>
+          <p:cNvSpPr/>
+          <p:nvPr/>
+        </p:nvSpPr>
+        <p:spPr>
+          <a:xfrm>
+            <a:off x="1737360" y="3063240"/>
+            <a:ext cx="54864" cy="54864"/>
+          </a:xfrm>
+          <a:prstGeom prst="ellipse">
+            <a:avLst/>
+          </a:prstGeom>
+          <a:solidFill>
+            <a:srgbClr val="D9D9D9"/>
+          </a:solidFill>
+          <a:ln/>
+        </p:spPr>
+      </p:sp>
+      <p:sp>
+        <p:nvSpPr>
+          <p:cNvPr id="27" name="Text 25"/>
+          <p:cNvSpPr/>
+          <p:nvPr/>
+        </p:nvSpPr>
+        <p:spPr>
+          <a:xfrm>
+            <a:off x="1883664" y="2926080"/>
+            <a:ext cx="4315968" cy="329184"/>
+          </a:xfrm>
+          <a:prstGeom prst="rect">
+            <a:avLst/>
+          </a:prstGeom>
+          <a:noFill/>
+          <a:ln/>
+        </p:spPr>
+        <p:txBody>
+          <a:bodyPr wrap="square" rtlCol="0" anchor="ctr"/>
+          <a:lstStyle/>
+          <a:p>
+            <a:pPr indent="0" marL="0">
+              <a:buNone/>
+            </a:pPr>
+            <a:r>
+              <a:rPr lang="en-US" sz="900" dirty="0">
+                <a:solidFill>
+                  <a:srgbClr val="7F7F7F"/>
+                </a:solidFill>
+                <a:latin typeface="Arial" pitchFamily="34" charset="0"/>
+                <a:ea typeface="Arial" pitchFamily="34" charset="-122"/>
+                <a:cs typeface="Arial" pitchFamily="34" charset="-120"/>
+              </a:rPr>
+              <a:t>Engine source (117 operations), portal widget, background scripts</a:t>
+            </a:r>
+            <a:endParaRPr lang="en-US" sz="900" dirty="0"/>
+          </a:p>
+        </p:txBody>
+      </p:sp>
+      <p:sp>
+        <p:nvSpPr>
+          <p:cNvPr id="28" name="Shape 26"/>
+          <p:cNvSpPr/>
+          <p:nvPr/>
+        </p:nvSpPr>
+        <p:spPr>
+          <a:xfrm>
+            <a:off x="603504" y="3429000"/>
+            <a:ext cx="91440" cy="91440"/>
+          </a:xfrm>
+          <a:prstGeom prst="rect">
+            <a:avLst/>
+          </a:prstGeom>
+          <a:solidFill>
+            <a:srgbClr val="7F7F7F"/>
+          </a:solidFill>
+          <a:ln/>
+        </p:spPr>
+      </p:sp>
+      <p:sp>
+        <p:nvSpPr>
+          <p:cNvPr id="29" name="Text 27"/>
+          <p:cNvSpPr/>
+          <p:nvPr/>
+        </p:nvSpPr>
+        <p:spPr>
+          <a:xfrm>
+            <a:off x="749808" y="3310128"/>
+            <a:ext cx="1316736" cy="329184"/>
+          </a:xfrm>
+          <a:prstGeom prst="rect">
+            <a:avLst/>
+          </a:prstGeom>
+          <a:noFill/>
+          <a:ln/>
+        </p:spPr>
+        <p:txBody>
+          <a:bodyPr wrap="square" rtlCol="0" anchor="ctr"/>
+          <a:lstStyle/>
+          <a:p>
+            <a:pPr indent="0" marL="0">
+              <a:buNone/>
+            </a:pPr>
+            <a:r>
+              <a:rPr lang="en-US" sz="950" dirty="0">
+                <a:solidFill>
+                  <a:srgbClr val="595959"/>
+                </a:solidFill>
+                <a:latin typeface="Arial" pitchFamily="34" charset="0"/>
+                <a:ea typeface="Arial" pitchFamily="34" charset="-122"/>
+                <a:cs typeface="Arial" pitchFamily="34" charset="-120"/>
+              </a:rPr>
+              <a:t>source /</a:t>
+            </a:r>
+            <a:endParaRPr lang="en-US" sz="950" dirty="0"/>
+          </a:p>
+        </p:txBody>
+      </p:sp>
+      <p:sp>
+        <p:nvSpPr>
+          <p:cNvPr id="30" name="Shape 28"/>
+          <p:cNvSpPr/>
+          <p:nvPr/>
+        </p:nvSpPr>
+        <p:spPr>
+          <a:xfrm>
+            <a:off x="1956816" y="3447288"/>
+            <a:ext cx="54864" cy="54864"/>
+          </a:xfrm>
+          <a:prstGeom prst="ellipse">
+            <a:avLst/>
+          </a:prstGeom>
+          <a:solidFill>
+            <a:srgbClr val="D9D9D9"/>
+          </a:solidFill>
+          <a:ln/>
+        </p:spPr>
+      </p:sp>
+      <p:sp>
+        <p:nvSpPr>
+          <p:cNvPr id="31" name="Text 29"/>
+          <p:cNvSpPr/>
+          <p:nvPr/>
+        </p:nvSpPr>
+        <p:spPr>
+          <a:xfrm>
+            <a:off x="2103120" y="3310128"/>
+            <a:ext cx="4096512" cy="329184"/>
+          </a:xfrm>
+          <a:prstGeom prst="rect">
+            <a:avLst/>
+          </a:prstGeom>
+          <a:noFill/>
+          <a:ln/>
+        </p:spPr>
+        <p:txBody>
+          <a:bodyPr wrap="square" rtlCol="0" anchor="ctr"/>
+          <a:lstStyle/>
+          <a:p>
+            <a:pPr indent="0" marL="0">
+              <a:buNone/>
+            </a:pPr>
+            <a:r>
+              <a:rPr lang="en-US" sz="900" dirty="0">
+                <a:solidFill>
+                  <a:srgbClr val="7F7F7F"/>
+                </a:solidFill>
+                <a:latin typeface="Arial" pitchFamily="34" charset="0"/>
+                <a:ea typeface="Arial" pitchFamily="34" charset="-122"/>
+                <a:cs typeface="Arial" pitchFamily="34" charset="-120"/>
+              </a:rPr>
+              <a:t>Engine, portal widget JS/CSS, deployment scripts</a:t>
+            </a:r>
+            <a:endParaRPr lang="en-US" sz="900" dirty="0"/>
+          </a:p>
+        </p:txBody>
+      </p:sp>
+      <p:sp>
+        <p:nvSpPr>
+          <p:cNvPr id="32" name="Shape 30"/>
+          <p:cNvSpPr/>
+          <p:nvPr/>
+        </p:nvSpPr>
+        <p:spPr>
+          <a:xfrm>
+            <a:off x="603504" y="3813048"/>
+            <a:ext cx="91440" cy="91440"/>
+          </a:xfrm>
+          <a:prstGeom prst="rect">
+            <a:avLst/>
+          </a:prstGeom>
+          <a:solidFill>
+            <a:srgbClr val="7F7F7F"/>
+          </a:solidFill>
+          <a:ln/>
+        </p:spPr>
+      </p:sp>
+      <p:sp>
+        <p:nvSpPr>
+          <p:cNvPr id="33" name="Text 31"/>
+          <p:cNvSpPr/>
+          <p:nvPr/>
+        </p:nvSpPr>
+        <p:spPr>
+          <a:xfrm>
+            <a:off x="749808" y="3694176"/>
+            <a:ext cx="1316736" cy="329184"/>
+          </a:xfrm>
+          <a:prstGeom prst="rect">
+            <a:avLst/>
+          </a:prstGeom>
+          <a:noFill/>
+          <a:ln/>
+        </p:spPr>
+        <p:txBody>
+          <a:bodyPr wrap="square" rtlCol="0" anchor="ctr"/>
+          <a:lstStyle/>
+          <a:p>
+            <a:pPr indent="0" marL="0">
+              <a:buNone/>
+            </a:pPr>
+            <a:r>
+              <a:rPr lang="en-US" sz="950" dirty="0">
+                <a:solidFill>
+                  <a:srgbClr val="595959"/>
+                </a:solidFill>
+                <a:latin typeface="Arial" pitchFamily="34" charset="0"/>
+                <a:ea typeface="Arial" pitchFamily="34" charset="-122"/>
+                <a:cs typeface="Arial" pitchFamily="34" charset="-120"/>
+              </a:rPr>
+              <a:t>documentation /</a:t>
+            </a:r>
+            <a:endParaRPr lang="en-US" sz="950" dirty="0"/>
+          </a:p>
+        </p:txBody>
+      </p:sp>
+      <p:sp>
+        <p:nvSpPr>
+          <p:cNvPr id="34" name="Shape 32"/>
+          <p:cNvSpPr/>
+          <p:nvPr/>
+        </p:nvSpPr>
+        <p:spPr>
+          <a:xfrm>
+            <a:off x="1956816" y="3831336"/>
+            <a:ext cx="54864" cy="54864"/>
+          </a:xfrm>
+          <a:prstGeom prst="ellipse">
+            <a:avLst/>
+          </a:prstGeom>
+          <a:solidFill>
+            <a:srgbClr val="D9D9D9"/>
+          </a:solidFill>
+          <a:ln/>
+        </p:spPr>
+      </p:sp>
+      <p:sp>
+        <p:nvSpPr>
+          <p:cNvPr id="35" name="Text 33"/>
+          <p:cNvSpPr/>
+          <p:nvPr/>
+        </p:nvSpPr>
+        <p:spPr>
+          <a:xfrm>
+            <a:off x="2103120" y="3694176"/>
+            <a:ext cx="4096512" cy="329184"/>
+          </a:xfrm>
+          <a:prstGeom prst="rect">
+            <a:avLst/>
+          </a:prstGeom>
+          <a:noFill/>
+          <a:ln/>
+        </p:spPr>
+        <p:txBody>
+          <a:bodyPr wrap="square" rtlCol="0" anchor="ctr"/>
+          <a:lstStyle/>
+          <a:p>
+            <a:pPr indent="0" marL="0">
+              <a:buNone/>
+            </a:pPr>
+            <a:r>
+              <a:rPr lang="en-US" sz="900" dirty="0">
+                <a:solidFill>
+                  <a:srgbClr val="7F7F7F"/>
+                </a:solidFill>
+                <a:latin typeface="Arial" pitchFamily="34" charset="0"/>
+                <a:ea typeface="Arial" pitchFamily="34" charset="-122"/>
+                <a:cs typeface="Arial" pitchFamily="34" charset="-120"/>
+              </a:rPr>
+              <a:t>API reference, coding patterns, schema definitions</a:t>
+            </a:r>
+            <a:endParaRPr lang="en-US" sz="900" dirty="0"/>
+          </a:p>
+        </p:txBody>
+      </p:sp>
+      <p:sp>
+        <p:nvSpPr>
+          <p:cNvPr id="36" name="Shape 34"/>
+          <p:cNvSpPr/>
+          <p:nvPr/>
+        </p:nvSpPr>
+        <p:spPr>
+          <a:xfrm>
+            <a:off x="384048" y="4197096"/>
+            <a:ext cx="91440" cy="91440"/>
+          </a:xfrm>
+          <a:prstGeom prst="rect">
+            <a:avLst/>
+          </a:prstGeom>
+          <a:solidFill>
+            <a:srgbClr val="007CC3"/>
+          </a:solidFill>
+          <a:ln/>
+        </p:spPr>
+      </p:sp>
+      <p:sp>
+        <p:nvSpPr>
+          <p:cNvPr id="37" name="Text 35"/>
+          <p:cNvSpPr/>
+          <p:nvPr/>
+        </p:nvSpPr>
+        <p:spPr>
+          <a:xfrm>
+            <a:off x="530352" y="4078224"/>
+            <a:ext cx="1316736" cy="329184"/>
+          </a:xfrm>
+          <a:prstGeom prst="rect">
+            <a:avLst/>
+          </a:prstGeom>
+          <a:noFill/>
+          <a:ln/>
+        </p:spPr>
+        <p:txBody>
+          <a:bodyPr wrap="square" rtlCol="0" anchor="ctr"/>
+          <a:lstStyle/>
+          <a:p>
+            <a:pPr indent="0" marL="0">
+              <a:buNone/>
+            </a:pPr>
+            <a:r>
+              <a:rPr lang="en-US" sz="950" b="1" dirty="0">
+                <a:solidFill>
+                  <a:srgbClr val="2670C3"/>
+                </a:solidFill>
+                <a:latin typeface="Arial" pitchFamily="34" charset="0"/>
+                <a:ea typeface="Arial" pitchFamily="34" charset="-122"/>
+                <a:cs typeface="Arial" pitchFamily="34" charset="-120"/>
+              </a:rPr>
+              <a:t>reference /</a:t>
+            </a:r>
+            <a:endParaRPr lang="en-US" sz="950" dirty="0"/>
+          </a:p>
+        </p:txBody>
+      </p:sp>
+      <p:sp>
+        <p:nvSpPr>
+          <p:cNvPr id="38" name="Shape 36"/>
+          <p:cNvSpPr/>
+          <p:nvPr/>
+        </p:nvSpPr>
+        <p:spPr>
+          <a:xfrm>
+            <a:off x="1737360" y="4215384"/>
+            <a:ext cx="54864" cy="54864"/>
+          </a:xfrm>
+          <a:prstGeom prst="ellipse">
+            <a:avLst/>
+          </a:prstGeom>
+          <a:solidFill>
+            <a:srgbClr val="D9D9D9"/>
+          </a:solidFill>
+          <a:ln/>
+        </p:spPr>
+      </p:sp>
+      <p:sp>
+        <p:nvSpPr>
+          <p:cNvPr id="39" name="Text 37"/>
+          <p:cNvSpPr/>
+          <p:nvPr/>
+        </p:nvSpPr>
+        <p:spPr>
+          <a:xfrm>
+            <a:off x="1883664" y="4078224"/>
+            <a:ext cx="4315968" cy="329184"/>
+          </a:xfrm>
+          <a:prstGeom prst="rect">
+            <a:avLst/>
+          </a:prstGeom>
+          <a:noFill/>
+          <a:ln/>
+        </p:spPr>
+        <p:txBody>
+          <a:bodyPr wrap="square" rtlCol="0" anchor="ctr"/>
+          <a:lstStyle/>
+          <a:p>
+            <a:pPr indent="0" marL="0">
+              <a:buNone/>
+            </a:pPr>
+            <a:r>
+              <a:rPr lang="en-US" sz="900" dirty="0">
+                <a:solidFill>
+                  <a:srgbClr val="7F7F7F"/>
+                </a:solidFill>
+                <a:latin typeface="Arial" pitchFamily="34" charset="0"/>
+                <a:ea typeface="Arial" pitchFamily="34" charset="-122"/>
+                <a:cs typeface="Arial" pitchFamily="34" charset="-120"/>
+              </a:rPr>
+              <a:t>Canonical glossary for all identifiers and terms</a:t>
+            </a:r>
+            <a:endParaRPr lang="en-US" sz="900" dirty="0"/>
+          </a:p>
+        </p:txBody>
+      </p:sp>
+      <p:sp>
+        <p:nvSpPr>
+          <p:cNvPr id="40" name="Text 38"/>
+          <p:cNvSpPr/>
+          <p:nvPr/>
+        </p:nvSpPr>
+        <p:spPr>
+          <a:xfrm>
+            <a:off x="347472" y="4206240"/>
+            <a:ext cx="5852160" cy="256032"/>
+          </a:xfrm>
+          <a:prstGeom prst="rect">
+            <a:avLst/>
+          </a:prstGeom>
+          <a:noFill/>
+          <a:ln/>
+        </p:spPr>
+        <p:txBody>
+          <a:bodyPr wrap="square" rtlCol="0" anchor="ctr"/>
+          <a:lstStyle/>
+          <a:p>
+            <a:pPr indent="0" marL="0">
+              <a:buNone/>
+            </a:pPr>
+            <a:r>
+              <a:rPr lang="en-US" sz="850" i="1" dirty="0">
+                <a:solidFill>
+                  <a:srgbClr val="7F7F7F"/>
+                </a:solidFill>
+                <a:latin typeface="Arial" pitchFamily="34" charset="0"/>
+                <a:ea typeface="Arial" pitchFamily="34" charset="-122"/>
+                <a:cs typeface="Arial" pitchFamily="34" charset="-120"/>
+              </a:rPr>
+              <a:t>Any developer opening this repository with GitHub Copilot receives full platform context with no additional setup required.</a:t>
+            </a:r>
+            <a:endParaRPr lang="en-US" sz="850" dirty="0"/>
+          </a:p>
+        </p:txBody>
+      </p:sp>
+      <p:sp>
+        <p:nvSpPr>
+          <p:cNvPr id="41" name="Shape 39"/>
+          <p:cNvSpPr/>
+          <p:nvPr/>
+        </p:nvSpPr>
+        <p:spPr>
+          <a:xfrm>
+            <a:off x="6510528" y="1353312"/>
+            <a:ext cx="2432304" cy="1517904"/>
+          </a:xfrm>
+          <a:prstGeom prst="rect">
+            <a:avLst/>
+          </a:prstGeom>
+          <a:solidFill>
+            <a:srgbClr val="EBF4FB"/>
+          </a:solidFill>
+          <a:ln/>
+        </p:spPr>
+      </p:sp>
+      <p:sp>
+        <p:nvSpPr>
+          <p:cNvPr id="42" name="Shape 40"/>
+          <p:cNvSpPr/>
+          <p:nvPr/>
+        </p:nvSpPr>
+        <p:spPr>
+          <a:xfrm>
+            <a:off x="6510528" y="1353312"/>
+            <a:ext cx="2432304" cy="292608"/>
+          </a:xfrm>
+          <a:prstGeom prst="rect">
+            <a:avLst/>
+          </a:prstGeom>
+          <a:solidFill>
+            <a:srgbClr val="007CC3"/>
+          </a:solidFill>
+          <a:ln/>
+        </p:spPr>
+      </p:sp>
+      <p:sp>
+        <p:nvSpPr>
+          <p:cNvPr id="43" name="Text 41"/>
+          <p:cNvSpPr/>
+          <p:nvPr/>
+        </p:nvSpPr>
+        <p:spPr>
+          <a:xfrm>
+            <a:off x="6638544" y="1353312"/>
+            <a:ext cx="2304288" cy="292608"/>
+          </a:xfrm>
+          <a:prstGeom prst="rect">
+            <a:avLst/>
+          </a:prstGeom>
+          <a:noFill/>
+          <a:ln/>
+        </p:spPr>
+        <p:txBody>
+          <a:bodyPr wrap="square" rtlCol="0" anchor="ctr"/>
+          <a:lstStyle/>
+          <a:p>
+            <a:pPr indent="0" marL="0">
+              <a:buNone/>
+            </a:pPr>
+            <a:r>
+              <a:rPr lang="en-US" sz="850" b="1" dirty="0">
+                <a:solidFill>
+                  <a:srgbClr val="FFFFFF"/>
+                </a:solidFill>
+                <a:latin typeface="Arial" pitchFamily="34" charset="0"/>
+                <a:ea typeface="Arial" pitchFamily="34" charset="-122"/>
+                <a:cs typeface="Arial" pitchFamily="34" charset="-120"/>
+              </a:rPr>
+              <a:t>WHAT COPILOT KNOWS</a:t>
+            </a:r>
+            <a:endParaRPr lang="en-US" sz="850" dirty="0"/>
+          </a:p>
+        </p:txBody>
+      </p:sp>
+      <p:sp>
+        <p:nvSpPr>
+          <p:cNvPr id="44" name="Shape 42"/>
+          <p:cNvSpPr/>
+          <p:nvPr/>
+        </p:nvSpPr>
+        <p:spPr>
+          <a:xfrm>
+            <a:off x="6675120" y="1810512"/>
+            <a:ext cx="64008" cy="64008"/>
+          </a:xfrm>
+          <a:prstGeom prst="ellipse">
+            <a:avLst/>
+          </a:prstGeom>
+          <a:solidFill>
+            <a:srgbClr val="007CC3"/>
+          </a:solidFill>
+          <a:ln/>
+        </p:spPr>
+      </p:sp>
+      <p:sp>
+        <p:nvSpPr>
+          <p:cNvPr id="45" name="Text 43"/>
+          <p:cNvSpPr/>
+          <p:nvPr/>
+        </p:nvSpPr>
+        <p:spPr>
+          <a:xfrm>
+            <a:off x="6803136" y="1755648"/>
+            <a:ext cx="2029968" cy="237744"/>
+          </a:xfrm>
+          <a:prstGeom prst="rect">
+            <a:avLst/>
+          </a:prstGeom>
+          <a:noFill/>
+          <a:ln/>
+        </p:spPr>
+        <p:txBody>
+          <a:bodyPr wrap="square" rtlCol="0" anchor="ctr"/>
+          <a:lstStyle/>
+          <a:p>
+            <a:pPr indent="0" marL="0">
+              <a:buNone/>
+            </a:pPr>
+            <a:r>
+              <a:rPr lang="en-US" sz="900" dirty="0">
+                <a:solidFill>
+                  <a:srgbClr val="595959"/>
+                </a:solidFill>
+                <a:latin typeface="Arial" pitchFamily="34" charset="0"/>
+                <a:ea typeface="Arial" pitchFamily="34" charset="-122"/>
+                <a:cs typeface="Arial" pitchFamily="34" charset="-120"/>
+              </a:rPr>
+              <a:t>117 documented engine operations</a:t>
+            </a:r>
+            <a:endParaRPr lang="en-US" sz="900" dirty="0"/>
+          </a:p>
+        </p:txBody>
+      </p:sp>
+      <p:sp>
+        <p:nvSpPr>
+          <p:cNvPr id="46" name="Shape 44"/>
+          <p:cNvSpPr/>
+          <p:nvPr/>
+        </p:nvSpPr>
+        <p:spPr>
+          <a:xfrm>
+            <a:off x="6675120" y="2048256"/>
+            <a:ext cx="64008" cy="64008"/>
+          </a:xfrm>
+          <a:prstGeom prst="ellipse">
+            <a:avLst/>
+          </a:prstGeom>
+          <a:solidFill>
+            <a:srgbClr val="007CC3"/>
+          </a:solidFill>
+          <a:ln/>
+        </p:spPr>
+      </p:sp>
+      <p:sp>
+        <p:nvSpPr>
+          <p:cNvPr id="47" name="Text 45"/>
+          <p:cNvSpPr/>
+          <p:nvPr/>
+        </p:nvSpPr>
+        <p:spPr>
+          <a:xfrm>
+            <a:off x="6803136" y="1993392"/>
+            <a:ext cx="2029968" cy="237744"/>
+          </a:xfrm>
+          <a:prstGeom prst="rect">
+            <a:avLst/>
+          </a:prstGeom>
+          <a:noFill/>
+          <a:ln/>
+        </p:spPr>
+        <p:txBody>
+          <a:bodyPr wrap="square" rtlCol="0" anchor="ctr"/>
+          <a:lstStyle/>
+          <a:p>
+            <a:pPr indent="0" marL="0">
+              <a:buNone/>
+            </a:pPr>
+            <a:r>
+              <a:rPr lang="en-US" sz="900" dirty="0">
+                <a:solidFill>
+                  <a:srgbClr val="595959"/>
+                </a:solidFill>
+                <a:latin typeface="Arial" pitchFamily="34" charset="0"/>
+                <a:ea typeface="Arial" pitchFamily="34" charset="-122"/>
+                <a:cs typeface="Arial" pitchFamily="34" charset="-120"/>
+              </a:rPr>
+              <a:t>50+ ServiceNow domain topics</a:t>
+            </a:r>
+            <a:endParaRPr lang="en-US" sz="900" dirty="0"/>
+          </a:p>
+        </p:txBody>
+      </p:sp>
+      <p:sp>
+        <p:nvSpPr>
+          <p:cNvPr id="48" name="Shape 46"/>
+          <p:cNvSpPr/>
+          <p:nvPr/>
+        </p:nvSpPr>
+        <p:spPr>
+          <a:xfrm>
+            <a:off x="6675120" y="2286000"/>
+            <a:ext cx="64008" cy="64008"/>
+          </a:xfrm>
+          <a:prstGeom prst="ellipse">
+            <a:avLst/>
+          </a:prstGeom>
+          <a:solidFill>
+            <a:srgbClr val="007CC3"/>
+          </a:solidFill>
+          <a:ln/>
+        </p:spPr>
+      </p:sp>
+      <p:sp>
+        <p:nvSpPr>
+          <p:cNvPr id="49" name="Text 47"/>
+          <p:cNvSpPr/>
+          <p:nvPr/>
+        </p:nvSpPr>
+        <p:spPr>
+          <a:xfrm>
+            <a:off x="6803136" y="2231136"/>
+            <a:ext cx="2029968" cy="237744"/>
+          </a:xfrm>
+          <a:prstGeom prst="rect">
+            <a:avLst/>
+          </a:prstGeom>
+          <a:noFill/>
+          <a:ln/>
+        </p:spPr>
+        <p:txBody>
+          <a:bodyPr wrap="square" rtlCol="0" anchor="ctr"/>
+          <a:lstStyle/>
+          <a:p>
+            <a:pPr indent="0" marL="0">
+              <a:buNone/>
+            </a:pPr>
+            <a:r>
+              <a:rPr lang="en-US" sz="900" dirty="0">
+                <a:solidFill>
+                  <a:srgbClr val="595959"/>
+                </a:solidFill>
+                <a:latin typeface="Arial" pitchFamily="34" charset="0"/>
+                <a:ea typeface="Arial" pitchFamily="34" charset="-122"/>
+                <a:cs typeface="Arial" pitchFamily="34" charset="-120"/>
+              </a:rPr>
+              <a:t>Full architecture and data model</a:t>
+            </a:r>
+            <a:endParaRPr lang="en-US" sz="900" dirty="0"/>
+          </a:p>
+        </p:txBody>
+      </p:sp>
+      <p:sp>
+        <p:nvSpPr>
+          <p:cNvPr id="50" name="Shape 48"/>
+          <p:cNvSpPr/>
+          <p:nvPr/>
+        </p:nvSpPr>
+        <p:spPr>
+          <a:xfrm>
+            <a:off x="6675120" y="2523744"/>
+            <a:ext cx="64008" cy="64008"/>
+          </a:xfrm>
+          <a:prstGeom prst="ellipse">
+            <a:avLst/>
+          </a:prstGeom>
+          <a:solidFill>
+            <a:srgbClr val="007CC3"/>
+          </a:solidFill>
+          <a:ln/>
+        </p:spPr>
+      </p:sp>
+      <p:sp>
+        <p:nvSpPr>
+          <p:cNvPr id="51" name="Text 49"/>
+          <p:cNvSpPr/>
+          <p:nvPr/>
+        </p:nvSpPr>
+        <p:spPr>
+          <a:xfrm>
+            <a:off x="6803136" y="2468880"/>
+            <a:ext cx="2029968" cy="237744"/>
+          </a:xfrm>
+          <a:prstGeom prst="rect">
+            <a:avLst/>
+          </a:prstGeom>
+          <a:noFill/>
+          <a:ln/>
+        </p:spPr>
+        <p:txBody>
+          <a:bodyPr wrap="square" rtlCol="0" anchor="ctr"/>
+          <a:lstStyle/>
+          <a:p>
+            <a:pPr indent="0" marL="0">
+              <a:buNone/>
+            </a:pPr>
+            <a:r>
+              <a:rPr lang="en-US" sz="900" dirty="0">
+                <a:solidFill>
+                  <a:srgbClr val="595959"/>
+                </a:solidFill>
+                <a:latin typeface="Arial" pitchFamily="34" charset="0"/>
+                <a:ea typeface="Arial" pitchFamily="34" charset="-122"/>
+                <a:cs typeface="Arial" pitchFamily="34" charset="-120"/>
+              </a:rPr>
+              <a:t>Canonical glossary and identifiers</a:t>
+            </a:r>
+            <a:endParaRPr lang="en-US" sz="900" dirty="0"/>
+          </a:p>
+        </p:txBody>
+      </p:sp>
+      <p:sp>
+        <p:nvSpPr>
+          <p:cNvPr id="52" name="Shape 50"/>
+          <p:cNvSpPr/>
+          <p:nvPr/>
+        </p:nvSpPr>
+        <p:spPr>
+          <a:xfrm>
+            <a:off x="6510528" y="2944368"/>
+            <a:ext cx="2432304" cy="1591056"/>
+          </a:xfrm>
+          <a:prstGeom prst="rect">
+            <a:avLst/>
+          </a:prstGeom>
+          <a:solidFill>
+            <a:srgbClr val="F5FAFF"/>
+          </a:solidFill>
+          <a:ln/>
+        </p:spPr>
+      </p:sp>
+      <p:sp>
+        <p:nvSpPr>
+          <p:cNvPr id="53" name="Shape 51"/>
+          <p:cNvSpPr/>
+          <p:nvPr/>
+        </p:nvSpPr>
+        <p:spPr>
+          <a:xfrm>
+            <a:off x="6510528" y="2944368"/>
+            <a:ext cx="2432304" cy="292608"/>
+          </a:xfrm>
+          <a:prstGeom prst="rect">
+            <a:avLst/>
+          </a:prstGeom>
+          <a:solidFill>
+            <a:srgbClr val="2670C3"/>
+          </a:solidFill>
+          <a:ln/>
+        </p:spPr>
+      </p:sp>
+      <p:sp>
+        <p:nvSpPr>
+          <p:cNvPr id="54" name="Text 52"/>
+          <p:cNvSpPr/>
+          <p:nvPr/>
+        </p:nvSpPr>
+        <p:spPr>
+          <a:xfrm>
+            <a:off x="6638544" y="2944368"/>
+            <a:ext cx="2304288" cy="292608"/>
+          </a:xfrm>
+          <a:prstGeom prst="rect">
+            <a:avLst/>
+          </a:prstGeom>
+          <a:noFill/>
+          <a:ln/>
+        </p:spPr>
+        <p:txBody>
+          <a:bodyPr wrap="square" rtlCol="0" anchor="ctr"/>
+          <a:lstStyle/>
+          <a:p>
+            <a:pPr indent="0" marL="0">
+              <a:buNone/>
+            </a:pPr>
+            <a:r>
+              <a:rPr lang="en-US" sz="850" b="1" dirty="0">
+                <a:solidFill>
+                  <a:srgbClr val="FFFFFF"/>
+                </a:solidFill>
+                <a:latin typeface="Arial" pitchFamily="34" charset="0"/>
+                <a:ea typeface="Arial" pitchFamily="34" charset="-122"/>
+                <a:cs typeface="Arial" pitchFamily="34" charset="-120"/>
+              </a:rPr>
+              <a:t>HOW TO USE</a:t>
+            </a:r>
+            <a:endParaRPr lang="en-US" sz="850" dirty="0"/>
+          </a:p>
+        </p:txBody>
+      </p:sp>
+      <p:sp>
+        <p:nvSpPr>
+          <p:cNvPr id="55" name="Shape 53"/>
+          <p:cNvSpPr/>
+          <p:nvPr/>
+        </p:nvSpPr>
+        <p:spPr>
+          <a:xfrm>
+            <a:off x="6675120" y="3401568"/>
+            <a:ext cx="64008" cy="64008"/>
+          </a:xfrm>
+          <a:prstGeom prst="rect">
+            <a:avLst/>
+          </a:prstGeom>
+          <a:solidFill>
+            <a:srgbClr val="2670C3"/>
+          </a:solidFill>
+          <a:ln/>
+        </p:spPr>
+      </p:sp>
+      <p:sp>
+        <p:nvSpPr>
+          <p:cNvPr id="56" name="Text 54"/>
+          <p:cNvSpPr/>
+          <p:nvPr/>
+        </p:nvSpPr>
+        <p:spPr>
+          <a:xfrm>
+            <a:off x="6803136" y="3346704"/>
+            <a:ext cx="2029968" cy="237744"/>
+          </a:xfrm>
+          <a:prstGeom prst="rect">
+            <a:avLst/>
+          </a:prstGeom>
+          <a:noFill/>
+          <a:ln/>
+        </p:spPr>
+        <p:txBody>
+          <a:bodyPr wrap="square" rtlCol="0" anchor="ctr"/>
+          <a:lstStyle/>
+          <a:p>
+            <a:pPr indent="0" marL="0">
+              <a:buNone/>
+            </a:pPr>
+            <a:r>
+              <a:rPr lang="en-US" sz="900" dirty="0">
+                <a:solidFill>
+                  <a:srgbClr val="595959"/>
+                </a:solidFill>
+                <a:latin typeface="Arial" pitchFamily="34" charset="0"/>
+                <a:ea typeface="Arial" pitchFamily="34" charset="-122"/>
+                <a:cs typeface="Arial" pitchFamily="34" charset="-120"/>
+              </a:rPr>
+              <a:t>Open repository in VS Code or GitHub</a:t>
+            </a:r>
+            <a:endParaRPr lang="en-US" sz="900" dirty="0"/>
+          </a:p>
+        </p:txBody>
+      </p:sp>
+      <p:sp>
+        <p:nvSpPr>
+          <p:cNvPr id="57" name="Shape 55"/>
+          <p:cNvSpPr/>
+          <p:nvPr/>
+        </p:nvSpPr>
+        <p:spPr>
+          <a:xfrm>
+            <a:off x="6675120" y="3639312"/>
+            <a:ext cx="64008" cy="64008"/>
+          </a:xfrm>
+          <a:prstGeom prst="rect">
+            <a:avLst/>
+          </a:prstGeom>
+          <a:solidFill>
+            <a:srgbClr val="2670C3"/>
+          </a:solidFill>
+          <a:ln/>
+        </p:spPr>
+      </p:sp>
+      <p:sp>
+        <p:nvSpPr>
+          <p:cNvPr id="58" name="Text 56"/>
+          <p:cNvSpPr/>
+          <p:nvPr/>
+        </p:nvSpPr>
+        <p:spPr>
+          <a:xfrm>
+            <a:off x="6803136" y="3584448"/>
+            <a:ext cx="2029968" cy="237744"/>
+          </a:xfrm>
+          <a:prstGeom prst="rect">
+            <a:avLst/>
+          </a:prstGeom>
+          <a:noFill/>
+          <a:ln/>
+        </p:spPr>
+        <p:txBody>
+          <a:bodyPr wrap="square" rtlCol="0" anchor="ctr"/>
+          <a:lstStyle/>
+          <a:p>
+            <a:pPr indent="0" marL="0">
+              <a:buNone/>
+            </a:pPr>
+            <a:r>
+              <a:rPr lang="en-US" sz="900" dirty="0">
+                <a:solidFill>
+                  <a:srgbClr val="595959"/>
+                </a:solidFill>
+                <a:latin typeface="Arial" pitchFamily="34" charset="0"/>
+                <a:ea typeface="Arial" pitchFamily="34" charset="-122"/>
+                <a:cs typeface="Arial" pitchFamily="34" charset="-120"/>
+              </a:rPr>
+              <a:t>Ensure GitHub Copilot is active</a:t>
+            </a:r>
+            <a:endParaRPr lang="en-US" sz="900" dirty="0"/>
+          </a:p>
+        </p:txBody>
+      </p:sp>
+      <p:sp>
+        <p:nvSpPr>
+          <p:cNvPr id="59" name="Shape 57"/>
+          <p:cNvSpPr/>
+          <p:nvPr/>
+        </p:nvSpPr>
+        <p:spPr>
+          <a:xfrm>
+            <a:off x="6675120" y="3877056"/>
+            <a:ext cx="64008" cy="64008"/>
+          </a:xfrm>
+          <a:prstGeom prst="rect">
+            <a:avLst/>
+          </a:prstGeom>
+          <a:solidFill>
+            <a:srgbClr val="2670C3"/>
+          </a:solidFill>
+          <a:ln/>
+        </p:spPr>
+      </p:sp>
+      <p:sp>
+        <p:nvSpPr>
+          <p:cNvPr id="60" name="Text 58"/>
+          <p:cNvSpPr/>
+          <p:nvPr/>
+        </p:nvSpPr>
+        <p:spPr>
+          <a:xfrm>
+            <a:off x="6803136" y="3822192"/>
+            <a:ext cx="2029968" cy="237744"/>
+          </a:xfrm>
+          <a:prstGeom prst="rect">
+            <a:avLst/>
+          </a:prstGeom>
+          <a:noFill/>
+          <a:ln/>
+        </p:spPr>
+        <p:txBody>
+          <a:bodyPr wrap="square" rtlCol="0" anchor="ctr"/>
+          <a:lstStyle/>
+          <a:p>
+            <a:pPr indent="0" marL="0">
+              <a:buNone/>
+            </a:pPr>
+            <a:r>
+              <a:rPr lang="en-US" sz="900" dirty="0">
+                <a:solidFill>
+                  <a:srgbClr val="595959"/>
+                </a:solidFill>
+                <a:latin typeface="Arial" pitchFamily="34" charset="0"/>
+                <a:ea typeface="Arial" pitchFamily="34" charset="-122"/>
+                <a:cs typeface="Arial" pitchFamily="34" charset="-120"/>
+              </a:rPr>
+              <a:t>Ask any question in plain English</a:t>
+            </a:r>
+            <a:endParaRPr lang="en-US" sz="900" dirty="0"/>
+          </a:p>
+        </p:txBody>
+      </p:sp>
+      <p:sp>
+        <p:nvSpPr>
+          <p:cNvPr id="61" name="Shape 59"/>
+          <p:cNvSpPr/>
+          <p:nvPr/>
+        </p:nvSpPr>
+        <p:spPr>
+          <a:xfrm>
+            <a:off x="6675120" y="4114800"/>
+            <a:ext cx="64008" cy="64008"/>
+          </a:xfrm>
+          <a:prstGeom prst="rect">
+            <a:avLst/>
+          </a:prstGeom>
+          <a:solidFill>
+            <a:srgbClr val="2670C3"/>
+          </a:solidFill>
+          <a:ln/>
+        </p:spPr>
+      </p:sp>
+      <p:sp>
+        <p:nvSpPr>
+          <p:cNvPr id="62" name="Text 60"/>
+          <p:cNvSpPr/>
+          <p:nvPr/>
+        </p:nvSpPr>
+        <p:spPr>
+          <a:xfrm>
+            <a:off x="6803136" y="4059936"/>
+            <a:ext cx="2029968" cy="237744"/>
+          </a:xfrm>
+          <a:prstGeom prst="rect">
+            <a:avLst/>
+          </a:prstGeom>
+          <a:noFill/>
+          <a:ln/>
+        </p:spPr>
+        <p:txBody>
+          <a:bodyPr wrap="square" rtlCol="0" anchor="ctr"/>
+          <a:lstStyle/>
+          <a:p>
+            <a:pPr indent="0" marL="0">
+              <a:buNone/>
+            </a:pPr>
+            <a:r>
+              <a:rPr lang="en-US" sz="900" dirty="0">
+                <a:solidFill>
+                  <a:srgbClr val="595959"/>
+                </a:solidFill>
+                <a:latin typeface="Arial" pitchFamily="34" charset="0"/>
+                <a:ea typeface="Arial" pitchFamily="34" charset="-122"/>
+                <a:cs typeface="Arial" pitchFamily="34" charset="-120"/>
+              </a:rPr>
+              <a:t>Copilot answers from the source</a:t>
+            </a:r>
+            <a:endParaRPr lang="en-US" sz="900" dirty="0"/>
+          </a:p>
+        </p:txBody>
+      </p:sp>
+      <p:pic>
+        <p:nvPicPr>
+          <p:cNvPr id="63" name="Image 0" descr="preencoded.png">    </p:cNvPr>
+          <p:cNvPicPr>
+            <a:picLocks noChangeAspect="1"/>
+          </p:cNvPicPr>
+          <p:nvPr/>
+        </p:nvPicPr>
+        <p:blipFill>
+          <a:blip r:embed="rId1"/>
+          <a:stretch>
+            <a:fillRect/>
+          </a:stretch>
+        </p:blipFill>
+        <p:spPr>
+          <a:xfrm>
+            <a:off x="8215884" y="4659782"/>
+            <a:ext cx="909645" cy="465247"/>
+          </a:xfrm>
+          <a:prstGeom prst="rect">
+            <a:avLst/>
+          </a:prstGeom>
+        </p:spPr>
+      </p:pic>
+      <p:sp>
+        <p:nvSpPr>
+          <p:cNvPr id="64" name="Text 61"/>
+          <p:cNvSpPr/>
+          <p:nvPr/>
+        </p:nvSpPr>
+        <p:spPr>
+          <a:xfrm>
+            <a:off x="228600" y="4754880"/>
+            <a:ext cx="466344" cy="283464"/>
+          </a:xfrm>
+          <a:prstGeom prst="rect">
+            <a:avLst/>
+          </a:prstGeom>
+          <a:noFill/>
+          <a:ln/>
+        </p:spPr>
+        <p:txBody>
+          <a:bodyPr wrap="square" rtlCol="0" anchor="ctr"/>
+          <a:lstStyle/>
+          <a:p>
+            <a:pPr indent="0" marL="0">
+              <a:buNone/>
+            </a:pPr>
+            <a:r>
+              <a:rPr lang="en-US" sz="1000" dirty="0">
+                <a:solidFill>
+                  <a:srgbClr val="B8B8B8"/>
+                </a:solidFill>
+                <a:latin typeface="Arial" pitchFamily="34" charset="0"/>
+                <a:ea typeface="Arial" pitchFamily="34" charset="-122"/>
+                <a:cs typeface="Arial" pitchFamily="34" charset="-120"/>
+              </a:rPr>
+              <a:t>10</a:t>
+            </a:r>
+            <a:endParaRPr lang="en-US" sz="1000" dirty="0"/>
+          </a:p>
+        </p:txBody>
+      </p:sp>
+    </p:spTree>
+  </p:cSld>
+  <p:clrMapOvr>
+    <a:masterClrMapping/>
+  </p:clrMapOvr>
+</p:sld>
+</file>
+
+<file path=ppt/slides/slide11.xml><?xml version="1.0" encoding="utf-8"?>
+<p:sld xmlns:a="http://schemas.openxmlformats.org/drawingml/2006/main" xmlns:r="http://schemas.openxmlformats.org/officeDocument/2006/relationships" xmlns:p="http://schemas.openxmlformats.org/presentationml/2006/main">
+  <p:cSld name="Slide 11">
+    <p:bg>
+      <p:bgPr>
+        <a:solidFill>
+          <a:srgbClr val="FFFFFF"/>
+        </a:solidFill>
+      </p:bgPr>
+    </p:bg>
+    <p:spTree>
+      <p:nvGrpSpPr>
+        <p:cNvPr id="1" name=""/>
+        <p:cNvGrpSpPr/>
+        <p:nvPr/>
+      </p:nvGrpSpPr>
+      <p:grpSpPr>
+        <a:xfrm>
+          <a:off x="0" y="0"/>
+          <a:ext cx="0" cy="0"/>
+          <a:chOff x="0" y="0"/>
+          <a:chExt cx="0" cy="0"/>
+        </a:xfrm>
+      </p:grpSpPr>
+      <p:sp>
+        <p:nvSpPr>
+          <p:cNvPr id="2" name="Text 0"/>
+          <p:cNvSpPr/>
+          <p:nvPr/>
+        </p:nvSpPr>
+        <p:spPr>
+          <a:xfrm>
             <a:off x="1051560" y="1289304"/>
             <a:ext cx="3172968" cy="676656"/>
           </a:xfrm>
@@ -2802,7 +4781,7 @@
               <a:buNone/>
             </a:pPr>
             <a:r>
-              <a:rPr lang="en-US" sz="2800" dirty="0">
+              <a:rPr lang="en-US" sz="2600" dirty="0">
                 <a:solidFill>
                   <a:srgbClr val="007CC3"/>
                 </a:solidFill>
@@ -2812,7 +4791,7 @@
               </a:rPr>
               <a:t>01</a:t>
             </a:r>
-            <a:endParaRPr lang="en-US" sz="2800" dirty="0"/>
+            <a:endParaRPr lang="en-US" sz="2600" dirty="0"/>
           </a:p>
         </p:txBody>
       </p:sp>
@@ -2863,7 +4842,7 @@
         </p:nvSpPr>
         <p:spPr>
           <a:xfrm>
-            <a:off x="201168" y="1627632"/>
+            <a:off x="201168" y="1609344"/>
             <a:ext cx="4279392" cy="10973"/>
           </a:xfrm>
           <a:prstGeom prst="rect">
@@ -2883,7 +4862,7 @@
         </p:nvSpPr>
         <p:spPr>
           <a:xfrm>
-            <a:off x="201168" y="1792224"/>
+            <a:off x="201168" y="1755648"/>
             <a:ext cx="713232" cy="804672"/>
           </a:xfrm>
           <a:prstGeom prst="rect">
@@ -2900,7 +4879,7 @@
               <a:buNone/>
             </a:pPr>
             <a:r>
-              <a:rPr lang="en-US" sz="2800" dirty="0">
+              <a:rPr lang="en-US" sz="2600" dirty="0">
                 <a:solidFill>
                   <a:srgbClr val="007CC3"/>
                 </a:solidFill>
@@ -2910,7 +4889,7 @@
               </a:rPr>
               <a:t>02</a:t>
             </a:r>
-            <a:endParaRPr lang="en-US" sz="2800" dirty="0"/>
+            <a:endParaRPr lang="en-US" sz="2600" dirty="0"/>
           </a:p>
         </p:txBody>
       </p:sp>
@@ -2922,7 +4901,7 @@
         </p:nvSpPr>
         <p:spPr>
           <a:xfrm>
-            <a:off x="950976" y="1956816"/>
+            <a:off x="950976" y="1920240"/>
             <a:ext cx="3529584" cy="475488"/>
           </a:xfrm>
           <a:prstGeom prst="rect">
@@ -2961,7 +4940,7 @@
         </p:nvSpPr>
         <p:spPr>
           <a:xfrm>
-            <a:off x="201168" y="2651760"/>
+            <a:off x="201168" y="2596896"/>
             <a:ext cx="4279392" cy="10973"/>
           </a:xfrm>
           <a:prstGeom prst="rect">
@@ -2981,7 +4960,7 @@
         </p:nvSpPr>
         <p:spPr>
           <a:xfrm>
-            <a:off x="201168" y="2816352"/>
+            <a:off x="201168" y="2743200"/>
             <a:ext cx="713232" cy="804672"/>
           </a:xfrm>
           <a:prstGeom prst="rect">
@@ -2998,7 +4977,7 @@
               <a:buNone/>
             </a:pPr>
             <a:r>
-              <a:rPr lang="en-US" sz="2800" dirty="0">
+              <a:rPr lang="en-US" sz="2600" dirty="0">
                 <a:solidFill>
                   <a:srgbClr val="007CC3"/>
                 </a:solidFill>
@@ -3008,7 +4987,7 @@
               </a:rPr>
               <a:t>03</a:t>
             </a:r>
-            <a:endParaRPr lang="en-US" sz="2800" dirty="0"/>
+            <a:endParaRPr lang="en-US" sz="2600" dirty="0"/>
           </a:p>
         </p:txBody>
       </p:sp>
@@ -3020,7 +4999,7 @@
         </p:nvSpPr>
         <p:spPr>
           <a:xfrm>
-            <a:off x="950976" y="2980944"/>
+            <a:off x="950976" y="2907792"/>
             <a:ext cx="3529584" cy="475488"/>
           </a:xfrm>
           <a:prstGeom prst="rect">
@@ -3059,7 +5038,7 @@
         </p:nvSpPr>
         <p:spPr>
           <a:xfrm>
-            <a:off x="201168" y="3675888"/>
+            <a:off x="201168" y="3584448"/>
             <a:ext cx="4279392" cy="10973"/>
           </a:xfrm>
           <a:prstGeom prst="rect">
@@ -3079,7 +5058,7 @@
         </p:nvSpPr>
         <p:spPr>
           <a:xfrm>
-            <a:off x="201168" y="3840480"/>
+            <a:off x="201168" y="3730752"/>
             <a:ext cx="713232" cy="804672"/>
           </a:xfrm>
           <a:prstGeom prst="rect">
@@ -3096,7 +5075,7 @@
               <a:buNone/>
             </a:pPr>
             <a:r>
-              <a:rPr lang="en-US" sz="2800" dirty="0">
+              <a:rPr lang="en-US" sz="2600" dirty="0">
                 <a:solidFill>
                   <a:srgbClr val="007CC3"/>
                 </a:solidFill>
@@ -3106,7 +5085,7 @@
               </a:rPr>
               <a:t>04</a:t>
             </a:r>
-            <a:endParaRPr lang="en-US" sz="2800" dirty="0"/>
+            <a:endParaRPr lang="en-US" sz="2600" dirty="0"/>
           </a:p>
         </p:txBody>
       </p:sp>
@@ -3118,7 +5097,7 @@
         </p:nvSpPr>
         <p:spPr>
           <a:xfrm>
-            <a:off x="950976" y="4005072"/>
+            <a:off x="950976" y="3895344"/>
             <a:ext cx="3529584" cy="475488"/>
           </a:xfrm>
           <a:prstGeom prst="rect">
@@ -3157,7 +5136,7 @@
         </p:nvSpPr>
         <p:spPr>
           <a:xfrm>
-            <a:off x="201168" y="4700016"/>
+            <a:off x="201168" y="4572000"/>
             <a:ext cx="4279392" cy="10973"/>
           </a:xfrm>
           <a:prstGeom prst="rect">
@@ -3194,7 +5173,7 @@
               <a:buNone/>
             </a:pPr>
             <a:r>
-              <a:rPr lang="en-US" sz="2800" dirty="0">
+              <a:rPr lang="en-US" sz="2600" dirty="0">
                 <a:solidFill>
                   <a:srgbClr val="007CC3"/>
                 </a:solidFill>
@@ -3204,7 +5183,7 @@
               </a:rPr>
               <a:t>05</a:t>
             </a:r>
-            <a:endParaRPr lang="en-US" sz="2800" dirty="0"/>
+            <a:endParaRPr lang="en-US" sz="2600" dirty="0"/>
           </a:p>
         </p:txBody>
       </p:sp>
@@ -3255,7 +5234,7 @@
         </p:nvSpPr>
         <p:spPr>
           <a:xfrm>
-            <a:off x="4663440" y="1627632"/>
+            <a:off x="4663440" y="1609344"/>
             <a:ext cx="4279392" cy="10973"/>
           </a:xfrm>
           <a:prstGeom prst="rect">
@@ -3275,7 +5254,7 @@
         </p:nvSpPr>
         <p:spPr>
           <a:xfrm>
-            <a:off x="4663440" y="1792224"/>
+            <a:off x="4663440" y="1755648"/>
             <a:ext cx="713232" cy="804672"/>
           </a:xfrm>
           <a:prstGeom prst="rect">
@@ -3292,7 +5271,7 @@
               <a:buNone/>
             </a:pPr>
             <a:r>
-              <a:rPr lang="en-US" sz="2800" dirty="0">
+              <a:rPr lang="en-US" sz="2600" dirty="0">
                 <a:solidFill>
                   <a:srgbClr val="007CC3"/>
                 </a:solidFill>
@@ -3302,7 +5281,7 @@
               </a:rPr>
               <a:t>06</a:t>
             </a:r>
-            <a:endParaRPr lang="en-US" sz="2800" dirty="0"/>
+            <a:endParaRPr lang="en-US" sz="2600" dirty="0"/>
           </a:p>
         </p:txBody>
       </p:sp>
@@ -3314,7 +5293,7 @@
         </p:nvSpPr>
         <p:spPr>
           <a:xfrm>
-            <a:off x="5413248" y="1956816"/>
+            <a:off x="5413248" y="1920240"/>
             <a:ext cx="3529584" cy="475488"/>
           </a:xfrm>
           <a:prstGeom prst="rect">
@@ -3339,7 +5318,7 @@
                 <a:ea typeface="Arial" pitchFamily="34" charset="-122"/>
                 <a:cs typeface="Arial" pitchFamily="34" charset="-120"/>
               </a:rPr>
-              <a:t>Prototype — Week 1 Progress</a:t>
+              <a:t>Prototype — Current Progress</a:t>
             </a:r>
             <a:endParaRPr lang="en-US" sz="1100" dirty="0"/>
           </a:p>
@@ -3353,7 +5332,7 @@
         </p:nvSpPr>
         <p:spPr>
           <a:xfrm>
-            <a:off x="4663440" y="2651760"/>
+            <a:off x="4663440" y="2596896"/>
             <a:ext cx="4279392" cy="10973"/>
           </a:xfrm>
           <a:prstGeom prst="rect">
@@ -3373,7 +5352,7 @@
         </p:nvSpPr>
         <p:spPr>
           <a:xfrm>
-            <a:off x="4663440" y="2816352"/>
+            <a:off x="4663440" y="2743200"/>
             <a:ext cx="713232" cy="804672"/>
           </a:xfrm>
           <a:prstGeom prst="rect">
@@ -3390,7 +5369,7 @@
               <a:buNone/>
             </a:pPr>
             <a:r>
-              <a:rPr lang="en-US" sz="2800" dirty="0">
+              <a:rPr lang="en-US" sz="2600" dirty="0">
                 <a:solidFill>
                   <a:srgbClr val="007CC3"/>
                 </a:solidFill>
@@ -3400,7 +5379,7 @@
               </a:rPr>
               <a:t>07</a:t>
             </a:r>
-            <a:endParaRPr lang="en-US" sz="2800" dirty="0"/>
+            <a:endParaRPr lang="en-US" sz="2600" dirty="0"/>
           </a:p>
         </p:txBody>
       </p:sp>
@@ -3412,7 +5391,7 @@
         </p:nvSpPr>
         <p:spPr>
           <a:xfrm>
-            <a:off x="5413248" y="2980944"/>
+            <a:off x="5413248" y="2907792"/>
             <a:ext cx="3529584" cy="475488"/>
           </a:xfrm>
           <a:prstGeom prst="rect">
@@ -3437,6 +5416,104 @@
                 <a:ea typeface="Arial" pitchFamily="34" charset="-122"/>
                 <a:cs typeface="Arial" pitchFamily="34" charset="-120"/>
               </a:rPr>
+              <a:t>Development Roadmap</a:t>
+            </a:r>
+            <a:endParaRPr lang="en-US" sz="1100" dirty="0"/>
+          </a:p>
+        </p:txBody>
+      </p:sp>
+      <p:sp>
+        <p:nvSpPr>
+          <p:cNvPr id="26" name="Shape 24"/>
+          <p:cNvSpPr/>
+          <p:nvPr/>
+        </p:nvSpPr>
+        <p:spPr>
+          <a:xfrm>
+            <a:off x="4663440" y="3584448"/>
+            <a:ext cx="4279392" cy="10973"/>
+          </a:xfrm>
+          <a:prstGeom prst="rect">
+            <a:avLst/>
+          </a:prstGeom>
+          <a:solidFill>
+            <a:srgbClr val="D9D9D9"/>
+          </a:solidFill>
+          <a:ln/>
+        </p:spPr>
+      </p:sp>
+      <p:sp>
+        <p:nvSpPr>
+          <p:cNvPr id="27" name="Text 25"/>
+          <p:cNvSpPr/>
+          <p:nvPr/>
+        </p:nvSpPr>
+        <p:spPr>
+          <a:xfrm>
+            <a:off x="4663440" y="3730752"/>
+            <a:ext cx="713232" cy="804672"/>
+          </a:xfrm>
+          <a:prstGeom prst="rect">
+            <a:avLst/>
+          </a:prstGeom>
+          <a:noFill/>
+          <a:ln/>
+        </p:spPr>
+        <p:txBody>
+          <a:bodyPr wrap="square" rtlCol="0" anchor="ctr"/>
+          <a:lstStyle/>
+          <a:p>
+            <a:pPr algn="ctr" indent="0" marL="0">
+              <a:buNone/>
+            </a:pPr>
+            <a:r>
+              <a:rPr lang="en-US" sz="2600" dirty="0">
+                <a:solidFill>
+                  <a:srgbClr val="007CC3"/>
+                </a:solidFill>
+                <a:latin typeface="Arial" pitchFamily="34" charset="0"/>
+                <a:ea typeface="Arial" pitchFamily="34" charset="-122"/>
+                <a:cs typeface="Arial" pitchFamily="34" charset="-120"/>
+              </a:rPr>
+              <a:t>08</a:t>
+            </a:r>
+            <a:endParaRPr lang="en-US" sz="2600" dirty="0"/>
+          </a:p>
+        </p:txBody>
+      </p:sp>
+      <p:sp>
+        <p:nvSpPr>
+          <p:cNvPr id="28" name="Text 26"/>
+          <p:cNvSpPr/>
+          <p:nvPr/>
+        </p:nvSpPr>
+        <p:spPr>
+          <a:xfrm>
+            <a:off x="5413248" y="3895344"/>
+            <a:ext cx="3529584" cy="475488"/>
+          </a:xfrm>
+          <a:prstGeom prst="rect">
+            <a:avLst/>
+          </a:prstGeom>
+          <a:noFill/>
+          <a:ln/>
+        </p:spPr>
+        <p:txBody>
+          <a:bodyPr wrap="square" rtlCol="0" anchor="ctr"/>
+          <a:lstStyle/>
+          <a:p>
+            <a:pPr indent="0" marL="0">
+              <a:buNone/>
+            </a:pPr>
+            <a:r>
+              <a:rPr lang="en-US" sz="1100" dirty="0">
+                <a:solidFill>
+                  <a:srgbClr val="595959"/>
+                </a:solidFill>
+                <a:latin typeface="Arial" pitchFamily="34" charset="0"/>
+                <a:ea typeface="Arial" pitchFamily="34" charset="-122"/>
+                <a:cs typeface="Arial" pitchFamily="34" charset="-120"/>
+              </a:rPr>
               <a:t>Source Repository</a:t>
             </a:r>
             <a:endParaRPr lang="en-US" sz="1100" dirty="0"/>
@@ -3445,13 +5522,13 @@
       </p:sp>
       <p:sp>
         <p:nvSpPr>
-          <p:cNvPr id="26" name="Shape 24"/>
-          <p:cNvSpPr/>
-          <p:nvPr/>
-        </p:nvSpPr>
-        <p:spPr>
-          <a:xfrm>
-            <a:off x="4663440" y="3675888"/>
+          <p:cNvPr id="29" name="Shape 27"/>
+          <p:cNvSpPr/>
+          <p:nvPr/>
+        </p:nvSpPr>
+        <p:spPr>
+          <a:xfrm>
+            <a:off x="4663440" y="4572000"/>
             <a:ext cx="4279392" cy="10973"/>
           </a:xfrm>
           <a:prstGeom prst="rect">
@@ -3465,7 +5542,7 @@
       </p:sp>
       <p:pic>
         <p:nvPicPr>
-          <p:cNvPr id="27" name="Image 0" descr="preencoded.png">    </p:cNvPr>
+          <p:cNvPr id="30" name="Image 0" descr="preencoded.png">    </p:cNvPr>
           <p:cNvPicPr>
             <a:picLocks noChangeAspect="1"/>
           </p:cNvPicPr>
@@ -3489,7 +5566,7 @@
       </p:pic>
       <p:sp>
         <p:nvSpPr>
-          <p:cNvPr id="28" name="Text 25"/>
+          <p:cNvPr id="31" name="Text 28"/>
           <p:cNvSpPr/>
           <p:nvPr/>
         </p:nvSpPr>
@@ -3803,8 +5880,8 @@
         </p:nvSpPr>
         <p:spPr>
           <a:xfrm>
-            <a:off x="4242816" y="2423160"/>
-            <a:ext cx="658368" cy="402336"/>
+            <a:off x="4242816" y="2404872"/>
+            <a:ext cx="658368" cy="438912"/>
           </a:xfrm>
           <a:prstGeom prst="rect">
             <a:avLst/>
@@ -3820,7 +5897,7 @@
               <a:buNone/>
             </a:pPr>
             <a:r>
-              <a:rPr lang="en-US" sz="2200" b="1" dirty="0">
+              <a:rPr lang="en-US" sz="2400" b="1" dirty="0">
                 <a:solidFill>
                   <a:srgbClr val="007CC3"/>
                 </a:solidFill>
@@ -3830,7 +5907,7 @@
               </a:rPr>
               <a:t>→</a:t>
             </a:r>
-            <a:endParaRPr lang="en-US" sz="2200" dirty="0"/>
+            <a:endParaRPr lang="en-US" sz="2400" dirty="0"/>
           </a:p>
         </p:txBody>
       </p:sp>
@@ -3842,7 +5919,7 @@
         </p:nvSpPr>
         <p:spPr>
           <a:xfrm>
-            <a:off x="347472" y="1225296"/>
+            <a:off x="365760" y="1280160"/>
             <a:ext cx="91440" cy="91440"/>
           </a:xfrm>
           <a:prstGeom prst="rect">
@@ -3862,8 +5939,8 @@
         </p:nvSpPr>
         <p:spPr>
           <a:xfrm>
-            <a:off x="512064" y="1133856"/>
-            <a:ext cx="3621024" cy="585216"/>
+            <a:off x="530352" y="1170432"/>
+            <a:ext cx="3602736" cy="566928"/>
           </a:xfrm>
           <a:prstGeom prst="rect">
             <a:avLst/>
@@ -3877,7 +5954,7 @@
           <a:p>
             <a:pPr indent="0" marL="0">
               <a:lnSpc>
-                <a:spcPct val="118000"/>
+                <a:spcPct val="120000"/>
               </a:lnSpc>
               <a:buNone/>
             </a:pPr>
@@ -3890,7 +5967,7 @@
                 <a:ea typeface="Arial" pitchFamily="34" charset="-122"/>
                 <a:cs typeface="Arial" pitchFamily="34" charset="-120"/>
               </a:rPr>
-              <a:t>Operations tasks rebuilt manually each cycle — no established automation path</a:t>
+              <a:t>Operations tasks rebuilt manually every cycle — no automation path exists</a:t>
             </a:r>
             <a:endParaRPr lang="en-US" sz="950" dirty="0"/>
           </a:p>
@@ -3904,7 +5981,7 @@
         </p:nvSpPr>
         <p:spPr>
           <a:xfrm>
-            <a:off x="347472" y="1975104"/>
+            <a:off x="365760" y="2029968"/>
             <a:ext cx="91440" cy="91440"/>
           </a:xfrm>
           <a:prstGeom prst="rect">
@@ -3924,8 +6001,8 @@
         </p:nvSpPr>
         <p:spPr>
           <a:xfrm>
-            <a:off x="512064" y="1883664"/>
-            <a:ext cx="3621024" cy="585216"/>
+            <a:off x="530352" y="1920240"/>
+            <a:ext cx="3602736" cy="566928"/>
           </a:xfrm>
           <a:prstGeom prst="rect">
             <a:avLst/>
@@ -3939,7 +6016,7 @@
           <a:p>
             <a:pPr indent="0" marL="0">
               <a:lnSpc>
-                <a:spcPct val="118000"/>
+                <a:spcPct val="120000"/>
               </a:lnSpc>
               <a:buNone/>
             </a:pPr>
@@ -3952,7 +6029,7 @@
                 <a:ea typeface="Arial" pitchFamily="34" charset="-122"/>
                 <a:cs typeface="Arial" pitchFamily="34" charset="-120"/>
               </a:rPr>
-              <a:t>Virtual Agent and automation capabilities inactive across all teams</a:t>
+              <a:t>Virtual Agent and platform automation capabilities entirely unused</a:t>
             </a:r>
             <a:endParaRPr lang="en-US" sz="950" dirty="0"/>
           </a:p>
@@ -3966,7 +6043,7 @@
         </p:nvSpPr>
         <p:spPr>
           <a:xfrm>
-            <a:off x="347472" y="2724912"/>
+            <a:off x="365760" y="2779776"/>
             <a:ext cx="91440" cy="91440"/>
           </a:xfrm>
           <a:prstGeom prst="rect">
@@ -3986,8 +6063,8 @@
         </p:nvSpPr>
         <p:spPr>
           <a:xfrm>
-            <a:off x="512064" y="2633472"/>
-            <a:ext cx="3621024" cy="585216"/>
+            <a:off x="530352" y="2670048"/>
+            <a:ext cx="3602736" cy="566928"/>
           </a:xfrm>
           <a:prstGeom prst="rect">
             <a:avLst/>
@@ -4001,7 +6078,7 @@
           <a:p>
             <a:pPr indent="0" marL="0">
               <a:lnSpc>
-                <a:spcPct val="118000"/>
+                <a:spcPct val="120000"/>
               </a:lnSpc>
               <a:buNone/>
             </a:pPr>
@@ -4014,7 +6091,7 @@
                 <a:ea typeface="Arial" pitchFamily="34" charset="-122"/>
                 <a:cs typeface="Arial" pitchFamily="34" charset="-120"/>
               </a:rPr>
-              <a:t>Data reconciliation between ServiceNow and external sources requires manual field matching</a:t>
+              <a:t>Data reconciliation between ServiceNow and external sources is manual</a:t>
             </a:r>
             <a:endParaRPr lang="en-US" sz="950" dirty="0"/>
           </a:p>
@@ -4028,7 +6105,7 @@
         </p:nvSpPr>
         <p:spPr>
           <a:xfrm>
-            <a:off x="347472" y="3474720"/>
+            <a:off x="365760" y="3529584"/>
             <a:ext cx="91440" cy="91440"/>
           </a:xfrm>
           <a:prstGeom prst="rect">
@@ -4048,8 +6125,8 @@
         </p:nvSpPr>
         <p:spPr>
           <a:xfrm>
-            <a:off x="512064" y="3383280"/>
-            <a:ext cx="3621024" cy="585216"/>
+            <a:off x="530352" y="3419856"/>
+            <a:ext cx="3602736" cy="566928"/>
           </a:xfrm>
           <a:prstGeom prst="rect">
             <a:avLst/>
@@ -4063,7 +6140,7 @@
           <a:p>
             <a:pPr indent="0" marL="0">
               <a:lnSpc>
-                <a:spcPct val="118000"/>
+                <a:spcPct val="120000"/>
               </a:lnSpc>
               <a:buNone/>
             </a:pPr>
@@ -4076,7 +6153,7 @@
                 <a:ea typeface="Arial" pitchFamily="34" charset="-122"/>
                 <a:cs typeface="Arial" pitchFamily="34" charset="-120"/>
               </a:rPr>
-              <a:t>Platform expertise concentrated in specific individuals, creating resource dependency</a:t>
+              <a:t>Platform expertise held by a small number of individuals across all teams</a:t>
             </a:r>
             <a:endParaRPr lang="en-US" sz="950" dirty="0"/>
           </a:p>
@@ -4090,7 +6167,7 @@
         </p:nvSpPr>
         <p:spPr>
           <a:xfrm>
-            <a:off x="5065776" y="1225296"/>
+            <a:off x="5084064" y="1280160"/>
             <a:ext cx="91440" cy="91440"/>
           </a:xfrm>
           <a:prstGeom prst="ellipse">
@@ -4110,8 +6187,8 @@
         </p:nvSpPr>
         <p:spPr>
           <a:xfrm>
-            <a:off x="5230368" y="1133856"/>
-            <a:ext cx="3621024" cy="585216"/>
+            <a:off x="5248656" y="1170432"/>
+            <a:ext cx="3602736" cy="566928"/>
           </a:xfrm>
           <a:prstGeom prst="rect">
             <a:avLst/>
@@ -4125,7 +6202,7 @@
           <a:p>
             <a:pPr indent="0" marL="0">
               <a:lnSpc>
-                <a:spcPct val="118000"/>
+                <a:spcPct val="120000"/>
               </a:lnSpc>
               <a:buNone/>
             </a:pPr>
@@ -4138,7 +6215,7 @@
                 <a:ea typeface="Arial" pitchFamily="34" charset="-122"/>
                 <a:cs typeface="Arial" pitchFamily="34" charset="-120"/>
               </a:rPr>
-              <a:t>Any recurring task automated once executes permanently — manual rebuilds eliminated</a:t>
+              <a:t>Any recurring task automated once executes permanently on schedule</a:t>
             </a:r>
             <a:endParaRPr lang="en-US" sz="950" dirty="0"/>
           </a:p>
@@ -4152,7 +6229,7 @@
         </p:nvSpPr>
         <p:spPr>
           <a:xfrm>
-            <a:off x="5065776" y="1975104"/>
+            <a:off x="5084064" y="2029968"/>
             <a:ext cx="91440" cy="91440"/>
           </a:xfrm>
           <a:prstGeom prst="ellipse">
@@ -4172,8 +6249,8 @@
         </p:nvSpPr>
         <p:spPr>
           <a:xfrm>
-            <a:off x="5230368" y="1883664"/>
-            <a:ext cx="3621024" cy="585216"/>
+            <a:off x="5248656" y="1920240"/>
+            <a:ext cx="3602736" cy="566928"/>
           </a:xfrm>
           <a:prstGeom prst="rect">
             <a:avLst/>
@@ -4187,7 +6264,7 @@
           <a:p>
             <a:pPr indent="0" marL="0">
               <a:lnSpc>
-                <a:spcPct val="118000"/>
+                <a:spcPct val="120000"/>
               </a:lnSpc>
               <a:buNone/>
             </a:pPr>
@@ -4200,7 +6277,7 @@
                 <a:ea typeface="Arial" pitchFamily="34" charset="-122"/>
                 <a:cs typeface="Arial" pitchFamily="34" charset="-120"/>
               </a:rPr>
-              <a:t>Dedicated Virtual Agent provides natural-language access to all platform capabilities</a:t>
+              <a:t>A dedicated Virtual Agent provides natural-language access to all capabilities</a:t>
             </a:r>
             <a:endParaRPr lang="en-US" sz="950" dirty="0"/>
           </a:p>
@@ -4214,7 +6291,7 @@
         </p:nvSpPr>
         <p:spPr>
           <a:xfrm>
-            <a:off x="5065776" y="2724912"/>
+            <a:off x="5084064" y="2779776"/>
             <a:ext cx="91440" cy="91440"/>
           </a:xfrm>
           <a:prstGeom prst="ellipse">
@@ -4234,8 +6311,8 @@
         </p:nvSpPr>
         <p:spPr>
           <a:xfrm>
-            <a:off x="5230368" y="2633472"/>
-            <a:ext cx="3621024" cy="585216"/>
+            <a:off x="5248656" y="2670048"/>
+            <a:ext cx="3602736" cy="566928"/>
           </a:xfrm>
           <a:prstGeom prst="rect">
             <a:avLst/>
@@ -4249,7 +6326,7 @@
           <a:p>
             <a:pPr indent="0" marL="0">
               <a:lnSpc>
-                <a:spcPct val="118000"/>
+                <a:spcPct val="120000"/>
               </a:lnSpc>
               <a:buNone/>
             </a:pPr>
@@ -4262,7 +6339,7 @@
                 <a:ea typeface="Arial" pitchFamily="34" charset="-122"/>
                 <a:cs typeface="Arial" pitchFamily="34" charset="-120"/>
               </a:rPr>
-              <a:t>Automated consolidation layer maps and merges data sources without manual intervention</a:t>
+              <a:t>An automated layer maps and merges data sources without manual intervention</a:t>
             </a:r>
             <a:endParaRPr lang="en-US" sz="950" dirty="0"/>
           </a:p>
@@ -4276,7 +6353,7 @@
         </p:nvSpPr>
         <p:spPr>
           <a:xfrm>
-            <a:off x="5065776" y="3474720"/>
+            <a:off x="5084064" y="3529584"/>
             <a:ext cx="91440" cy="91440"/>
           </a:xfrm>
           <a:prstGeom prst="ellipse">
@@ -4296,8 +6373,8 @@
         </p:nvSpPr>
         <p:spPr>
           <a:xfrm>
-            <a:off x="5230368" y="3383280"/>
-            <a:ext cx="3621024" cy="585216"/>
+            <a:off x="5248656" y="3419856"/>
+            <a:ext cx="3602736" cy="566928"/>
           </a:xfrm>
           <a:prstGeom prst="rect">
             <a:avLst/>
@@ -4311,7 +6388,7 @@
           <a:p>
             <a:pPr indent="0" marL="0">
               <a:lnSpc>
-                <a:spcPct val="118000"/>
+                <a:spcPct val="120000"/>
               </a:lnSpc>
               <a:buNone/>
             </a:pPr>
@@ -4324,7 +6401,7 @@
                 <a:ea typeface="Arial" pitchFamily="34" charset="-122"/>
                 <a:cs typeface="Arial" pitchFamily="34" charset="-120"/>
               </a:rPr>
-              <a:t>Automation capability embedded in the system and equally accessible to all teams</a:t>
+              <a:t>Automation capability is embedded in the system and accessible to all teams</a:t>
             </a:r>
             <a:endParaRPr lang="en-US" sz="950" dirty="0"/>
           </a:p>
@@ -4645,7 +6722,7 @@
           <a:p>
             <a:pPr indent="0" marL="0">
               <a:lnSpc>
-                <a:spcPct val="118000"/>
+                <a:spcPct val="120000"/>
               </a:lnSpc>
               <a:buNone/>
             </a:pPr>
@@ -4658,7 +6735,7 @@
                 <a:ea typeface="Arial" pitchFamily="34" charset="-122"/>
                 <a:cs typeface="Arial" pitchFamily="34" charset="-120"/>
               </a:rPr>
-              <a:t>Software Asset Management teams export data from ServiceNow and Flexera independently. No common field headers exist, requiring manual data cleansing and reconciliation each cycle.</a:t>
+              <a:t>SAM teams export ServiceNow and Flexera data independently. No common field headers exist, requiring manual data cleansing and reconciliation each cycle.</a:t>
             </a:r>
             <a:endParaRPr lang="en-US" sz="900" dirty="0"/>
           </a:p>
@@ -4756,7 +6833,7 @@
                 <a:ea typeface="Arial" pitchFamily="34" charset="-122"/>
                 <a:cs typeface="Arial" pitchFamily="34" charset="-120"/>
               </a:rPr>
-              <a:t>SOLUTION:</a:t>
+              <a:t>SOLUTION</a:t>
             </a:r>
             <a:endParaRPr lang="en-US" sz="900" dirty="0"/>
           </a:p>
@@ -4785,7 +6862,7 @@
           <a:p>
             <a:pPr indent="0" marL="0">
               <a:lnSpc>
-                <a:spcPct val="118000"/>
+                <a:spcPct val="120000"/>
               </a:lnSpc>
               <a:buNone/>
             </a:pPr>
@@ -4798,7 +6875,7 @@
                 <a:ea typeface="Arial" pitchFamily="34" charset="-122"/>
                 <a:cs typeface="Arial" pitchFamily="34" charset="-120"/>
               </a:rPr>
-              <a:t>An automated consolidation layer maps field headers between both sources and merges outputs automatically, eliminating manual reconciliation and ensuring consistent reporting on demand.</a:t>
+              <a:t>An automated layer maps field headers across both sources and merges outputs automatically, eliminating manual reconciliation and ensuring consistent reporting.</a:t>
             </a:r>
             <a:endParaRPr lang="en-US" sz="900" dirty="0"/>
           </a:p>
@@ -4945,7 +7022,7 @@
           <a:p>
             <a:pPr indent="0" marL="0">
               <a:lnSpc>
-                <a:spcPct val="118000"/>
+                <a:spcPct val="120000"/>
               </a:lnSpc>
               <a:buNone/>
             </a:pPr>
@@ -4958,7 +7035,7 @@
                 <a:ea typeface="Arial" pitchFamily="34" charset="-122"/>
                 <a:cs typeface="Arial" pitchFamily="34" charset="-120"/>
               </a:rPr>
-              <a:t>The Virtual Agent SKU is enabled on all ServiceNow instances but no implementation has been carried out, leaving operations teams without a conversational interface to platform capabilities.</a:t>
+              <a:t>The Virtual Agent SKU is enabled on all instances but no implementation exists, leaving operations teams without a conversational interface to automation capabilities.</a:t>
             </a:r>
             <a:endParaRPr lang="en-US" sz="900" dirty="0"/>
           </a:p>
@@ -5056,7 +7133,7 @@
                 <a:ea typeface="Arial" pitchFamily="34" charset="-122"/>
                 <a:cs typeface="Arial" pitchFamily="34" charset="-120"/>
               </a:rPr>
-              <a:t>SOLUTION:</a:t>
+              <a:t>SOLUTION</a:t>
             </a:r>
             <a:endParaRPr lang="en-US" sz="900" dirty="0"/>
           </a:p>
@@ -5085,7 +7162,7 @@
           <a:p>
             <a:pPr indent="0" marL="0">
               <a:lnSpc>
-                <a:spcPct val="118000"/>
+                <a:spcPct val="120000"/>
               </a:lnSpc>
               <a:buNone/>
             </a:pPr>
@@ -5098,7 +7175,7 @@
                 <a:ea typeface="Arial" pitchFamily="34" charset="-122"/>
                 <a:cs typeface="Arial" pitchFamily="34" charset="-120"/>
               </a:rPr>
-              <a:t>Operations Intelligence implements the Virtual Agent as the primary interface for all automation requests, enabling every team member to create and manage automations through natural language.</a:t>
+              <a:t>Operations Intelligence deploys the Virtual Agent as the primary interface, enabling every team member to create and manage automations through natural language.</a:t>
             </a:r>
             <a:endParaRPr lang="en-US" sz="900" dirty="0"/>
           </a:p>
@@ -5245,7 +7322,7 @@
           <a:p>
             <a:pPr indent="0" marL="0">
               <a:lnSpc>
-                <a:spcPct val="118000"/>
+                <a:spcPct val="120000"/>
               </a:lnSpc>
               <a:buNone/>
             </a:pPr>
@@ -5258,7 +7335,7 @@
                 <a:ea typeface="Arial" pitchFamily="34" charset="-122"/>
                 <a:cs typeface="Arial" pitchFamily="34" charset="-120"/>
               </a:rPr>
-              <a:t>Reports, dashboards, and data extracts are rebuilt manually each operating cycle. The cumulative overhead displaces capacity that would otherwise be directed to project deliverables.</a:t>
+              <a:t>Reports, dashboards, and data extracts are rebuilt manually every cycle. The cumulative overhead displaces capacity that would otherwise reach project deliverables.</a:t>
             </a:r>
             <a:endParaRPr lang="en-US" sz="900" dirty="0"/>
           </a:p>
@@ -5356,7 +7433,7 @@
                 <a:ea typeface="Arial" pitchFamily="34" charset="-122"/>
                 <a:cs typeface="Arial" pitchFamily="34" charset="-120"/>
               </a:rPr>
-              <a:t>SOLUTION:</a:t>
+              <a:t>SOLUTION</a:t>
             </a:r>
             <a:endParaRPr lang="en-US" sz="900" dirty="0"/>
           </a:p>
@@ -5385,7 +7462,7 @@
           <a:p>
             <a:pPr indent="0" marL="0">
               <a:lnSpc>
-                <a:spcPct val="118000"/>
+                <a:spcPct val="120000"/>
               </a:lnSpc>
               <a:buNone/>
             </a:pPr>
@@ -5398,7 +7475,7 @@
                 <a:ea typeface="Arial" pitchFamily="34" charset="-122"/>
                 <a:cs typeface="Arial" pitchFamily="34" charset="-120"/>
               </a:rPr>
-              <a:t>Any recurring task requested once through Operations Intelligence is automated permanently. A single request eliminates the associated manual effort across all subsequent cycles.</a:t>
+              <a:t>Any recurring task requested once is automated on a permanent basis. A single request eliminates the associated manual effort across all subsequent cycles.</a:t>
             </a:r>
             <a:endParaRPr lang="en-US" sz="900" dirty="0"/>
           </a:p>
@@ -5545,7 +7622,7 @@
           <a:p>
             <a:pPr indent="0" marL="0">
               <a:lnSpc>
-                <a:spcPct val="118000"/>
+                <a:spcPct val="120000"/>
               </a:lnSpc>
               <a:buNone/>
             </a:pPr>
@@ -5558,7 +7635,7 @@
                 <a:ea typeface="Arial" pitchFamily="34" charset="-122"/>
                 <a:cs typeface="Arial" pitchFamily="34" charset="-120"/>
               </a:rPr>
-              <a:t>Operations staff can articulate blockers in business terms but cannot translate them into technical specifications, causing issues to remain unresolved before reaching an approver.</a:t>
+              <a:t>Staff can identify blockers in business terms but not translate them into technical specifications. Issues remain unresolved before reaching an approver.</a:t>
             </a:r>
             <a:endParaRPr lang="en-US" sz="900" dirty="0"/>
           </a:p>
@@ -5656,7 +7733,7 @@
                 <a:ea typeface="Arial" pitchFamily="34" charset="-122"/>
                 <a:cs typeface="Arial" pitchFamily="34" charset="-120"/>
               </a:rPr>
-              <a:t>SOLUTION:</a:t>
+              <a:t>SOLUTION</a:t>
             </a:r>
             <a:endParaRPr lang="en-US" sz="900" dirty="0"/>
           </a:p>
@@ -5685,7 +7762,7 @@
           <a:p>
             <a:pPr indent="0" marL="0">
               <a:lnSpc>
-                <a:spcPct val="118000"/>
+                <a:spcPct val="120000"/>
               </a:lnSpc>
               <a:buNone/>
             </a:pPr>
@@ -5698,7 +7775,7 @@
                 <a:ea typeface="Arial" pitchFamily="34" charset="-122"/>
                 <a:cs typeface="Arial" pitchFamily="34" charset="-120"/>
               </a:rPr>
-              <a:t>The Operations Assistant converts a plain-English description into a structured specification and routes it automatically to the appropriate approver, removing the dependency on technical mediation.</a:t>
+              <a:t>The Operations Assistant converts a plain-English description into a specification and routes it automatically to the appropriate approver for action.</a:t>
             </a:r>
             <a:endParaRPr lang="en-US" sz="900" dirty="0"/>
           </a:p>
@@ -5887,7 +7964,7 @@
         <p:spPr>
           <a:xfrm>
             <a:off x="201168" y="694944"/>
-            <a:ext cx="8741664" cy="694944"/>
+            <a:ext cx="8741664" cy="731520"/>
           </a:xfrm>
           <a:prstGeom prst="rect">
             <a:avLst/>
@@ -5906,7 +7983,7 @@
         </p:nvSpPr>
         <p:spPr>
           <a:xfrm>
-            <a:off x="201168" y="768096"/>
+            <a:off x="201168" y="786384"/>
             <a:ext cx="54864" cy="548640"/>
           </a:xfrm>
           <a:prstGeom prst="rect">
@@ -5926,8 +8003,8 @@
         </p:nvSpPr>
         <p:spPr>
           <a:xfrm>
-            <a:off x="365760" y="749808"/>
-            <a:ext cx="8467344" cy="237744"/>
+            <a:off x="384048" y="758952"/>
+            <a:ext cx="8449056" cy="237744"/>
           </a:xfrm>
           <a:prstGeom prst="rect">
             <a:avLst/>
@@ -5965,8 +8042,8 @@
         </p:nvSpPr>
         <p:spPr>
           <a:xfrm>
-            <a:off x="365760" y="1005840"/>
-            <a:ext cx="8467344" cy="329184"/>
+            <a:off x="384048" y="1024128"/>
+            <a:ext cx="8449056" cy="347472"/>
           </a:xfrm>
           <a:prstGeom prst="rect">
             <a:avLst/>
@@ -5980,7 +8057,7 @@
           <a:p>
             <a:pPr indent="0" marL="0">
               <a:lnSpc>
-                <a:spcPct val="118000"/>
+                <a:spcPct val="120000"/>
               </a:lnSpc>
               <a:buNone/>
             </a:pPr>
@@ -5993,7 +8070,7 @@
                 <a:ea typeface="Arial" pitchFamily="34" charset="-122"/>
                 <a:cs typeface="Arial" pitchFamily="34" charset="-120"/>
               </a:rPr>
-              <a:t>Any report, dashboard, notification, or data extract rebuilt manually each cycle is requested once and executed automatically on a permanent basis. The cost of the work moves from recurring to one-time.</a:t>
+              <a:t>Any report, dashboard, or extract rebuilt manually each cycle is requested once and automated on a permanent basis. The cost of the work moves from recurring to one-time.</a:t>
             </a:r>
             <a:endParaRPr lang="en-US" sz="950" dirty="0"/>
           </a:p>
@@ -6007,8 +8084,8 @@
         </p:nvSpPr>
         <p:spPr>
           <a:xfrm>
-            <a:off x="201168" y="1444752"/>
-            <a:ext cx="8741664" cy="694944"/>
+            <a:off x="201168" y="1481328"/>
+            <a:ext cx="8741664" cy="731520"/>
           </a:xfrm>
           <a:prstGeom prst="rect">
             <a:avLst/>
@@ -6027,7 +8104,7 @@
         </p:nvSpPr>
         <p:spPr>
           <a:xfrm>
-            <a:off x="201168" y="1517904"/>
+            <a:off x="201168" y="1572768"/>
             <a:ext cx="54864" cy="548640"/>
           </a:xfrm>
           <a:prstGeom prst="rect">
@@ -6047,8 +8124,8 @@
         </p:nvSpPr>
         <p:spPr>
           <a:xfrm>
-            <a:off x="365760" y="1499616"/>
-            <a:ext cx="8467344" cy="237744"/>
+            <a:off x="384048" y="1545336"/>
+            <a:ext cx="8449056" cy="237744"/>
           </a:xfrm>
           <a:prstGeom prst="rect">
             <a:avLst/>
@@ -6086,8 +8163,8 @@
         </p:nvSpPr>
         <p:spPr>
           <a:xfrm>
-            <a:off x="365760" y="1755648"/>
-            <a:ext cx="8467344" cy="329184"/>
+            <a:off x="384048" y="1810512"/>
+            <a:ext cx="8449056" cy="347472"/>
           </a:xfrm>
           <a:prstGeom prst="rect">
             <a:avLst/>
@@ -6101,7 +8178,7 @@
           <a:p>
             <a:pPr indent="0" marL="0">
               <a:lnSpc>
-                <a:spcPct val="118000"/>
+                <a:spcPct val="120000"/>
               </a:lnSpc>
               <a:buNone/>
             </a:pPr>
@@ -6114,7 +8191,7 @@
                 <a:ea typeface="Arial" pitchFamily="34" charset="-122"/>
                 <a:cs typeface="Arial" pitchFamily="34" charset="-120"/>
               </a:rPr>
-              <a:t>The Operations Assistant converts a requirement stated in plain English into a structured specification and routes it to the appropriate approver, removing the articulation barrier that strands issues today.</a:t>
+              <a:t>A requirement stated in plain English is converted into a specification and routed to the appropriate approver. The articulation barrier that strands issues today is removed.</a:t>
             </a:r>
             <a:endParaRPr lang="en-US" sz="950" dirty="0"/>
           </a:p>
@@ -6128,8 +8205,8 @@
         </p:nvSpPr>
         <p:spPr>
           <a:xfrm>
-            <a:off x="201168" y="2194560"/>
-            <a:ext cx="8741664" cy="694944"/>
+            <a:off x="201168" y="2267712"/>
+            <a:ext cx="8741664" cy="731520"/>
           </a:xfrm>
           <a:prstGeom prst="rect">
             <a:avLst/>
@@ -6148,7 +8225,7 @@
         </p:nvSpPr>
         <p:spPr>
           <a:xfrm>
-            <a:off x="201168" y="2267712"/>
+            <a:off x="201168" y="2359152"/>
             <a:ext cx="54864" cy="548640"/>
           </a:xfrm>
           <a:prstGeom prst="rect">
@@ -6168,8 +8245,8 @@
         </p:nvSpPr>
         <p:spPr>
           <a:xfrm>
-            <a:off x="365760" y="2249424"/>
-            <a:ext cx="8467344" cy="237744"/>
+            <a:off x="384048" y="2331720"/>
+            <a:ext cx="8449056" cy="237744"/>
           </a:xfrm>
           <a:prstGeom prst="rect">
             <a:avLst/>
@@ -6207,8 +8284,8 @@
         </p:nvSpPr>
         <p:spPr>
           <a:xfrm>
-            <a:off x="365760" y="2505456"/>
-            <a:ext cx="8467344" cy="329184"/>
+            <a:off x="384048" y="2596896"/>
+            <a:ext cx="8449056" cy="347472"/>
           </a:xfrm>
           <a:prstGeom prst="rect">
             <a:avLst/>
@@ -6222,7 +8299,7 @@
           <a:p>
             <a:pPr indent="0" marL="0">
               <a:lnSpc>
-                <a:spcPct val="118000"/>
+                <a:spcPct val="120000"/>
               </a:lnSpc>
               <a:buNone/>
             </a:pPr>
@@ -6235,7 +8312,7 @@
                 <a:ea typeface="Arial" pitchFamily="34" charset="-122"/>
                 <a:cs typeface="Arial" pitchFamily="34" charset="-120"/>
               </a:rPr>
-              <a:t>Automation capability is accessible through the Operations Assistant at all times. Expertise that currently resides in specific individuals is embedded in the system and available to all teams equally.</a:t>
+              <a:t>Automation capability is available at all times through the Operations Assistant. Expertise that currently resides in specific individuals is accessible to all teams equally.</a:t>
             </a:r>
             <a:endParaRPr lang="en-US" sz="950" dirty="0"/>
           </a:p>
@@ -6249,8 +8326,8 @@
         </p:nvSpPr>
         <p:spPr>
           <a:xfrm>
-            <a:off x="201168" y="2944368"/>
-            <a:ext cx="8741664" cy="694944"/>
+            <a:off x="201168" y="3054096"/>
+            <a:ext cx="8741664" cy="731520"/>
           </a:xfrm>
           <a:prstGeom prst="rect">
             <a:avLst/>
@@ -6269,7 +8346,7 @@
         </p:nvSpPr>
         <p:spPr>
           <a:xfrm>
-            <a:off x="201168" y="3017520"/>
+            <a:off x="201168" y="3145536"/>
             <a:ext cx="54864" cy="548640"/>
           </a:xfrm>
           <a:prstGeom prst="rect">
@@ -6289,8 +8366,8 @@
         </p:nvSpPr>
         <p:spPr>
           <a:xfrm>
-            <a:off x="365760" y="2999232"/>
-            <a:ext cx="8467344" cy="237744"/>
+            <a:off x="384048" y="3118104"/>
+            <a:ext cx="8449056" cy="237744"/>
           </a:xfrm>
           <a:prstGeom prst="rect">
             <a:avLst/>
@@ -6328,8 +8405,8 @@
         </p:nvSpPr>
         <p:spPr>
           <a:xfrm>
-            <a:off x="365760" y="3255264"/>
-            <a:ext cx="8467344" cy="329184"/>
+            <a:off x="384048" y="3383280"/>
+            <a:ext cx="8449056" cy="347472"/>
           </a:xfrm>
           <a:prstGeom prst="rect">
             <a:avLst/>
@@ -6343,7 +8420,7 @@
           <a:p>
             <a:pPr indent="0" marL="0">
               <a:lnSpc>
-                <a:spcPct val="118000"/>
+                <a:spcPct val="120000"/>
               </a:lnSpc>
               <a:buNone/>
             </a:pPr>
@@ -6356,7 +8433,7 @@
                 <a:ea typeface="Arial" pitchFamily="34" charset="-122"/>
                 <a:cs typeface="Arial" pitchFamily="34" charset="-120"/>
               </a:rPr>
-              <a:t>Operations teams access automation capability through a natural-language interface requiring no prior technical knowledge. Platform adoption increases through use, without training programmes or specialist mediation.</a:t>
+              <a:t>Operations teams access automation through a natural-language interface requiring no prior technical knowledge. Platform adoption increases through use, not training programmes.</a:t>
             </a:r>
             <a:endParaRPr lang="en-US" sz="950" dirty="0"/>
           </a:p>
@@ -6370,8 +8447,8 @@
         </p:nvSpPr>
         <p:spPr>
           <a:xfrm>
-            <a:off x="201168" y="3694176"/>
-            <a:ext cx="8741664" cy="694944"/>
+            <a:off x="201168" y="3840480"/>
+            <a:ext cx="8741664" cy="731520"/>
           </a:xfrm>
           <a:prstGeom prst="rect">
             <a:avLst/>
@@ -6390,7 +8467,7 @@
         </p:nvSpPr>
         <p:spPr>
           <a:xfrm>
-            <a:off x="201168" y="3767328"/>
+            <a:off x="201168" y="3931920"/>
             <a:ext cx="54864" cy="548640"/>
           </a:xfrm>
           <a:prstGeom prst="rect">
@@ -6410,8 +8487,8 @@
         </p:nvSpPr>
         <p:spPr>
           <a:xfrm>
-            <a:off x="365760" y="3749040"/>
-            <a:ext cx="8467344" cy="237744"/>
+            <a:off x="384048" y="3904488"/>
+            <a:ext cx="8449056" cy="237744"/>
           </a:xfrm>
           <a:prstGeom prst="rect">
             <a:avLst/>
@@ -6449,8 +8526,8 @@
         </p:nvSpPr>
         <p:spPr>
           <a:xfrm>
-            <a:off x="365760" y="4005072"/>
-            <a:ext cx="8467344" cy="329184"/>
+            <a:off x="384048" y="4169664"/>
+            <a:ext cx="8449056" cy="347472"/>
           </a:xfrm>
           <a:prstGeom prst="rect">
             <a:avLst/>
@@ -6464,7 +8541,7 @@
           <a:p>
             <a:pPr indent="0" marL="0">
               <a:lnSpc>
-                <a:spcPct val="118000"/>
+                <a:spcPct val="120000"/>
               </a:lnSpc>
               <a:buNone/>
             </a:pPr>
@@ -6477,7 +8554,7 @@
                 <a:ea typeface="Arial" pitchFamily="34" charset="-122"/>
                 <a:cs typeface="Arial" pitchFamily="34" charset="-120"/>
               </a:rPr>
-              <a:t>Leadership retains real-time visibility and immediate override authority across all automations. Approval routing, deadline management, and escalation are handled automatically, eliminating governance as a bottleneck.</a:t>
+              <a:t>Leadership retains real-time visibility and immediate override authority. Approval routing, deadline management, and escalation are handled automatically at all times.</a:t>
             </a:r>
             <a:endParaRPr lang="en-US" sz="950" dirty="0"/>
           </a:p>
@@ -6725,7 +8802,7 @@
         <p:spPr>
           <a:xfrm>
             <a:off x="201168" y="1024128"/>
-            <a:ext cx="4279392" cy="1517904"/>
+            <a:ext cx="4279392" cy="1463040"/>
           </a:xfrm>
           <a:prstGeom prst="rect">
             <a:avLst/>
@@ -6744,8 +8821,8 @@
         </p:nvSpPr>
         <p:spPr>
           <a:xfrm>
-            <a:off x="365760" y="1170432"/>
-            <a:ext cx="73152" cy="73152"/>
+            <a:off x="384048" y="1335024"/>
+            <a:ext cx="82296" cy="82296"/>
           </a:xfrm>
           <a:prstGeom prst="ellipse">
             <a:avLst/>
@@ -6764,8 +8841,8 @@
         </p:nvSpPr>
         <p:spPr>
           <a:xfrm>
-            <a:off x="512064" y="1097280"/>
-            <a:ext cx="3840480" cy="402336"/>
+            <a:off x="548640" y="1152144"/>
+            <a:ext cx="3803904" cy="512064"/>
           </a:xfrm>
           <a:prstGeom prst="rect">
             <a:avLst/>
@@ -6779,12 +8856,12 @@
           <a:p>
             <a:pPr indent="0" marL="0">
               <a:lnSpc>
-                <a:spcPct val="110000"/>
+                <a:spcPct val="118000"/>
               </a:lnSpc>
               <a:buNone/>
             </a:pPr>
             <a:r>
-              <a:rPr lang="en-US" sz="950" dirty="0">
+              <a:rPr lang="en-US" sz="1000" dirty="0">
                 <a:solidFill>
                   <a:srgbClr val="595959"/>
                 </a:solidFill>
@@ -6792,9 +8869,9 @@
                 <a:ea typeface="Arial" pitchFamily="34" charset="-122"/>
                 <a:cs typeface="Arial" pitchFamily="34" charset="-120"/>
               </a:rPr>
-              <a:t>Any requirement stated in plain English is fulfilled as a permanent automation</a:t>
-            </a:r>
-            <a:endParaRPr lang="en-US" sz="950" dirty="0"/>
+              <a:t>Any plain-English requirement is fulfilled as a permanent automation</a:t>
+            </a:r>
+            <a:endParaRPr lang="en-US" sz="1000" dirty="0"/>
           </a:p>
         </p:txBody>
       </p:sp>
@@ -6806,8 +8883,8 @@
         </p:nvSpPr>
         <p:spPr>
           <a:xfrm>
-            <a:off x="365760" y="1627632"/>
-            <a:ext cx="73152" cy="73152"/>
+            <a:off x="384048" y="2011680"/>
+            <a:ext cx="82296" cy="82296"/>
           </a:xfrm>
           <a:prstGeom prst="ellipse">
             <a:avLst/>
@@ -6826,8 +8903,8 @@
         </p:nvSpPr>
         <p:spPr>
           <a:xfrm>
-            <a:off x="512064" y="1554480"/>
-            <a:ext cx="3840480" cy="402336"/>
+            <a:off x="548640" y="1828800"/>
+            <a:ext cx="3803904" cy="512064"/>
           </a:xfrm>
           <a:prstGeom prst="rect">
             <a:avLst/>
@@ -6841,12 +8918,12 @@
           <a:p>
             <a:pPr indent="0" marL="0">
               <a:lnSpc>
-                <a:spcPct val="110000"/>
+                <a:spcPct val="118000"/>
               </a:lnSpc>
               <a:buNone/>
             </a:pPr>
             <a:r>
-              <a:rPr lang="en-US" sz="950" dirty="0">
+              <a:rPr lang="en-US" sz="1000" dirty="0">
                 <a:solidFill>
                   <a:srgbClr val="595959"/>
                 </a:solidFill>
@@ -6856,75 +8933,13 @@
               </a:rPr>
               <a:t>All group automations accessible from a single personalised workspace</a:t>
             </a:r>
-            <a:endParaRPr lang="en-US" sz="950" dirty="0"/>
+            <a:endParaRPr lang="en-US" sz="1000" dirty="0"/>
           </a:p>
         </p:txBody>
       </p:sp>
       <p:sp>
         <p:nvSpPr>
           <p:cNvPr id="12" name="Shape 10"/>
-          <p:cNvSpPr/>
-          <p:nvPr/>
-        </p:nvSpPr>
-        <p:spPr>
-          <a:xfrm>
-            <a:off x="365760" y="2084832"/>
-            <a:ext cx="73152" cy="73152"/>
-          </a:xfrm>
-          <a:prstGeom prst="ellipse">
-            <a:avLst/>
-          </a:prstGeom>
-          <a:solidFill>
-            <a:srgbClr val="007CC3"/>
-          </a:solidFill>
-          <a:ln/>
-        </p:spPr>
-      </p:sp>
-      <p:sp>
-        <p:nvSpPr>
-          <p:cNvPr id="13" name="Text 11"/>
-          <p:cNvSpPr/>
-          <p:nvPr/>
-        </p:nvSpPr>
-        <p:spPr>
-          <a:xfrm>
-            <a:off x="512064" y="2011680"/>
-            <a:ext cx="3840480" cy="402336"/>
-          </a:xfrm>
-          <a:prstGeom prst="rect">
-            <a:avLst/>
-          </a:prstGeom>
-          <a:noFill/>
-          <a:ln/>
-        </p:spPr>
-        <p:txBody>
-          <a:bodyPr wrap="square" rtlCol="0" anchor="ctr"/>
-          <a:lstStyle/>
-          <a:p>
-            <a:pPr indent="0" marL="0">
-              <a:lnSpc>
-                <a:spcPct val="110000"/>
-              </a:lnSpc>
-              <a:buNone/>
-            </a:pPr>
-            <a:r>
-              <a:rPr lang="en-US" sz="950" dirty="0">
-                <a:solidFill>
-                  <a:srgbClr val="595959"/>
-                </a:solidFill>
-                <a:latin typeface="Arial" pitchFamily="34" charset="0"/>
-                <a:ea typeface="Arial" pitchFamily="34" charset="-122"/>
-                <a:cs typeface="Arial" pitchFamily="34" charset="-120"/>
-              </a:rPr>
-              <a:t>No prior technical knowledge is required at any point in the process</a:t>
-            </a:r>
-            <a:endParaRPr lang="en-US" sz="950" dirty="0"/>
-          </a:p>
-        </p:txBody>
-      </p:sp>
-      <p:sp>
-        <p:nvSpPr>
-          <p:cNvPr id="14" name="Shape 12"/>
           <p:cNvSpPr/>
           <p:nvPr/>
         </p:nvSpPr>
@@ -6944,7 +8959,7 @@
       </p:sp>
       <p:sp>
         <p:nvSpPr>
-          <p:cNvPr id="15" name="Text 13"/>
+          <p:cNvPr id="13" name="Text 11"/>
           <p:cNvSpPr/>
           <p:nvPr/>
         </p:nvSpPr>
@@ -6983,14 +8998,14 @@
       </p:sp>
       <p:sp>
         <p:nvSpPr>
-          <p:cNvPr id="16" name="Shape 14"/>
+          <p:cNvPr id="14" name="Shape 12"/>
           <p:cNvSpPr/>
           <p:nvPr/>
         </p:nvSpPr>
         <p:spPr>
           <a:xfrm>
             <a:off x="4663440" y="1024128"/>
-            <a:ext cx="4279392" cy="1517904"/>
+            <a:ext cx="4279392" cy="1463040"/>
           </a:xfrm>
           <a:prstGeom prst="rect">
             <a:avLst/>
@@ -7003,14 +9018,76 @@
       </p:sp>
       <p:sp>
         <p:nvSpPr>
+          <p:cNvPr id="15" name="Shape 13"/>
+          <p:cNvSpPr/>
+          <p:nvPr/>
+        </p:nvSpPr>
+        <p:spPr>
+          <a:xfrm>
+            <a:off x="4846320" y="1335024"/>
+            <a:ext cx="82296" cy="82296"/>
+          </a:xfrm>
+          <a:prstGeom prst="ellipse">
+            <a:avLst/>
+          </a:prstGeom>
+          <a:solidFill>
+            <a:srgbClr val="2670C3"/>
+          </a:solidFill>
+          <a:ln/>
+        </p:spPr>
+      </p:sp>
+      <p:sp>
+        <p:nvSpPr>
+          <p:cNvPr id="16" name="Text 14"/>
+          <p:cNvSpPr/>
+          <p:nvPr/>
+        </p:nvSpPr>
+        <p:spPr>
+          <a:xfrm>
+            <a:off x="5010912" y="1152144"/>
+            <a:ext cx="3803904" cy="512064"/>
+          </a:xfrm>
+          <a:prstGeom prst="rect">
+            <a:avLst/>
+          </a:prstGeom>
+          <a:noFill/>
+          <a:ln/>
+        </p:spPr>
+        <p:txBody>
+          <a:bodyPr wrap="square" rtlCol="0" anchor="ctr"/>
+          <a:lstStyle/>
+          <a:p>
+            <a:pPr indent="0" marL="0">
+              <a:lnSpc>
+                <a:spcPct val="118000"/>
+              </a:lnSpc>
+              <a:buNone/>
+            </a:pPr>
+            <a:r>
+              <a:rPr lang="en-US" sz="1000" dirty="0">
+                <a:solidFill>
+                  <a:srgbClr val="595959"/>
+                </a:solidFill>
+                <a:latin typeface="Arial" pitchFamily="34" charset="0"/>
+                <a:ea typeface="Arial" pitchFamily="34" charset="-122"/>
+                <a:cs typeface="Arial" pitchFamily="34" charset="-120"/>
+              </a:rPr>
+              <a:t>Automations designed through a structured guided conversation</a:t>
+            </a:r>
+            <a:endParaRPr lang="en-US" sz="1000" dirty="0"/>
+          </a:p>
+        </p:txBody>
+      </p:sp>
+      <p:sp>
+        <p:nvSpPr>
           <p:cNvPr id="17" name="Shape 15"/>
           <p:cNvSpPr/>
           <p:nvPr/>
         </p:nvSpPr>
         <p:spPr>
           <a:xfrm>
-            <a:off x="4828032" y="1170432"/>
-            <a:ext cx="73152" cy="73152"/>
+            <a:off x="4846320" y="2011680"/>
+            <a:ext cx="82296" cy="82296"/>
           </a:xfrm>
           <a:prstGeom prst="ellipse">
             <a:avLst/>
@@ -7029,8 +9106,8 @@
         </p:nvSpPr>
         <p:spPr>
           <a:xfrm>
-            <a:off x="4974336" y="1097280"/>
-            <a:ext cx="3840480" cy="402336"/>
+            <a:off x="5010912" y="1828800"/>
+            <a:ext cx="3803904" cy="512064"/>
           </a:xfrm>
           <a:prstGeom prst="rect">
             <a:avLst/>
@@ -7044,12 +9121,12 @@
           <a:p>
             <a:pPr indent="0" marL="0">
               <a:lnSpc>
-                <a:spcPct val="110000"/>
+                <a:spcPct val="118000"/>
               </a:lnSpc>
               <a:buNone/>
             </a:pPr>
             <a:r>
-              <a:rPr lang="en-US" sz="950" dirty="0">
+              <a:rPr lang="en-US" sz="1000" dirty="0">
                 <a:solidFill>
                   <a:srgbClr val="595959"/>
                 </a:solidFill>
@@ -7057,7 +9134,66 @@
                 <a:ea typeface="Arial" pitchFamily="34" charset="-122"/>
                 <a:cs typeface="Arial" pitchFamily="34" charset="-120"/>
               </a:rPr>
-              <a:t>Automations designed through a structured guided conversation</a:t>
+              <a:t>The full automation lifecycle managed from a single studio interface</a:t>
+            </a:r>
+            <a:endParaRPr lang="en-US" sz="1000" dirty="0"/>
+          </a:p>
+        </p:txBody>
+      </p:sp>
+      <p:sp>
+        <p:nvSpPr>
+          <p:cNvPr id="19" name="Shape 17"/>
+          <p:cNvSpPr/>
+          <p:nvPr/>
+        </p:nvSpPr>
+        <p:spPr>
+          <a:xfrm>
+            <a:off x="201168" y="2560320"/>
+            <a:ext cx="4279392" cy="347472"/>
+          </a:xfrm>
+          <a:prstGeom prst="rect">
+            <a:avLst/>
+          </a:prstGeom>
+          <a:solidFill>
+            <a:srgbClr val="007CC3"/>
+          </a:solidFill>
+          <a:ln/>
+        </p:spPr>
+      </p:sp>
+      <p:sp>
+        <p:nvSpPr>
+          <p:cNvPr id="20" name="Text 18"/>
+          <p:cNvSpPr/>
+          <p:nvPr/>
+        </p:nvSpPr>
+        <p:spPr>
+          <a:xfrm>
+            <a:off x="329184" y="2560320"/>
+            <a:ext cx="4151376" cy="347472"/>
+          </a:xfrm>
+          <a:prstGeom prst="rect">
+            <a:avLst/>
+          </a:prstGeom>
+          <a:noFill/>
+          <a:ln/>
+        </p:spPr>
+        <p:txBody>
+          <a:bodyPr wrap="square" rtlCol="0" anchor="ctr"/>
+          <a:lstStyle/>
+          <a:p>
+            <a:pPr indent="0" marL="0">
+              <a:buNone/>
+            </a:pPr>
+            <a:r>
+              <a:rPr lang="en-US" sz="950" b="1" spc="50" kern="0" dirty="0">
+                <a:solidFill>
+                  <a:srgbClr val="FFFFFF"/>
+                </a:solidFill>
+                <a:latin typeface="Arial" pitchFamily="34" charset="0"/>
+                <a:ea typeface="Arial" pitchFamily="34" charset="-122"/>
+                <a:cs typeface="Arial" pitchFamily="34" charset="-120"/>
+              </a:rPr>
+              <a:t>FOR LEADERSHIP</a:t>
             </a:r>
             <a:endParaRPr lang="en-US" sz="950" dirty="0"/>
           </a:p>
@@ -7065,19 +9201,163 @@
       </p:sp>
       <p:sp>
         <p:nvSpPr>
-          <p:cNvPr id="19" name="Shape 17"/>
-          <p:cNvSpPr/>
-          <p:nvPr/>
-        </p:nvSpPr>
-        <p:spPr>
-          <a:xfrm>
-            <a:off x="4828032" y="1627632"/>
-            <a:ext cx="73152" cy="73152"/>
+          <p:cNvPr id="21" name="Shape 19"/>
+          <p:cNvSpPr/>
+          <p:nvPr/>
+        </p:nvSpPr>
+        <p:spPr>
+          <a:xfrm>
+            <a:off x="201168" y="2907792"/>
+            <a:ext cx="4279392" cy="1463040"/>
+          </a:xfrm>
+          <a:prstGeom prst="rect">
+            <a:avLst/>
+          </a:prstGeom>
+          <a:solidFill>
+            <a:srgbClr val="F5FAFF"/>
+          </a:solidFill>
+          <a:ln/>
+        </p:spPr>
+      </p:sp>
+      <p:sp>
+        <p:nvSpPr>
+          <p:cNvPr id="22" name="Shape 20"/>
+          <p:cNvSpPr/>
+          <p:nvPr/>
+        </p:nvSpPr>
+        <p:spPr>
+          <a:xfrm>
+            <a:off x="384048" y="3218688"/>
+            <a:ext cx="82296" cy="82296"/>
           </a:xfrm>
           <a:prstGeom prst="ellipse">
             <a:avLst/>
           </a:prstGeom>
           <a:solidFill>
+            <a:srgbClr val="007CC3"/>
+          </a:solidFill>
+          <a:ln/>
+        </p:spPr>
+      </p:sp>
+      <p:sp>
+        <p:nvSpPr>
+          <p:cNvPr id="23" name="Text 21"/>
+          <p:cNvSpPr/>
+          <p:nvPr/>
+        </p:nvSpPr>
+        <p:spPr>
+          <a:xfrm>
+            <a:off x="548640" y="3035808"/>
+            <a:ext cx="3803904" cy="512064"/>
+          </a:xfrm>
+          <a:prstGeom prst="rect">
+            <a:avLst/>
+          </a:prstGeom>
+          <a:noFill/>
+          <a:ln/>
+        </p:spPr>
+        <p:txBody>
+          <a:bodyPr wrap="square" rtlCol="0" anchor="ctr"/>
+          <a:lstStyle/>
+          <a:p>
+            <a:pPr indent="0" marL="0">
+              <a:lnSpc>
+                <a:spcPct val="118000"/>
+              </a:lnSpc>
+              <a:buNone/>
+            </a:pPr>
+            <a:r>
+              <a:rPr lang="en-US" sz="1000" dirty="0">
+                <a:solidFill>
+                  <a:srgbClr val="595959"/>
+                </a:solidFill>
+                <a:latin typeface="Arial" pitchFamily="34" charset="0"/>
+                <a:ea typeface="Arial" pitchFamily="34" charset="-122"/>
+                <a:cs typeface="Arial" pitchFamily="34" charset="-120"/>
+              </a:rPr>
+              <a:t>All group automations visible in real time from a single governance view</a:t>
+            </a:r>
+            <a:endParaRPr lang="en-US" sz="1000" dirty="0"/>
+          </a:p>
+        </p:txBody>
+      </p:sp>
+      <p:sp>
+        <p:nvSpPr>
+          <p:cNvPr id="24" name="Shape 22"/>
+          <p:cNvSpPr/>
+          <p:nvPr/>
+        </p:nvSpPr>
+        <p:spPr>
+          <a:xfrm>
+            <a:off x="384048" y="3895344"/>
+            <a:ext cx="82296" cy="82296"/>
+          </a:xfrm>
+          <a:prstGeom prst="ellipse">
+            <a:avLst/>
+          </a:prstGeom>
+          <a:solidFill>
+            <a:srgbClr val="007CC3"/>
+          </a:solidFill>
+          <a:ln/>
+        </p:spPr>
+      </p:sp>
+      <p:sp>
+        <p:nvSpPr>
+          <p:cNvPr id="25" name="Text 23"/>
+          <p:cNvSpPr/>
+          <p:nvPr/>
+        </p:nvSpPr>
+        <p:spPr>
+          <a:xfrm>
+            <a:off x="548640" y="3712464"/>
+            <a:ext cx="3803904" cy="512064"/>
+          </a:xfrm>
+          <a:prstGeom prst="rect">
+            <a:avLst/>
+          </a:prstGeom>
+          <a:noFill/>
+          <a:ln/>
+        </p:spPr>
+        <p:txBody>
+          <a:bodyPr wrap="square" rtlCol="0" anchor="ctr"/>
+          <a:lstStyle/>
+          <a:p>
+            <a:pPr indent="0" marL="0">
+              <a:lnSpc>
+                <a:spcPct val="118000"/>
+              </a:lnSpc>
+              <a:buNone/>
+            </a:pPr>
+            <a:r>
+              <a:rPr lang="en-US" sz="1000" dirty="0">
+                <a:solidFill>
+                  <a:srgbClr val="595959"/>
+                </a:solidFill>
+                <a:latin typeface="Arial" pitchFamily="34" charset="0"/>
+                <a:ea typeface="Arial" pitchFamily="34" charset="-122"/>
+                <a:cs typeface="Arial" pitchFamily="34" charset="-120"/>
+              </a:rPr>
+              <a:t>Impactful changes route automatically for approval before defined deadlines</a:t>
+            </a:r>
+            <a:endParaRPr lang="en-US" sz="1000" dirty="0"/>
+          </a:p>
+        </p:txBody>
+      </p:sp>
+      <p:sp>
+        <p:nvSpPr>
+          <p:cNvPr id="26" name="Shape 24"/>
+          <p:cNvSpPr/>
+          <p:nvPr/>
+        </p:nvSpPr>
+        <p:spPr>
+          <a:xfrm>
+            <a:off x="4663440" y="2560320"/>
+            <a:ext cx="4279392" cy="347472"/>
+          </a:xfrm>
+          <a:prstGeom prst="rect">
+            <a:avLst/>
+          </a:prstGeom>
+          <a:solidFill>
             <a:srgbClr val="2670C3"/>
           </a:solidFill>
           <a:ln/>
@@ -7085,14 +9365,93 @@
       </p:sp>
       <p:sp>
         <p:nvSpPr>
-          <p:cNvPr id="20" name="Text 18"/>
-          <p:cNvSpPr/>
-          <p:nvPr/>
-        </p:nvSpPr>
-        <p:spPr>
-          <a:xfrm>
-            <a:off x="4974336" y="1554480"/>
-            <a:ext cx="3840480" cy="402336"/>
+          <p:cNvPr id="27" name="Text 25"/>
+          <p:cNvSpPr/>
+          <p:nvPr/>
+        </p:nvSpPr>
+        <p:spPr>
+          <a:xfrm>
+            <a:off x="4791456" y="2560320"/>
+            <a:ext cx="4151376" cy="347472"/>
+          </a:xfrm>
+          <a:prstGeom prst="rect">
+            <a:avLst/>
+          </a:prstGeom>
+          <a:noFill/>
+          <a:ln/>
+        </p:spPr>
+        <p:txBody>
+          <a:bodyPr wrap="square" rtlCol="0" anchor="ctr"/>
+          <a:lstStyle/>
+          <a:p>
+            <a:pPr indent="0" marL="0">
+              <a:buNone/>
+            </a:pPr>
+            <a:r>
+              <a:rPr lang="en-US" sz="950" b="1" spc="50" kern="0" dirty="0">
+                <a:solidFill>
+                  <a:srgbClr val="FFFFFF"/>
+                </a:solidFill>
+                <a:latin typeface="Arial" pitchFamily="34" charset="0"/>
+                <a:ea typeface="Arial" pitchFamily="34" charset="-122"/>
+                <a:cs typeface="Arial" pitchFamily="34" charset="-120"/>
+              </a:rPr>
+              <a:t>FOR THE ORGANISATION</a:t>
+            </a:r>
+            <a:endParaRPr lang="en-US" sz="950" dirty="0"/>
+          </a:p>
+        </p:txBody>
+      </p:sp>
+      <p:sp>
+        <p:nvSpPr>
+          <p:cNvPr id="28" name="Shape 26"/>
+          <p:cNvSpPr/>
+          <p:nvPr/>
+        </p:nvSpPr>
+        <p:spPr>
+          <a:xfrm>
+            <a:off x="4663440" y="2907792"/>
+            <a:ext cx="4279392" cy="1463040"/>
+          </a:xfrm>
+          <a:prstGeom prst="rect">
+            <a:avLst/>
+          </a:prstGeom>
+          <a:solidFill>
+            <a:srgbClr val="F5FAFF"/>
+          </a:solidFill>
+          <a:ln/>
+        </p:spPr>
+      </p:sp>
+      <p:sp>
+        <p:nvSpPr>
+          <p:cNvPr id="29" name="Shape 27"/>
+          <p:cNvSpPr/>
+          <p:nvPr/>
+        </p:nvSpPr>
+        <p:spPr>
+          <a:xfrm>
+            <a:off x="4846320" y="3218688"/>
+            <a:ext cx="82296" cy="82296"/>
+          </a:xfrm>
+          <a:prstGeom prst="ellipse">
+            <a:avLst/>
+          </a:prstGeom>
+          <a:solidFill>
+            <a:srgbClr val="2670C3"/>
+          </a:solidFill>
+          <a:ln/>
+        </p:spPr>
+      </p:sp>
+      <p:sp>
+        <p:nvSpPr>
+          <p:cNvPr id="30" name="Text 28"/>
+          <p:cNvSpPr/>
+          <p:nvPr/>
+        </p:nvSpPr>
+        <p:spPr>
+          <a:xfrm>
+            <a:off x="5010912" y="3035808"/>
+            <a:ext cx="3803904" cy="512064"/>
           </a:xfrm>
           <a:prstGeom prst="rect">
             <a:avLst/>
@@ -7106,12 +9465,12 @@
           <a:p>
             <a:pPr indent="0" marL="0">
               <a:lnSpc>
-                <a:spcPct val="110000"/>
+                <a:spcPct val="118000"/>
               </a:lnSpc>
               <a:buNone/>
             </a:pPr>
             <a:r>
-              <a:rPr lang="en-US" sz="950" dirty="0">
+              <a:rPr lang="en-US" sz="1000" dirty="0">
                 <a:solidFill>
                   <a:srgbClr val="595959"/>
                 </a:solidFill>
@@ -7119,22 +9478,22 @@
                 <a:ea typeface="Arial" pitchFamily="34" charset="-122"/>
                 <a:cs typeface="Arial" pitchFamily="34" charset="-120"/>
               </a:rPr>
-              <a:t>Technical specifications generated and confirmed before being applied</a:t>
-            </a:r>
-            <a:endParaRPr lang="en-US" sz="950" dirty="0"/>
-          </a:p>
-        </p:txBody>
-      </p:sp>
-      <p:sp>
-        <p:nvSpPr>
-          <p:cNvPr id="21" name="Shape 19"/>
-          <p:cNvSpPr/>
-          <p:nvPr/>
-        </p:nvSpPr>
-        <p:spPr>
-          <a:xfrm>
-            <a:off x="4828032" y="2084832"/>
-            <a:ext cx="73152" cy="73152"/>
+              <a:t>Recovered capacity directed to project delivery rather than overhead</a:t>
+            </a:r>
+            <a:endParaRPr lang="en-US" sz="1000" dirty="0"/>
+          </a:p>
+        </p:txBody>
+      </p:sp>
+      <p:sp>
+        <p:nvSpPr>
+          <p:cNvPr id="31" name="Shape 29"/>
+          <p:cNvSpPr/>
+          <p:nvPr/>
+        </p:nvSpPr>
+        <p:spPr>
+          <a:xfrm>
+            <a:off x="4846320" y="3895344"/>
+            <a:ext cx="82296" cy="82296"/>
           </a:xfrm>
           <a:prstGeom prst="ellipse">
             <a:avLst/>
@@ -7147,14 +9506,14 @@
       </p:sp>
       <p:sp>
         <p:nvSpPr>
-          <p:cNvPr id="22" name="Text 20"/>
-          <p:cNvSpPr/>
-          <p:nvPr/>
-        </p:nvSpPr>
-        <p:spPr>
-          <a:xfrm>
-            <a:off x="4974336" y="2011680"/>
-            <a:ext cx="3840480" cy="402336"/>
+          <p:cNvPr id="32" name="Text 30"/>
+          <p:cNvSpPr/>
+          <p:nvPr/>
+        </p:nvSpPr>
+        <p:spPr>
+          <a:xfrm>
+            <a:off x="5010912" y="3712464"/>
+            <a:ext cx="3803904" cy="512064"/>
           </a:xfrm>
           <a:prstGeom prst="rect">
             <a:avLst/>
@@ -7168,12 +9527,12 @@
           <a:p>
             <a:pPr indent="0" marL="0">
               <a:lnSpc>
-                <a:spcPct val="110000"/>
+                <a:spcPct val="118000"/>
               </a:lnSpc>
               <a:buNone/>
             </a:pPr>
             <a:r>
-              <a:rPr lang="en-US" sz="950" dirty="0">
+              <a:rPr lang="en-US" sz="1000" dirty="0">
                 <a:solidFill>
                   <a:srgbClr val="595959"/>
                 </a:solidFill>
@@ -7181,545 +9540,15 @@
                 <a:ea typeface="Arial" pitchFamily="34" charset="-122"/>
                 <a:cs typeface="Arial" pitchFamily="34" charset="-120"/>
               </a:rPr>
-              <a:t>Full automation lifecycle managed from a single studio interface</a:t>
-            </a:r>
-            <a:endParaRPr lang="en-US" sz="950" dirty="0"/>
-          </a:p>
-        </p:txBody>
-      </p:sp>
-      <p:sp>
-        <p:nvSpPr>
-          <p:cNvPr id="23" name="Shape 21"/>
-          <p:cNvSpPr/>
-          <p:nvPr/>
-        </p:nvSpPr>
-        <p:spPr>
-          <a:xfrm>
-            <a:off x="201168" y="2615184"/>
-            <a:ext cx="4279392" cy="347472"/>
-          </a:xfrm>
-          <a:prstGeom prst="rect">
-            <a:avLst/>
-          </a:prstGeom>
-          <a:solidFill>
-            <a:srgbClr val="007CC3"/>
-          </a:solidFill>
-          <a:ln/>
-        </p:spPr>
-      </p:sp>
-      <p:sp>
-        <p:nvSpPr>
-          <p:cNvPr id="24" name="Text 22"/>
-          <p:cNvSpPr/>
-          <p:nvPr/>
-        </p:nvSpPr>
-        <p:spPr>
-          <a:xfrm>
-            <a:off x="329184" y="2615184"/>
-            <a:ext cx="4151376" cy="347472"/>
-          </a:xfrm>
-          <a:prstGeom prst="rect">
-            <a:avLst/>
-          </a:prstGeom>
-          <a:noFill/>
-          <a:ln/>
-        </p:spPr>
-        <p:txBody>
-          <a:bodyPr wrap="square" rtlCol="0" anchor="ctr"/>
-          <a:lstStyle/>
-          <a:p>
-            <a:pPr indent="0" marL="0">
-              <a:buNone/>
-            </a:pPr>
-            <a:r>
-              <a:rPr lang="en-US" sz="950" b="1" spc="50" kern="0" dirty="0">
-                <a:solidFill>
-                  <a:srgbClr val="FFFFFF"/>
-                </a:solidFill>
-                <a:latin typeface="Arial" pitchFamily="34" charset="0"/>
-                <a:ea typeface="Arial" pitchFamily="34" charset="-122"/>
-                <a:cs typeface="Arial" pitchFamily="34" charset="-120"/>
-              </a:rPr>
-              <a:t>FOR LEADERSHIP</a:t>
-            </a:r>
-            <a:endParaRPr lang="en-US" sz="950" dirty="0"/>
-          </a:p>
-        </p:txBody>
-      </p:sp>
-      <p:sp>
-        <p:nvSpPr>
-          <p:cNvPr id="25" name="Shape 23"/>
-          <p:cNvSpPr/>
-          <p:nvPr/>
-        </p:nvSpPr>
-        <p:spPr>
-          <a:xfrm>
-            <a:off x="201168" y="2962656"/>
-            <a:ext cx="4279392" cy="1517904"/>
-          </a:xfrm>
-          <a:prstGeom prst="rect">
-            <a:avLst/>
-          </a:prstGeom>
-          <a:solidFill>
-            <a:srgbClr val="F5FAFF"/>
-          </a:solidFill>
-          <a:ln/>
-        </p:spPr>
-      </p:sp>
-      <p:sp>
-        <p:nvSpPr>
-          <p:cNvPr id="26" name="Shape 24"/>
-          <p:cNvSpPr/>
-          <p:nvPr/>
-        </p:nvSpPr>
-        <p:spPr>
-          <a:xfrm>
-            <a:off x="365760" y="3108960"/>
-            <a:ext cx="73152" cy="73152"/>
-          </a:xfrm>
-          <a:prstGeom prst="ellipse">
-            <a:avLst/>
-          </a:prstGeom>
-          <a:solidFill>
-            <a:srgbClr val="007CC3"/>
-          </a:solidFill>
-          <a:ln/>
-        </p:spPr>
-      </p:sp>
-      <p:sp>
-        <p:nvSpPr>
-          <p:cNvPr id="27" name="Text 25"/>
-          <p:cNvSpPr/>
-          <p:nvPr/>
-        </p:nvSpPr>
-        <p:spPr>
-          <a:xfrm>
-            <a:off x="512064" y="3035808"/>
-            <a:ext cx="3840480" cy="402336"/>
-          </a:xfrm>
-          <a:prstGeom prst="rect">
-            <a:avLst/>
-          </a:prstGeom>
-          <a:noFill/>
-          <a:ln/>
-        </p:spPr>
-        <p:txBody>
-          <a:bodyPr wrap="square" rtlCol="0" anchor="ctr"/>
-          <a:lstStyle/>
-          <a:p>
-            <a:pPr indent="0" marL="0">
-              <a:lnSpc>
-                <a:spcPct val="110000"/>
-              </a:lnSpc>
-              <a:buNone/>
-            </a:pPr>
-            <a:r>
-              <a:rPr lang="en-US" sz="950" dirty="0">
-                <a:solidFill>
-                  <a:srgbClr val="595959"/>
-                </a:solidFill>
-                <a:latin typeface="Arial" pitchFamily="34" charset="0"/>
-                <a:ea typeface="Arial" pitchFamily="34" charset="-122"/>
-                <a:cs typeface="Arial" pitchFamily="34" charset="-120"/>
-              </a:rPr>
-              <a:t>All group automations visible in real time from a unified governance view</a:t>
-            </a:r>
-            <a:endParaRPr lang="en-US" sz="950" dirty="0"/>
-          </a:p>
-        </p:txBody>
-      </p:sp>
-      <p:sp>
-        <p:nvSpPr>
-          <p:cNvPr id="28" name="Shape 26"/>
-          <p:cNvSpPr/>
-          <p:nvPr/>
-        </p:nvSpPr>
-        <p:spPr>
-          <a:xfrm>
-            <a:off x="365760" y="3566160"/>
-            <a:ext cx="73152" cy="73152"/>
-          </a:xfrm>
-          <a:prstGeom prst="ellipse">
-            <a:avLst/>
-          </a:prstGeom>
-          <a:solidFill>
-            <a:srgbClr val="007CC3"/>
-          </a:solidFill>
-          <a:ln/>
-        </p:spPr>
-      </p:sp>
-      <p:sp>
-        <p:nvSpPr>
-          <p:cNvPr id="29" name="Text 27"/>
-          <p:cNvSpPr/>
-          <p:nvPr/>
-        </p:nvSpPr>
-        <p:spPr>
-          <a:xfrm>
-            <a:off x="512064" y="3493008"/>
-            <a:ext cx="3840480" cy="402336"/>
-          </a:xfrm>
-          <a:prstGeom prst="rect">
-            <a:avLst/>
-          </a:prstGeom>
-          <a:noFill/>
-          <a:ln/>
-        </p:spPr>
-        <p:txBody>
-          <a:bodyPr wrap="square" rtlCol="0" anchor="ctr"/>
-          <a:lstStyle/>
-          <a:p>
-            <a:pPr indent="0" marL="0">
-              <a:lnSpc>
-                <a:spcPct val="110000"/>
-              </a:lnSpc>
-              <a:buNone/>
-            </a:pPr>
-            <a:r>
-              <a:rPr lang="en-US" sz="950" dirty="0">
-                <a:solidFill>
-                  <a:srgbClr val="595959"/>
-                </a:solidFill>
-                <a:latin typeface="Arial" pitchFamily="34" charset="0"/>
-                <a:ea typeface="Arial" pitchFamily="34" charset="-122"/>
-                <a:cs typeface="Arial" pitchFamily="34" charset="-120"/>
-              </a:rPr>
-              <a:t>Impactful changes route automatically for approval with defined escalation deadlines</a:t>
-            </a:r>
-            <a:endParaRPr lang="en-US" sz="950" dirty="0"/>
-          </a:p>
-        </p:txBody>
-      </p:sp>
-      <p:sp>
-        <p:nvSpPr>
-          <p:cNvPr id="30" name="Shape 28"/>
-          <p:cNvSpPr/>
-          <p:nvPr/>
-        </p:nvSpPr>
-        <p:spPr>
-          <a:xfrm>
-            <a:off x="365760" y="4023360"/>
-            <a:ext cx="73152" cy="73152"/>
-          </a:xfrm>
-          <a:prstGeom prst="ellipse">
-            <a:avLst/>
-          </a:prstGeom>
-          <a:solidFill>
-            <a:srgbClr val="007CC3"/>
-          </a:solidFill>
-          <a:ln/>
-        </p:spPr>
-      </p:sp>
-      <p:sp>
-        <p:nvSpPr>
-          <p:cNvPr id="31" name="Text 29"/>
-          <p:cNvSpPr/>
-          <p:nvPr/>
-        </p:nvSpPr>
-        <p:spPr>
-          <a:xfrm>
-            <a:off x="512064" y="3950208"/>
-            <a:ext cx="3840480" cy="402336"/>
-          </a:xfrm>
-          <a:prstGeom prst="rect">
-            <a:avLst/>
-          </a:prstGeom>
-          <a:noFill/>
-          <a:ln/>
-        </p:spPr>
-        <p:txBody>
-          <a:bodyPr wrap="square" rtlCol="0" anchor="ctr"/>
-          <a:lstStyle/>
-          <a:p>
-            <a:pPr indent="0" marL="0">
-              <a:lnSpc>
-                <a:spcPct val="110000"/>
-              </a:lnSpc>
-              <a:buNone/>
-            </a:pPr>
-            <a:r>
-              <a:rPr lang="en-US" sz="950" dirty="0">
-                <a:solidFill>
-                  <a:srgbClr val="595959"/>
-                </a:solidFill>
-                <a:latin typeface="Arial" pitchFamily="34" charset="0"/>
-                <a:ea typeface="Arial" pitchFamily="34" charset="-122"/>
-                <a:cs typeface="Arial" pitchFamily="34" charset="-120"/>
-              </a:rPr>
-              <a:t>Any automation deactivated immediately without technical intervention</a:t>
-            </a:r>
-            <a:endParaRPr lang="en-US" sz="950" dirty="0"/>
-          </a:p>
-        </p:txBody>
-      </p:sp>
-      <p:sp>
-        <p:nvSpPr>
-          <p:cNvPr id="32" name="Shape 30"/>
-          <p:cNvSpPr/>
-          <p:nvPr/>
-        </p:nvSpPr>
-        <p:spPr>
-          <a:xfrm>
-            <a:off x="4663440" y="2615184"/>
-            <a:ext cx="4279392" cy="347472"/>
-          </a:xfrm>
-          <a:prstGeom prst="rect">
-            <a:avLst/>
-          </a:prstGeom>
-          <a:solidFill>
-            <a:srgbClr val="2670C3"/>
-          </a:solidFill>
-          <a:ln/>
-        </p:spPr>
-      </p:sp>
-      <p:sp>
-        <p:nvSpPr>
-          <p:cNvPr id="33" name="Text 31"/>
-          <p:cNvSpPr/>
-          <p:nvPr/>
-        </p:nvSpPr>
-        <p:spPr>
-          <a:xfrm>
-            <a:off x="4791456" y="2615184"/>
-            <a:ext cx="4151376" cy="347472"/>
-          </a:xfrm>
-          <a:prstGeom prst="rect">
-            <a:avLst/>
-          </a:prstGeom>
-          <a:noFill/>
-          <a:ln/>
-        </p:spPr>
-        <p:txBody>
-          <a:bodyPr wrap="square" rtlCol="0" anchor="ctr"/>
-          <a:lstStyle/>
-          <a:p>
-            <a:pPr indent="0" marL="0">
-              <a:buNone/>
-            </a:pPr>
-            <a:r>
-              <a:rPr lang="en-US" sz="950" b="1" spc="50" kern="0" dirty="0">
-                <a:solidFill>
-                  <a:srgbClr val="FFFFFF"/>
-                </a:solidFill>
-                <a:latin typeface="Arial" pitchFamily="34" charset="0"/>
-                <a:ea typeface="Arial" pitchFamily="34" charset="-122"/>
-                <a:cs typeface="Arial" pitchFamily="34" charset="-120"/>
-              </a:rPr>
-              <a:t>FOR THE ORGANISATION</a:t>
-            </a:r>
-            <a:endParaRPr lang="en-US" sz="950" dirty="0"/>
-          </a:p>
-        </p:txBody>
-      </p:sp>
-      <p:sp>
-        <p:nvSpPr>
-          <p:cNvPr id="34" name="Shape 32"/>
-          <p:cNvSpPr/>
-          <p:nvPr/>
-        </p:nvSpPr>
-        <p:spPr>
-          <a:xfrm>
-            <a:off x="4663440" y="2962656"/>
-            <a:ext cx="4279392" cy="1517904"/>
-          </a:xfrm>
-          <a:prstGeom prst="rect">
-            <a:avLst/>
-          </a:prstGeom>
-          <a:solidFill>
-            <a:srgbClr val="F5FAFF"/>
-          </a:solidFill>
-          <a:ln/>
-        </p:spPr>
-      </p:sp>
-      <p:sp>
-        <p:nvSpPr>
-          <p:cNvPr id="35" name="Shape 33"/>
-          <p:cNvSpPr/>
-          <p:nvPr/>
-        </p:nvSpPr>
-        <p:spPr>
-          <a:xfrm>
-            <a:off x="4828032" y="3108960"/>
-            <a:ext cx="73152" cy="73152"/>
-          </a:xfrm>
-          <a:prstGeom prst="ellipse">
-            <a:avLst/>
-          </a:prstGeom>
-          <a:solidFill>
-            <a:srgbClr val="2670C3"/>
-          </a:solidFill>
-          <a:ln/>
-        </p:spPr>
-      </p:sp>
-      <p:sp>
-        <p:nvSpPr>
-          <p:cNvPr id="36" name="Text 34"/>
-          <p:cNvSpPr/>
-          <p:nvPr/>
-        </p:nvSpPr>
-        <p:spPr>
-          <a:xfrm>
-            <a:off x="4974336" y="3035808"/>
-            <a:ext cx="3840480" cy="402336"/>
-          </a:xfrm>
-          <a:prstGeom prst="rect">
-            <a:avLst/>
-          </a:prstGeom>
-          <a:noFill/>
-          <a:ln/>
-        </p:spPr>
-        <p:txBody>
-          <a:bodyPr wrap="square" rtlCol="0" anchor="ctr"/>
-          <a:lstStyle/>
-          <a:p>
-            <a:pPr indent="0" marL="0">
-              <a:lnSpc>
-                <a:spcPct val="110000"/>
-              </a:lnSpc>
-              <a:buNone/>
-            </a:pPr>
-            <a:r>
-              <a:rPr lang="en-US" sz="950" dirty="0">
-                <a:solidFill>
-                  <a:srgbClr val="595959"/>
-                </a:solidFill>
-                <a:latin typeface="Arial" pitchFamily="34" charset="0"/>
-                <a:ea typeface="Arial" pitchFamily="34" charset="-122"/>
-                <a:cs typeface="Arial" pitchFamily="34" charset="-120"/>
-              </a:rPr>
-              <a:t>Recovered capacity directed to project delivery rather than operational overhead</a:t>
-            </a:r>
-            <a:endParaRPr lang="en-US" sz="950" dirty="0"/>
-          </a:p>
-        </p:txBody>
-      </p:sp>
-      <p:sp>
-        <p:nvSpPr>
-          <p:cNvPr id="37" name="Shape 35"/>
-          <p:cNvSpPr/>
-          <p:nvPr/>
-        </p:nvSpPr>
-        <p:spPr>
-          <a:xfrm>
-            <a:off x="4828032" y="3566160"/>
-            <a:ext cx="73152" cy="73152"/>
-          </a:xfrm>
-          <a:prstGeom prst="ellipse">
-            <a:avLst/>
-          </a:prstGeom>
-          <a:solidFill>
-            <a:srgbClr val="2670C3"/>
-          </a:solidFill>
-          <a:ln/>
-        </p:spPr>
-      </p:sp>
-      <p:sp>
-        <p:nvSpPr>
-          <p:cNvPr id="38" name="Text 36"/>
-          <p:cNvSpPr/>
-          <p:nvPr/>
-        </p:nvSpPr>
-        <p:spPr>
-          <a:xfrm>
-            <a:off x="4974336" y="3493008"/>
-            <a:ext cx="3840480" cy="402336"/>
-          </a:xfrm>
-          <a:prstGeom prst="rect">
-            <a:avLst/>
-          </a:prstGeom>
-          <a:noFill/>
-          <a:ln/>
-        </p:spPr>
-        <p:txBody>
-          <a:bodyPr wrap="square" rtlCol="0" anchor="ctr"/>
-          <a:lstStyle/>
-          <a:p>
-            <a:pPr indent="0" marL="0">
-              <a:lnSpc>
-                <a:spcPct val="110000"/>
-              </a:lnSpc>
-              <a:buNone/>
-            </a:pPr>
-            <a:r>
-              <a:rPr lang="en-US" sz="950" dirty="0">
-                <a:solidFill>
-                  <a:srgbClr val="595959"/>
-                </a:solidFill>
-                <a:latin typeface="Arial" pitchFamily="34" charset="0"/>
-                <a:ea typeface="Arial" pitchFamily="34" charset="-122"/>
-                <a:cs typeface="Arial" pitchFamily="34" charset="-120"/>
-              </a:rPr>
-              <a:t>Proven automation patterns reusable across groups without duplication of effort</a:t>
-            </a:r>
-            <a:endParaRPr lang="en-US" sz="950" dirty="0"/>
-          </a:p>
-        </p:txBody>
-      </p:sp>
-      <p:sp>
-        <p:nvSpPr>
-          <p:cNvPr id="39" name="Shape 37"/>
-          <p:cNvSpPr/>
-          <p:nvPr/>
-        </p:nvSpPr>
-        <p:spPr>
-          <a:xfrm>
-            <a:off x="4828032" y="4023360"/>
-            <a:ext cx="73152" cy="73152"/>
-          </a:xfrm>
-          <a:prstGeom prst="ellipse">
-            <a:avLst/>
-          </a:prstGeom>
-          <a:solidFill>
-            <a:srgbClr val="2670C3"/>
-          </a:solidFill>
-          <a:ln/>
-        </p:spPr>
-      </p:sp>
-      <p:sp>
-        <p:nvSpPr>
-          <p:cNvPr id="40" name="Text 38"/>
-          <p:cNvSpPr/>
-          <p:nvPr/>
-        </p:nvSpPr>
-        <p:spPr>
-          <a:xfrm>
-            <a:off x="4974336" y="3950208"/>
-            <a:ext cx="3840480" cy="402336"/>
-          </a:xfrm>
-          <a:prstGeom prst="rect">
-            <a:avLst/>
-          </a:prstGeom>
-          <a:noFill/>
-          <a:ln/>
-        </p:spPr>
-        <p:txBody>
-          <a:bodyPr wrap="square" rtlCol="0" anchor="ctr"/>
-          <a:lstStyle/>
-          <a:p>
-            <a:pPr indent="0" marL="0">
-              <a:lnSpc>
-                <a:spcPct val="110000"/>
-              </a:lnSpc>
-              <a:buNone/>
-            </a:pPr>
-            <a:r>
-              <a:rPr lang="en-US" sz="950" dirty="0">
-                <a:solidFill>
-                  <a:srgbClr val="595959"/>
-                </a:solidFill>
-                <a:latin typeface="Arial" pitchFamily="34" charset="0"/>
-                <a:ea typeface="Arial" pitchFamily="34" charset="-122"/>
-                <a:cs typeface="Arial" pitchFamily="34" charset="-120"/>
-              </a:rPr>
-              <a:t>ServiceNow operates as the full automation platform it was designed to be</a:t>
-            </a:r>
-            <a:endParaRPr lang="en-US" sz="950" dirty="0"/>
+              <a:t>ServiceNow realised as the complete automation platform it was designed to be</a:t>
+            </a:r>
+            <a:endParaRPr lang="en-US" sz="1000" dirty="0"/>
           </a:p>
         </p:txBody>
       </p:sp>
       <p:pic>
         <p:nvPicPr>
-          <p:cNvPr id="41" name="Image 0" descr="preencoded.png">    </p:cNvPr>
+          <p:cNvPr id="33" name="Image 0" descr="preencoded.png">    </p:cNvPr>
           <p:cNvPicPr>
             <a:picLocks noChangeAspect="1"/>
           </p:cNvPicPr>
@@ -7743,7 +9572,7 @@
       </p:pic>
       <p:sp>
         <p:nvSpPr>
-          <p:cNvPr id="42" name="Text 39"/>
+          <p:cNvPr id="34" name="Text 31"/>
           <p:cNvSpPr/>
           <p:nvPr/>
         </p:nvSpPr>
@@ -7959,7 +9788,7 @@
         <p:spPr>
           <a:xfrm>
             <a:off x="201168" y="1024128"/>
-            <a:ext cx="4279392" cy="1517904"/>
+            <a:ext cx="4279392" cy="1463040"/>
           </a:xfrm>
           <a:prstGeom prst="rect">
             <a:avLst/>
@@ -7978,8 +9807,8 @@
         </p:nvSpPr>
         <p:spPr>
           <a:xfrm>
-            <a:off x="365760" y="1170432"/>
-            <a:ext cx="73152" cy="73152"/>
+            <a:off x="384048" y="1335024"/>
+            <a:ext cx="82296" cy="82296"/>
           </a:xfrm>
           <a:prstGeom prst="ellipse">
             <a:avLst/>
@@ -7998,8 +9827,8 @@
         </p:nvSpPr>
         <p:spPr>
           <a:xfrm>
-            <a:off x="512064" y="1097280"/>
-            <a:ext cx="3840480" cy="402336"/>
+            <a:off x="548640" y="1152144"/>
+            <a:ext cx="3803904" cy="512064"/>
           </a:xfrm>
           <a:prstGeom prst="rect">
             <a:avLst/>
@@ -8013,12 +9842,12 @@
           <a:p>
             <a:pPr indent="0" marL="0">
               <a:lnSpc>
-                <a:spcPct val="110000"/>
+                <a:spcPct val="118000"/>
               </a:lnSpc>
               <a:buNone/>
             </a:pPr>
             <a:r>
-              <a:rPr lang="en-US" sz="950" dirty="0">
+              <a:rPr lang="en-US" sz="1000" dirty="0">
                 <a:solidFill>
                   <a:srgbClr val="595959"/>
                 </a:solidFill>
@@ -8028,7 +9857,7 @@
               </a:rPr>
               <a:t>All operations teams access a dedicated portal at a single URL</a:t>
             </a:r>
-            <a:endParaRPr lang="en-US" sz="950" dirty="0"/>
+            <a:endParaRPr lang="en-US" sz="1000" dirty="0"/>
           </a:p>
         </p:txBody>
       </p:sp>
@@ -8040,8 +9869,8 @@
         </p:nvSpPr>
         <p:spPr>
           <a:xfrm>
-            <a:off x="365760" y="1627632"/>
-            <a:ext cx="73152" cy="73152"/>
+            <a:off x="384048" y="2011680"/>
+            <a:ext cx="82296" cy="82296"/>
           </a:xfrm>
           <a:prstGeom prst="ellipse">
             <a:avLst/>
@@ -8060,8 +9889,8 @@
         </p:nvSpPr>
         <p:spPr>
           <a:xfrm>
-            <a:off x="512064" y="1554480"/>
-            <a:ext cx="3840480" cy="402336"/>
+            <a:off x="548640" y="1828800"/>
+            <a:ext cx="3803904" cy="512064"/>
           </a:xfrm>
           <a:prstGeom prst="rect">
             <a:avLst/>
@@ -8075,12 +9904,12 @@
           <a:p>
             <a:pPr indent="0" marL="0">
               <a:lnSpc>
-                <a:spcPct val="110000"/>
+                <a:spcPct val="118000"/>
               </a:lnSpc>
               <a:buNone/>
             </a:pPr>
             <a:r>
-              <a:rPr lang="en-US" sz="950" dirty="0">
+              <a:rPr lang="en-US" sz="1000" dirty="0">
                 <a:solidFill>
                   <a:srgbClr val="595959"/>
                 </a:solidFill>
@@ -8090,75 +9919,13 @@
               </a:rPr>
               <a:t>Role-appropriate sections displayed without page navigation</a:t>
             </a:r>
-            <a:endParaRPr lang="en-US" sz="950" dirty="0"/>
+            <a:endParaRPr lang="en-US" sz="1000" dirty="0"/>
           </a:p>
         </p:txBody>
       </p:sp>
       <p:sp>
         <p:nvSpPr>
           <p:cNvPr id="12" name="Shape 10"/>
-          <p:cNvSpPr/>
-          <p:nvPr/>
-        </p:nvSpPr>
-        <p:spPr>
-          <a:xfrm>
-            <a:off x="365760" y="2084832"/>
-            <a:ext cx="73152" cy="73152"/>
-          </a:xfrm>
-          <a:prstGeom prst="ellipse">
-            <a:avLst/>
-          </a:prstGeom>
-          <a:solidFill>
-            <a:srgbClr val="007CC3"/>
-          </a:solidFill>
-          <a:ln/>
-        </p:spPr>
-      </p:sp>
-      <p:sp>
-        <p:nvSpPr>
-          <p:cNvPr id="13" name="Text 11"/>
-          <p:cNvSpPr/>
-          <p:nvPr/>
-        </p:nvSpPr>
-        <p:spPr>
-          <a:xfrm>
-            <a:off x="512064" y="2011680"/>
-            <a:ext cx="3840480" cy="402336"/>
-          </a:xfrm>
-          <a:prstGeom prst="rect">
-            <a:avLst/>
-          </a:prstGeom>
-          <a:noFill/>
-          <a:ln/>
-        </p:spPr>
-        <p:txBody>
-          <a:bodyPr wrap="square" rtlCol="0" anchor="ctr"/>
-          <a:lstStyle/>
-          <a:p>
-            <a:pPr indent="0" marL="0">
-              <a:lnSpc>
-                <a:spcPct val="110000"/>
-              </a:lnSpc>
-              <a:buNone/>
-            </a:pPr>
-            <a:r>
-              <a:rPr lang="en-US" sz="950" dirty="0">
-                <a:solidFill>
-                  <a:srgbClr val="595959"/>
-                </a:solidFill>
-                <a:latin typeface="Arial" pitchFamily="34" charset="0"/>
-                <a:ea typeface="Arial" pitchFamily="34" charset="-122"/>
-                <a:cs typeface="Arial" pitchFamily="34" charset="-120"/>
-              </a:rPr>
-              <a:t>Access control enforced through existing ServiceNow role assignments</a:t>
-            </a:r>
-            <a:endParaRPr lang="en-US" sz="950" dirty="0"/>
-          </a:p>
-        </p:txBody>
-      </p:sp>
-      <p:sp>
-        <p:nvSpPr>
-          <p:cNvPr id="14" name="Shape 12"/>
           <p:cNvSpPr/>
           <p:nvPr/>
         </p:nvSpPr>
@@ -8178,7 +9945,7 @@
       </p:sp>
       <p:sp>
         <p:nvSpPr>
-          <p:cNvPr id="15" name="Text 13"/>
+          <p:cNvPr id="13" name="Text 11"/>
           <p:cNvSpPr/>
           <p:nvPr/>
         </p:nvSpPr>
@@ -8217,14 +9984,14 @@
       </p:sp>
       <p:sp>
         <p:nvSpPr>
-          <p:cNvPr id="16" name="Shape 14"/>
+          <p:cNvPr id="14" name="Shape 12"/>
           <p:cNvSpPr/>
           <p:nvPr/>
         </p:nvSpPr>
         <p:spPr>
           <a:xfrm>
             <a:off x="4663440" y="1024128"/>
-            <a:ext cx="4279392" cy="1517904"/>
+            <a:ext cx="4279392" cy="1463040"/>
           </a:xfrm>
           <a:prstGeom prst="rect">
             <a:avLst/>
@@ -8237,14 +10004,76 @@
       </p:sp>
       <p:sp>
         <p:nvSpPr>
+          <p:cNvPr id="15" name="Shape 13"/>
+          <p:cNvSpPr/>
+          <p:nvPr/>
+        </p:nvSpPr>
+        <p:spPr>
+          <a:xfrm>
+            <a:off x="4846320" y="1335024"/>
+            <a:ext cx="82296" cy="82296"/>
+          </a:xfrm>
+          <a:prstGeom prst="ellipse">
+            <a:avLst/>
+          </a:prstGeom>
+          <a:solidFill>
+            <a:srgbClr val="2670C3"/>
+          </a:solidFill>
+          <a:ln/>
+        </p:spPr>
+      </p:sp>
+      <p:sp>
+        <p:nvSpPr>
+          <p:cNvPr id="16" name="Text 14"/>
+          <p:cNvSpPr/>
+          <p:nvPr/>
+        </p:nvSpPr>
+        <p:spPr>
+          <a:xfrm>
+            <a:off x="5010912" y="1152144"/>
+            <a:ext cx="3803904" cy="512064"/>
+          </a:xfrm>
+          <a:prstGeom prst="rect">
+            <a:avLst/>
+          </a:prstGeom>
+          <a:noFill/>
+          <a:ln/>
+        </p:spPr>
+        <p:txBody>
+          <a:bodyPr wrap="square" rtlCol="0" anchor="ctr"/>
+          <a:lstStyle/>
+          <a:p>
+            <a:pPr indent="0" marL="0">
+              <a:lnSpc>
+                <a:spcPct val="118000"/>
+              </a:lnSpc>
+              <a:buNone/>
+            </a:pPr>
+            <a:r>
+              <a:rPr lang="en-US" sz="1000" dirty="0">
+                <a:solidFill>
+                  <a:srgbClr val="595959"/>
+                </a:solidFill>
+                <a:latin typeface="Arial" pitchFamily="34" charset="0"/>
+                <a:ea typeface="Arial" pitchFamily="34" charset="-122"/>
+                <a:cs typeface="Arial" pitchFamily="34" charset="-120"/>
+              </a:rPr>
+              <a:t>All platform interactions conducted through natural language</a:t>
+            </a:r>
+            <a:endParaRPr lang="en-US" sz="1000" dirty="0"/>
+          </a:p>
+        </p:txBody>
+      </p:sp>
+      <p:sp>
+        <p:nvSpPr>
           <p:cNvPr id="17" name="Shape 15"/>
           <p:cNvSpPr/>
           <p:nvPr/>
         </p:nvSpPr>
         <p:spPr>
           <a:xfrm>
-            <a:off x="4828032" y="1170432"/>
-            <a:ext cx="73152" cy="73152"/>
+            <a:off x="4846320" y="2011680"/>
+            <a:ext cx="82296" cy="82296"/>
           </a:xfrm>
           <a:prstGeom prst="ellipse">
             <a:avLst/>
@@ -8263,8 +10092,8 @@
         </p:nvSpPr>
         <p:spPr>
           <a:xfrm>
-            <a:off x="4974336" y="1097280"/>
-            <a:ext cx="3840480" cy="402336"/>
+            <a:off x="5010912" y="1828800"/>
+            <a:ext cx="3803904" cy="512064"/>
           </a:xfrm>
           <a:prstGeom prst="rect">
             <a:avLst/>
@@ -8278,12 +10107,12 @@
           <a:p>
             <a:pPr indent="0" marL="0">
               <a:lnSpc>
-                <a:spcPct val="110000"/>
+                <a:spcPct val="118000"/>
               </a:lnSpc>
               <a:buNone/>
             </a:pPr>
             <a:r>
-              <a:rPr lang="en-US" sz="950" dirty="0">
+              <a:rPr lang="en-US" sz="1000" dirty="0">
                 <a:solidFill>
                   <a:srgbClr val="595959"/>
                 </a:solidFill>
@@ -8291,7 +10120,66 @@
                 <a:ea typeface="Arial" pitchFamily="34" charset="-122"/>
                 <a:cs typeface="Arial" pitchFamily="34" charset="-120"/>
               </a:rPr>
-              <a:t>All platform interactions conducted through natural language</a:t>
+              <a:t>A guided conversation produces the complete technical specification</a:t>
+            </a:r>
+            <a:endParaRPr lang="en-US" sz="1000" dirty="0"/>
+          </a:p>
+        </p:txBody>
+      </p:sp>
+      <p:sp>
+        <p:nvSpPr>
+          <p:cNvPr id="19" name="Shape 17"/>
+          <p:cNvSpPr/>
+          <p:nvPr/>
+        </p:nvSpPr>
+        <p:spPr>
+          <a:xfrm>
+            <a:off x="201168" y="2560320"/>
+            <a:ext cx="4279392" cy="347472"/>
+          </a:xfrm>
+          <a:prstGeom prst="rect">
+            <a:avLst/>
+          </a:prstGeom>
+          <a:solidFill>
+            <a:srgbClr val="007CC3"/>
+          </a:solidFill>
+          <a:ln/>
+        </p:spPr>
+      </p:sp>
+      <p:sp>
+        <p:nvSpPr>
+          <p:cNvPr id="20" name="Text 18"/>
+          <p:cNvSpPr/>
+          <p:nvPr/>
+        </p:nvSpPr>
+        <p:spPr>
+          <a:xfrm>
+            <a:off x="329184" y="2560320"/>
+            <a:ext cx="4151376" cy="347472"/>
+          </a:xfrm>
+          <a:prstGeom prst="rect">
+            <a:avLst/>
+          </a:prstGeom>
+          <a:noFill/>
+          <a:ln/>
+        </p:spPr>
+        <p:txBody>
+          <a:bodyPr wrap="square" rtlCol="0" anchor="ctr"/>
+          <a:lstStyle/>
+          <a:p>
+            <a:pPr indent="0" marL="0">
+              <a:buNone/>
+            </a:pPr>
+            <a:r>
+              <a:rPr lang="en-US" sz="950" b="1" spc="50" kern="0" dirty="0">
+                <a:solidFill>
+                  <a:srgbClr val="FFFFFF"/>
+                </a:solidFill>
+                <a:latin typeface="Arial" pitchFamily="34" charset="0"/>
+                <a:ea typeface="Arial" pitchFamily="34" charset="-122"/>
+                <a:cs typeface="Arial" pitchFamily="34" charset="-120"/>
+              </a:rPr>
+              <a:t>PROPORTIONAL GOVERNANCE MODEL</a:t>
             </a:r>
             <a:endParaRPr lang="en-US" sz="950" dirty="0"/>
           </a:p>
@@ -8299,19 +10187,163 @@
       </p:sp>
       <p:sp>
         <p:nvSpPr>
-          <p:cNvPr id="19" name="Shape 17"/>
-          <p:cNvSpPr/>
-          <p:nvPr/>
-        </p:nvSpPr>
-        <p:spPr>
-          <a:xfrm>
-            <a:off x="4828032" y="1627632"/>
-            <a:ext cx="73152" cy="73152"/>
+          <p:cNvPr id="21" name="Shape 19"/>
+          <p:cNvSpPr/>
+          <p:nvPr/>
+        </p:nvSpPr>
+        <p:spPr>
+          <a:xfrm>
+            <a:off x="201168" y="2907792"/>
+            <a:ext cx="4279392" cy="1463040"/>
+          </a:xfrm>
+          <a:prstGeom prst="rect">
+            <a:avLst/>
+          </a:prstGeom>
+          <a:solidFill>
+            <a:srgbClr val="F5FAFF"/>
+          </a:solidFill>
+          <a:ln/>
+        </p:spPr>
+      </p:sp>
+      <p:sp>
+        <p:nvSpPr>
+          <p:cNvPr id="22" name="Shape 20"/>
+          <p:cNvSpPr/>
+          <p:nvPr/>
+        </p:nvSpPr>
+        <p:spPr>
+          <a:xfrm>
+            <a:off x="384048" y="3218688"/>
+            <a:ext cx="82296" cy="82296"/>
           </a:xfrm>
           <a:prstGeom prst="ellipse">
             <a:avLst/>
           </a:prstGeom>
           <a:solidFill>
+            <a:srgbClr val="007CC3"/>
+          </a:solidFill>
+          <a:ln/>
+        </p:spPr>
+      </p:sp>
+      <p:sp>
+        <p:nvSpPr>
+          <p:cNvPr id="23" name="Text 21"/>
+          <p:cNvSpPr/>
+          <p:nvPr/>
+        </p:nvSpPr>
+        <p:spPr>
+          <a:xfrm>
+            <a:off x="548640" y="3035808"/>
+            <a:ext cx="3803904" cy="512064"/>
+          </a:xfrm>
+          <a:prstGeom prst="rect">
+            <a:avLst/>
+          </a:prstGeom>
+          <a:noFill/>
+          <a:ln/>
+        </p:spPr>
+        <p:txBody>
+          <a:bodyPr wrap="square" rtlCol="0" anchor="ctr"/>
+          <a:lstStyle/>
+          <a:p>
+            <a:pPr indent="0" marL="0">
+              <a:lnSpc>
+                <a:spcPct val="118000"/>
+              </a:lnSpc>
+              <a:buNone/>
+            </a:pPr>
+            <a:r>
+              <a:rPr lang="en-US" sz="1000" dirty="0">
+                <a:solidFill>
+                  <a:srgbClr val="595959"/>
+                </a:solidFill>
+                <a:latin typeface="Arial" pitchFamily="34" charset="0"/>
+                <a:ea typeface="Arial" pitchFamily="34" charset="-122"/>
+                <a:cs typeface="Arial" pitchFamily="34" charset="-120"/>
+              </a:rPr>
+              <a:t>Approval requirements scale proportionally with the impact of the change</a:t>
+            </a:r>
+            <a:endParaRPr lang="en-US" sz="1000" dirty="0"/>
+          </a:p>
+        </p:txBody>
+      </p:sp>
+      <p:sp>
+        <p:nvSpPr>
+          <p:cNvPr id="24" name="Shape 22"/>
+          <p:cNvSpPr/>
+          <p:nvPr/>
+        </p:nvSpPr>
+        <p:spPr>
+          <a:xfrm>
+            <a:off x="384048" y="3895344"/>
+            <a:ext cx="82296" cy="82296"/>
+          </a:xfrm>
+          <a:prstGeom prst="ellipse">
+            <a:avLst/>
+          </a:prstGeom>
+          <a:solidFill>
+            <a:srgbClr val="007CC3"/>
+          </a:solidFill>
+          <a:ln/>
+        </p:spPr>
+      </p:sp>
+      <p:sp>
+        <p:nvSpPr>
+          <p:cNvPr id="25" name="Text 23"/>
+          <p:cNvSpPr/>
+          <p:nvPr/>
+        </p:nvSpPr>
+        <p:spPr>
+          <a:xfrm>
+            <a:off x="548640" y="3712464"/>
+            <a:ext cx="3803904" cy="512064"/>
+          </a:xfrm>
+          <a:prstGeom prst="rect">
+            <a:avLst/>
+          </a:prstGeom>
+          <a:noFill/>
+          <a:ln/>
+        </p:spPr>
+        <p:txBody>
+          <a:bodyPr wrap="square" rtlCol="0" anchor="ctr"/>
+          <a:lstStyle/>
+          <a:p>
+            <a:pPr indent="0" marL="0">
+              <a:lnSpc>
+                <a:spcPct val="118000"/>
+              </a:lnSpc>
+              <a:buNone/>
+            </a:pPr>
+            <a:r>
+              <a:rPr lang="en-US" sz="1000" dirty="0">
+                <a:solidFill>
+                  <a:srgbClr val="595959"/>
+                </a:solidFill>
+                <a:latin typeface="Arial" pitchFamily="34" charset="0"/>
+                <a:ea typeface="Arial" pitchFamily="34" charset="-122"/>
+                <a:cs typeface="Arial" pitchFamily="34" charset="-120"/>
+              </a:rPr>
+              <a:t>Deadlines and escalation paths automated for every pending action</a:t>
+            </a:r>
+            <a:endParaRPr lang="en-US" sz="1000" dirty="0"/>
+          </a:p>
+        </p:txBody>
+      </p:sp>
+      <p:sp>
+        <p:nvSpPr>
+          <p:cNvPr id="26" name="Shape 24"/>
+          <p:cNvSpPr/>
+          <p:nvPr/>
+        </p:nvSpPr>
+        <p:spPr>
+          <a:xfrm>
+            <a:off x="4663440" y="2560320"/>
+            <a:ext cx="4279392" cy="347472"/>
+          </a:xfrm>
+          <a:prstGeom prst="rect">
+            <a:avLst/>
+          </a:prstGeom>
+          <a:solidFill>
             <a:srgbClr val="2670C3"/>
           </a:solidFill>
           <a:ln/>
@@ -8319,14 +10351,93 @@
       </p:sp>
       <p:sp>
         <p:nvSpPr>
-          <p:cNvPr id="20" name="Text 18"/>
-          <p:cNvSpPr/>
-          <p:nvPr/>
-        </p:nvSpPr>
-        <p:spPr>
-          <a:xfrm>
-            <a:off x="4974336" y="1554480"/>
-            <a:ext cx="3840480" cy="402336"/>
+          <p:cNvPr id="27" name="Text 25"/>
+          <p:cNvSpPr/>
+          <p:nvPr/>
+        </p:nvSpPr>
+        <p:spPr>
+          <a:xfrm>
+            <a:off x="4791456" y="2560320"/>
+            <a:ext cx="4151376" cy="347472"/>
+          </a:xfrm>
+          <a:prstGeom prst="rect">
+            <a:avLst/>
+          </a:prstGeom>
+          <a:noFill/>
+          <a:ln/>
+        </p:spPr>
+        <p:txBody>
+          <a:bodyPr wrap="square" rtlCol="0" anchor="ctr"/>
+          <a:lstStyle/>
+          <a:p>
+            <a:pPr indent="0" marL="0">
+              <a:buNone/>
+            </a:pPr>
+            <a:r>
+              <a:rPr lang="en-US" sz="950" b="1" spc="50" kern="0" dirty="0">
+                <a:solidFill>
+                  <a:srgbClr val="FFFFFF"/>
+                </a:solidFill>
+                <a:latin typeface="Arial" pitchFamily="34" charset="0"/>
+                <a:ea typeface="Arial" pitchFamily="34" charset="-122"/>
+                <a:cs typeface="Arial" pitchFamily="34" charset="-120"/>
+              </a:rPr>
+              <a:t>AI-AUGMENTED CREATION</a:t>
+            </a:r>
+            <a:endParaRPr lang="en-US" sz="950" dirty="0"/>
+          </a:p>
+        </p:txBody>
+      </p:sp>
+      <p:sp>
+        <p:nvSpPr>
+          <p:cNvPr id="28" name="Shape 26"/>
+          <p:cNvSpPr/>
+          <p:nvPr/>
+        </p:nvSpPr>
+        <p:spPr>
+          <a:xfrm>
+            <a:off x="4663440" y="2907792"/>
+            <a:ext cx="4279392" cy="1463040"/>
+          </a:xfrm>
+          <a:prstGeom prst="rect">
+            <a:avLst/>
+          </a:prstGeom>
+          <a:solidFill>
+            <a:srgbClr val="F5FAFF"/>
+          </a:solidFill>
+          <a:ln/>
+        </p:spPr>
+      </p:sp>
+      <p:sp>
+        <p:nvSpPr>
+          <p:cNvPr id="29" name="Shape 27"/>
+          <p:cNvSpPr/>
+          <p:nvPr/>
+        </p:nvSpPr>
+        <p:spPr>
+          <a:xfrm>
+            <a:off x="4846320" y="3218688"/>
+            <a:ext cx="82296" cy="82296"/>
+          </a:xfrm>
+          <a:prstGeom prst="ellipse">
+            <a:avLst/>
+          </a:prstGeom>
+          <a:solidFill>
+            <a:srgbClr val="2670C3"/>
+          </a:solidFill>
+          <a:ln/>
+        </p:spPr>
+      </p:sp>
+      <p:sp>
+        <p:nvSpPr>
+          <p:cNvPr id="30" name="Text 28"/>
+          <p:cNvSpPr/>
+          <p:nvPr/>
+        </p:nvSpPr>
+        <p:spPr>
+          <a:xfrm>
+            <a:off x="5010912" y="3035808"/>
+            <a:ext cx="3803904" cy="512064"/>
           </a:xfrm>
           <a:prstGeom prst="rect">
             <a:avLst/>
@@ -8340,12 +10451,12 @@
           <a:p>
             <a:pPr indent="0" marL="0">
               <a:lnSpc>
-                <a:spcPct val="110000"/>
+                <a:spcPct val="118000"/>
               </a:lnSpc>
               <a:buNone/>
             </a:pPr>
             <a:r>
-              <a:rPr lang="en-US" sz="950" dirty="0">
+              <a:rPr lang="en-US" sz="1000" dirty="0">
                 <a:solidFill>
                   <a:srgbClr val="595959"/>
                 </a:solidFill>
@@ -8353,22 +10464,22 @@
                 <a:ea typeface="Arial" pitchFamily="34" charset="-122"/>
                 <a:cs typeface="Arial" pitchFamily="34" charset="-120"/>
               </a:rPr>
-              <a:t>The Operations Assistant interprets requirements across all ServiceNow domains</a:t>
-            </a:r>
-            <a:endParaRPr lang="en-US" sz="950" dirty="0"/>
-          </a:p>
-        </p:txBody>
-      </p:sp>
-      <p:sp>
-        <p:nvSpPr>
-          <p:cNvPr id="21" name="Shape 19"/>
-          <p:cNvSpPr/>
-          <p:nvPr/>
-        </p:nvSpPr>
-        <p:spPr>
-          <a:xfrm>
-            <a:off x="4828032" y="2084832"/>
-            <a:ext cx="73152" cy="73152"/>
+              <a:t>GitHub Copilot generates technical specifications on request</a:t>
+            </a:r>
+            <a:endParaRPr lang="en-US" sz="1000" dirty="0"/>
+          </a:p>
+        </p:txBody>
+      </p:sp>
+      <p:sp>
+        <p:nvSpPr>
+          <p:cNvPr id="31" name="Shape 29"/>
+          <p:cNvSpPr/>
+          <p:nvPr/>
+        </p:nvSpPr>
+        <p:spPr>
+          <a:xfrm>
+            <a:off x="4846320" y="3895344"/>
+            <a:ext cx="82296" cy="82296"/>
           </a:xfrm>
           <a:prstGeom prst="ellipse">
             <a:avLst/>
@@ -8381,14 +10492,14 @@
       </p:sp>
       <p:sp>
         <p:nvSpPr>
-          <p:cNvPr id="22" name="Text 20"/>
-          <p:cNvSpPr/>
-          <p:nvPr/>
-        </p:nvSpPr>
-        <p:spPr>
-          <a:xfrm>
-            <a:off x="4974336" y="2011680"/>
-            <a:ext cx="3840480" cy="402336"/>
+          <p:cNvPr id="32" name="Text 30"/>
+          <p:cNvSpPr/>
+          <p:nvPr/>
+        </p:nvSpPr>
+        <p:spPr>
+          <a:xfrm>
+            <a:off x="5010912" y="3712464"/>
+            <a:ext cx="3803904" cy="512064"/>
           </a:xfrm>
           <a:prstGeom prst="rect">
             <a:avLst/>
@@ -8402,12 +10513,12 @@
           <a:p>
             <a:pPr indent="0" marL="0">
               <a:lnSpc>
-                <a:spcPct val="110000"/>
+                <a:spcPct val="118000"/>
               </a:lnSpc>
               <a:buNone/>
             </a:pPr>
             <a:r>
-              <a:rPr lang="en-US" sz="950" dirty="0">
+              <a:rPr lang="en-US" sz="1000" dirty="0">
                 <a:solidFill>
                   <a:srgbClr val="595959"/>
                 </a:solidFill>
@@ -8415,545 +10526,15 @@
                 <a:ea typeface="Arial" pitchFamily="34" charset="-122"/>
                 <a:cs typeface="Arial" pitchFamily="34" charset="-120"/>
               </a:rPr>
-              <a:t>A guided conversation produces the complete technical specification</a:t>
-            </a:r>
-            <a:endParaRPr lang="en-US" sz="950" dirty="0"/>
-          </a:p>
-        </p:txBody>
-      </p:sp>
-      <p:sp>
-        <p:nvSpPr>
-          <p:cNvPr id="23" name="Shape 21"/>
-          <p:cNvSpPr/>
-          <p:nvPr/>
-        </p:nvSpPr>
-        <p:spPr>
-          <a:xfrm>
-            <a:off x="201168" y="2615184"/>
-            <a:ext cx="4279392" cy="347472"/>
-          </a:xfrm>
-          <a:prstGeom prst="rect">
-            <a:avLst/>
-          </a:prstGeom>
-          <a:solidFill>
-            <a:srgbClr val="007CC3"/>
-          </a:solidFill>
-          <a:ln/>
-        </p:spPr>
-      </p:sp>
-      <p:sp>
-        <p:nvSpPr>
-          <p:cNvPr id="24" name="Text 22"/>
-          <p:cNvSpPr/>
-          <p:nvPr/>
-        </p:nvSpPr>
-        <p:spPr>
-          <a:xfrm>
-            <a:off x="329184" y="2615184"/>
-            <a:ext cx="4151376" cy="347472"/>
-          </a:xfrm>
-          <a:prstGeom prst="rect">
-            <a:avLst/>
-          </a:prstGeom>
-          <a:noFill/>
-          <a:ln/>
-        </p:spPr>
-        <p:txBody>
-          <a:bodyPr wrap="square" rtlCol="0" anchor="ctr"/>
-          <a:lstStyle/>
-          <a:p>
-            <a:pPr indent="0" marL="0">
-              <a:buNone/>
-            </a:pPr>
-            <a:r>
-              <a:rPr lang="en-US" sz="950" b="1" spc="50" kern="0" dirty="0">
-                <a:solidFill>
-                  <a:srgbClr val="FFFFFF"/>
-                </a:solidFill>
-                <a:latin typeface="Arial" pitchFamily="34" charset="0"/>
-                <a:ea typeface="Arial" pitchFamily="34" charset="-122"/>
-                <a:cs typeface="Arial" pitchFamily="34" charset="-120"/>
-              </a:rPr>
-              <a:t>PROPORTIONAL GOVERNANCE MODEL</a:t>
-            </a:r>
-            <a:endParaRPr lang="en-US" sz="950" dirty="0"/>
-          </a:p>
-        </p:txBody>
-      </p:sp>
-      <p:sp>
-        <p:nvSpPr>
-          <p:cNvPr id="25" name="Shape 23"/>
-          <p:cNvSpPr/>
-          <p:nvPr/>
-        </p:nvSpPr>
-        <p:spPr>
-          <a:xfrm>
-            <a:off x="201168" y="2962656"/>
-            <a:ext cx="4279392" cy="1517904"/>
-          </a:xfrm>
-          <a:prstGeom prst="rect">
-            <a:avLst/>
-          </a:prstGeom>
-          <a:solidFill>
-            <a:srgbClr val="F5FAFF"/>
-          </a:solidFill>
-          <a:ln/>
-        </p:spPr>
-      </p:sp>
-      <p:sp>
-        <p:nvSpPr>
-          <p:cNvPr id="26" name="Shape 24"/>
-          <p:cNvSpPr/>
-          <p:nvPr/>
-        </p:nvSpPr>
-        <p:spPr>
-          <a:xfrm>
-            <a:off x="365760" y="3108960"/>
-            <a:ext cx="73152" cy="73152"/>
-          </a:xfrm>
-          <a:prstGeom prst="ellipse">
-            <a:avLst/>
-          </a:prstGeom>
-          <a:solidFill>
-            <a:srgbClr val="007CC3"/>
-          </a:solidFill>
-          <a:ln/>
-        </p:spPr>
-      </p:sp>
-      <p:sp>
-        <p:nvSpPr>
-          <p:cNvPr id="27" name="Text 25"/>
-          <p:cNvSpPr/>
-          <p:nvPr/>
-        </p:nvSpPr>
-        <p:spPr>
-          <a:xfrm>
-            <a:off x="512064" y="3035808"/>
-            <a:ext cx="3840480" cy="402336"/>
-          </a:xfrm>
-          <a:prstGeom prst="rect">
-            <a:avLst/>
-          </a:prstGeom>
-          <a:noFill/>
-          <a:ln/>
-        </p:spPr>
-        <p:txBody>
-          <a:bodyPr wrap="square" rtlCol="0" anchor="ctr"/>
-          <a:lstStyle/>
-          <a:p>
-            <a:pPr indent="0" marL="0">
-              <a:lnSpc>
-                <a:spcPct val="110000"/>
-              </a:lnSpc>
-              <a:buNone/>
-            </a:pPr>
-            <a:r>
-              <a:rPr lang="en-US" sz="950" dirty="0">
-                <a:solidFill>
-                  <a:srgbClr val="595959"/>
-                </a:solidFill>
-                <a:latin typeface="Arial" pitchFamily="34" charset="0"/>
-                <a:ea typeface="Arial" pitchFamily="34" charset="-122"/>
-                <a:cs typeface="Arial" pitchFamily="34" charset="-120"/>
-              </a:rPr>
-              <a:t>Approval requirements proportional to the impact of the requested change</a:t>
-            </a:r>
-            <a:endParaRPr lang="en-US" sz="950" dirty="0"/>
-          </a:p>
-        </p:txBody>
-      </p:sp>
-      <p:sp>
-        <p:nvSpPr>
-          <p:cNvPr id="28" name="Shape 26"/>
-          <p:cNvSpPr/>
-          <p:nvPr/>
-        </p:nvSpPr>
-        <p:spPr>
-          <a:xfrm>
-            <a:off x="365760" y="3566160"/>
-            <a:ext cx="73152" cy="73152"/>
-          </a:xfrm>
-          <a:prstGeom prst="ellipse">
-            <a:avLst/>
-          </a:prstGeom>
-          <a:solidFill>
-            <a:srgbClr val="007CC3"/>
-          </a:solidFill>
-          <a:ln/>
-        </p:spPr>
-      </p:sp>
-      <p:sp>
-        <p:nvSpPr>
-          <p:cNvPr id="29" name="Text 27"/>
-          <p:cNvSpPr/>
-          <p:nvPr/>
-        </p:nvSpPr>
-        <p:spPr>
-          <a:xfrm>
-            <a:off x="512064" y="3493008"/>
-            <a:ext cx="3840480" cy="402336"/>
-          </a:xfrm>
-          <a:prstGeom prst="rect">
-            <a:avLst/>
-          </a:prstGeom>
-          <a:noFill/>
-          <a:ln/>
-        </p:spPr>
-        <p:txBody>
-          <a:bodyPr wrap="square" rtlCol="0" anchor="ctr"/>
-          <a:lstStyle/>
-          <a:p>
-            <a:pPr indent="0" marL="0">
-              <a:lnSpc>
-                <a:spcPct val="110000"/>
-              </a:lnSpc>
-              <a:buNone/>
-            </a:pPr>
-            <a:r>
-              <a:rPr lang="en-US" sz="950" dirty="0">
-                <a:solidFill>
-                  <a:srgbClr val="595959"/>
-                </a:solidFill>
-                <a:latin typeface="Arial" pitchFamily="34" charset="0"/>
-                <a:ea typeface="Arial" pitchFamily="34" charset="-122"/>
-                <a:cs typeface="Arial" pitchFamily="34" charset="-120"/>
-              </a:rPr>
-              <a:t>Deadlines and escalation paths defined and automated for every pending action</a:t>
-            </a:r>
-            <a:endParaRPr lang="en-US" sz="950" dirty="0"/>
-          </a:p>
-        </p:txBody>
-      </p:sp>
-      <p:sp>
-        <p:nvSpPr>
-          <p:cNvPr id="30" name="Shape 28"/>
-          <p:cNvSpPr/>
-          <p:nvPr/>
-        </p:nvSpPr>
-        <p:spPr>
-          <a:xfrm>
-            <a:off x="365760" y="4023360"/>
-            <a:ext cx="73152" cy="73152"/>
-          </a:xfrm>
-          <a:prstGeom prst="ellipse">
-            <a:avLst/>
-          </a:prstGeom>
-          <a:solidFill>
-            <a:srgbClr val="007CC3"/>
-          </a:solidFill>
-          <a:ln/>
-        </p:spPr>
-      </p:sp>
-      <p:sp>
-        <p:nvSpPr>
-          <p:cNvPr id="31" name="Text 29"/>
-          <p:cNvSpPr/>
-          <p:nvPr/>
-        </p:nvSpPr>
-        <p:spPr>
-          <a:xfrm>
-            <a:off x="512064" y="3950208"/>
-            <a:ext cx="3840480" cy="402336"/>
-          </a:xfrm>
-          <a:prstGeom prst="rect">
-            <a:avLst/>
-          </a:prstGeom>
-          <a:noFill/>
-          <a:ln/>
-        </p:spPr>
-        <p:txBody>
-          <a:bodyPr wrap="square" rtlCol="0" anchor="ctr"/>
-          <a:lstStyle/>
-          <a:p>
-            <a:pPr indent="0" marL="0">
-              <a:lnSpc>
-                <a:spcPct val="110000"/>
-              </a:lnSpc>
-              <a:buNone/>
-            </a:pPr>
-            <a:r>
-              <a:rPr lang="en-US" sz="950" dirty="0">
-                <a:solidFill>
-                  <a:srgbClr val="595959"/>
-                </a:solidFill>
-                <a:latin typeface="Arial" pitchFamily="34" charset="0"/>
-                <a:ea typeface="Arial" pitchFamily="34" charset="-122"/>
-                <a:cs typeface="Arial" pitchFamily="34" charset="-120"/>
-              </a:rPr>
-              <a:t>Leadership retains immediate override authority across all group automations</a:t>
-            </a:r>
-            <a:endParaRPr lang="en-US" sz="950" dirty="0"/>
-          </a:p>
-        </p:txBody>
-      </p:sp>
-      <p:sp>
-        <p:nvSpPr>
-          <p:cNvPr id="32" name="Shape 30"/>
-          <p:cNvSpPr/>
-          <p:nvPr/>
-        </p:nvSpPr>
-        <p:spPr>
-          <a:xfrm>
-            <a:off x="4663440" y="2615184"/>
-            <a:ext cx="4279392" cy="347472"/>
-          </a:xfrm>
-          <a:prstGeom prst="rect">
-            <a:avLst/>
-          </a:prstGeom>
-          <a:solidFill>
-            <a:srgbClr val="2670C3"/>
-          </a:solidFill>
-          <a:ln/>
-        </p:spPr>
-      </p:sp>
-      <p:sp>
-        <p:nvSpPr>
-          <p:cNvPr id="33" name="Text 31"/>
-          <p:cNvSpPr/>
-          <p:nvPr/>
-        </p:nvSpPr>
-        <p:spPr>
-          <a:xfrm>
-            <a:off x="4791456" y="2615184"/>
-            <a:ext cx="4151376" cy="347472"/>
-          </a:xfrm>
-          <a:prstGeom prst="rect">
-            <a:avLst/>
-          </a:prstGeom>
-          <a:noFill/>
-          <a:ln/>
-        </p:spPr>
-        <p:txBody>
-          <a:bodyPr wrap="square" rtlCol="0" anchor="ctr"/>
-          <a:lstStyle/>
-          <a:p>
-            <a:pPr indent="0" marL="0">
-              <a:buNone/>
-            </a:pPr>
-            <a:r>
-              <a:rPr lang="en-US" sz="950" b="1" spc="50" kern="0" dirty="0">
-                <a:solidFill>
-                  <a:srgbClr val="FFFFFF"/>
-                </a:solidFill>
-                <a:latin typeface="Arial" pitchFamily="34" charset="0"/>
-                <a:ea typeface="Arial" pitchFamily="34" charset="-122"/>
-                <a:cs typeface="Arial" pitchFamily="34" charset="-120"/>
-              </a:rPr>
-              <a:t>AI-AUGMENTED CREATION</a:t>
-            </a:r>
-            <a:endParaRPr lang="en-US" sz="950" dirty="0"/>
-          </a:p>
-        </p:txBody>
-      </p:sp>
-      <p:sp>
-        <p:nvSpPr>
-          <p:cNvPr id="34" name="Shape 32"/>
-          <p:cNvSpPr/>
-          <p:nvPr/>
-        </p:nvSpPr>
-        <p:spPr>
-          <a:xfrm>
-            <a:off x="4663440" y="2962656"/>
-            <a:ext cx="4279392" cy="1517904"/>
-          </a:xfrm>
-          <a:prstGeom prst="rect">
-            <a:avLst/>
-          </a:prstGeom>
-          <a:solidFill>
-            <a:srgbClr val="F5FAFF"/>
-          </a:solidFill>
-          <a:ln/>
-        </p:spPr>
-      </p:sp>
-      <p:sp>
-        <p:nvSpPr>
-          <p:cNvPr id="35" name="Shape 33"/>
-          <p:cNvSpPr/>
-          <p:nvPr/>
-        </p:nvSpPr>
-        <p:spPr>
-          <a:xfrm>
-            <a:off x="4828032" y="3108960"/>
-            <a:ext cx="73152" cy="73152"/>
-          </a:xfrm>
-          <a:prstGeom prst="ellipse">
-            <a:avLst/>
-          </a:prstGeom>
-          <a:solidFill>
-            <a:srgbClr val="2670C3"/>
-          </a:solidFill>
-          <a:ln/>
-        </p:spPr>
-      </p:sp>
-      <p:sp>
-        <p:nvSpPr>
-          <p:cNvPr id="36" name="Text 34"/>
-          <p:cNvSpPr/>
-          <p:nvPr/>
-        </p:nvSpPr>
-        <p:spPr>
-          <a:xfrm>
-            <a:off x="4974336" y="3035808"/>
-            <a:ext cx="3840480" cy="402336"/>
-          </a:xfrm>
-          <a:prstGeom prst="rect">
-            <a:avLst/>
-          </a:prstGeom>
-          <a:noFill/>
-          <a:ln/>
-        </p:spPr>
-        <p:txBody>
-          <a:bodyPr wrap="square" rtlCol="0" anchor="ctr"/>
-          <a:lstStyle/>
-          <a:p>
-            <a:pPr indent="0" marL="0">
-              <a:lnSpc>
-                <a:spcPct val="110000"/>
-              </a:lnSpc>
-              <a:buNone/>
-            </a:pPr>
-            <a:r>
-              <a:rPr lang="en-US" sz="950" dirty="0">
-                <a:solidFill>
-                  <a:srgbClr val="595959"/>
-                </a:solidFill>
-                <a:latin typeface="Arial" pitchFamily="34" charset="0"/>
-                <a:ea typeface="Arial" pitchFamily="34" charset="-122"/>
-                <a:cs typeface="Arial" pitchFamily="34" charset="-120"/>
-              </a:rPr>
-              <a:t>GitHub Copilot generates technical specifications when the user cannot supply them</a:t>
-            </a:r>
-            <a:endParaRPr lang="en-US" sz="950" dirty="0"/>
-          </a:p>
-        </p:txBody>
-      </p:sp>
-      <p:sp>
-        <p:nvSpPr>
-          <p:cNvPr id="37" name="Shape 35"/>
-          <p:cNvSpPr/>
-          <p:nvPr/>
-        </p:nvSpPr>
-        <p:spPr>
-          <a:xfrm>
-            <a:off x="4828032" y="3566160"/>
-            <a:ext cx="73152" cy="73152"/>
-          </a:xfrm>
-          <a:prstGeom prst="ellipse">
-            <a:avLst/>
-          </a:prstGeom>
-          <a:solidFill>
-            <a:srgbClr val="2670C3"/>
-          </a:solidFill>
-          <a:ln/>
-        </p:spPr>
-      </p:sp>
-      <p:sp>
-        <p:nvSpPr>
-          <p:cNvPr id="38" name="Text 36"/>
-          <p:cNvSpPr/>
-          <p:nvPr/>
-        </p:nvSpPr>
-        <p:spPr>
-          <a:xfrm>
-            <a:off x="4974336" y="3493008"/>
-            <a:ext cx="3840480" cy="402336"/>
-          </a:xfrm>
-          <a:prstGeom prst="rect">
-            <a:avLst/>
-          </a:prstGeom>
-          <a:noFill/>
-          <a:ln/>
-        </p:spPr>
-        <p:txBody>
-          <a:bodyPr wrap="square" rtlCol="0" anchor="ctr"/>
-          <a:lstStyle/>
-          <a:p>
-            <a:pPr indent="0" marL="0">
-              <a:lnSpc>
-                <a:spcPct val="110000"/>
-              </a:lnSpc>
-              <a:buNone/>
-            </a:pPr>
-            <a:r>
-              <a:rPr lang="en-US" sz="950" dirty="0">
-                <a:solidFill>
-                  <a:srgbClr val="595959"/>
-                </a:solidFill>
-                <a:latin typeface="Arial" pitchFamily="34" charset="0"/>
-                <a:ea typeface="Arial" pitchFamily="34" charset="-122"/>
-                <a:cs typeface="Arial" pitchFamily="34" charset="-120"/>
-              </a:rPr>
-              <a:t>All Copilot suggestions confirmed by the creator before being applied</a:t>
-            </a:r>
-            <a:endParaRPr lang="en-US" sz="950" dirty="0"/>
-          </a:p>
-        </p:txBody>
-      </p:sp>
-      <p:sp>
-        <p:nvSpPr>
-          <p:cNvPr id="39" name="Shape 37"/>
-          <p:cNvSpPr/>
-          <p:nvPr/>
-        </p:nvSpPr>
-        <p:spPr>
-          <a:xfrm>
-            <a:off x="4828032" y="4023360"/>
-            <a:ext cx="73152" cy="73152"/>
-          </a:xfrm>
-          <a:prstGeom prst="ellipse">
-            <a:avLst/>
-          </a:prstGeom>
-          <a:solidFill>
-            <a:srgbClr val="2670C3"/>
-          </a:solidFill>
-          <a:ln/>
-        </p:spPr>
-      </p:sp>
-      <p:sp>
-        <p:nvSpPr>
-          <p:cNvPr id="40" name="Text 38"/>
-          <p:cNvSpPr/>
-          <p:nvPr/>
-        </p:nvSpPr>
-        <p:spPr>
-          <a:xfrm>
-            <a:off x="4974336" y="3950208"/>
-            <a:ext cx="3840480" cy="402336"/>
-          </a:xfrm>
-          <a:prstGeom prst="rect">
-            <a:avLst/>
-          </a:prstGeom>
-          <a:noFill/>
-          <a:ln/>
-        </p:spPr>
-        <p:txBody>
-          <a:bodyPr wrap="square" rtlCol="0" anchor="ctr"/>
-          <a:lstStyle/>
-          <a:p>
-            <a:pPr indent="0" marL="0">
-              <a:lnSpc>
-                <a:spcPct val="110000"/>
-              </a:lnSpc>
-              <a:buNone/>
-            </a:pPr>
-            <a:r>
-              <a:rPr lang="en-US" sz="950" dirty="0">
-                <a:solidFill>
-                  <a:srgbClr val="595959"/>
-                </a:solidFill>
-                <a:latin typeface="Arial" pitchFamily="34" charset="0"/>
-                <a:ea typeface="Arial" pitchFamily="34" charset="-122"/>
-                <a:cs typeface="Arial" pitchFamily="34" charset="-120"/>
-              </a:rPr>
-              <a:t>Specialist technical knowledge is no longer required for automation design</a:t>
-            </a:r>
-            <a:endParaRPr lang="en-US" sz="950" dirty="0"/>
+              <a:t>All Copilot output is confirmed by the creator before being applied</a:t>
+            </a:r>
+            <a:endParaRPr lang="en-US" sz="1000" dirty="0"/>
           </a:p>
         </p:txBody>
       </p:sp>
       <p:pic>
         <p:nvPicPr>
-          <p:cNvPr id="41" name="Image 0" descr="preencoded.png">    </p:cNvPr>
+          <p:cNvPr id="33" name="Image 0" descr="preencoded.png">    </p:cNvPr>
           <p:cNvPicPr>
             <a:picLocks noChangeAspect="1"/>
           </p:cNvPicPr>
@@ -8977,7 +10558,7 @@
       </p:pic>
       <p:sp>
         <p:nvSpPr>
-          <p:cNvPr id="42" name="Text 39"/>
+          <p:cNvPr id="34" name="Text 31"/>
           <p:cNvSpPr/>
           <p:nvPr/>
         </p:nvSpPr>
@@ -9119,7 +10700,7 @@
                 <a:ea typeface="Arial" pitchFamily="34" charset="-122"/>
                 <a:cs typeface="Arial" pitchFamily="34" charset="-120"/>
               </a:rPr>
-              <a:t>Prototype — Week 1 Progress</a:t>
+              <a:t>Prototype — Current Progress</a:t>
             </a:r>
             <a:endParaRPr lang="en-US" sz="2000" dirty="0"/>
           </a:p>
@@ -9158,7 +10739,7 @@
                 <a:ea typeface="Arial" pitchFamily="34" charset="-122"/>
                 <a:cs typeface="Arial" pitchFamily="34" charset="-120"/>
               </a:rPr>
-              <a:t>Initiated and delivered within the first week of the initiative</a:t>
+              <a:t>Early-stage prototype under active development — foundational capabilities in place</a:t>
             </a:r>
             <a:endParaRPr lang="en-US" sz="1050" dirty="0"/>
           </a:p>
@@ -9172,7 +10753,7 @@
         </p:nvSpPr>
         <p:spPr>
           <a:xfrm>
-            <a:off x="201168" y="932688"/>
+            <a:off x="201168" y="950976"/>
             <a:ext cx="8741664" cy="786384"/>
           </a:xfrm>
           <a:prstGeom prst="rect">
@@ -9192,7 +10773,7 @@
         </p:nvSpPr>
         <p:spPr>
           <a:xfrm>
-            <a:off x="201168" y="932688"/>
+            <a:off x="201168" y="950976"/>
             <a:ext cx="64008" cy="786384"/>
           </a:xfrm>
           <a:prstGeom prst="rect">
@@ -9212,7 +10793,7 @@
         </p:nvSpPr>
         <p:spPr>
           <a:xfrm>
-            <a:off x="301752" y="932688"/>
+            <a:off x="301752" y="950976"/>
             <a:ext cx="786384" cy="786384"/>
           </a:xfrm>
           <a:prstGeom prst="rect">
@@ -9229,7 +10810,7 @@
               <a:buNone/>
             </a:pPr>
             <a:r>
-              <a:rPr lang="en-US" sz="2600" b="1" dirty="0">
+              <a:rPr lang="en-US" sz="2400" b="1" dirty="0">
                 <a:solidFill>
                   <a:srgbClr val="007CC3"/>
                 </a:solidFill>
@@ -9239,7 +10820,7 @@
               </a:rPr>
               <a:t>01</a:t>
             </a:r>
-            <a:endParaRPr lang="en-US" sz="2600" dirty="0"/>
+            <a:endParaRPr lang="en-US" sz="2400" dirty="0"/>
           </a:p>
         </p:txBody>
       </p:sp>
@@ -9251,8 +10832,8 @@
         </p:nvSpPr>
         <p:spPr>
           <a:xfrm>
-            <a:off x="1124712" y="1024128"/>
-            <a:ext cx="10973" cy="603504"/>
+            <a:off x="1124712" y="1060704"/>
+            <a:ext cx="10973" cy="566928"/>
           </a:xfrm>
           <a:prstGeom prst="rect">
             <a:avLst/>
@@ -9271,8 +10852,8 @@
         </p:nvSpPr>
         <p:spPr>
           <a:xfrm>
-            <a:off x="1161288" y="1024128"/>
-            <a:ext cx="2377440" cy="274320"/>
+            <a:off x="1161288" y="1060704"/>
+            <a:ext cx="2286000" cy="256032"/>
           </a:xfrm>
           <a:prstGeom prst="rect">
             <a:avLst/>
@@ -9310,8 +10891,8 @@
         </p:nvSpPr>
         <p:spPr>
           <a:xfrm>
-            <a:off x="3611880" y="1024128"/>
-            <a:ext cx="10973" cy="603504"/>
+            <a:off x="3520440" y="1060704"/>
+            <a:ext cx="10973" cy="566928"/>
           </a:xfrm>
           <a:prstGeom prst="rect">
             <a:avLst/>
@@ -9330,7 +10911,7 @@
         </p:nvSpPr>
         <p:spPr>
           <a:xfrm>
-            <a:off x="3648456" y="1078992"/>
+            <a:off x="3557016" y="1097280"/>
             <a:ext cx="73152" cy="73152"/>
           </a:xfrm>
           <a:prstGeom prst="ellipse">
@@ -9350,8 +10931,8 @@
         </p:nvSpPr>
         <p:spPr>
           <a:xfrm>
-            <a:off x="3776472" y="1024128"/>
-            <a:ext cx="5093208" cy="256032"/>
+            <a:off x="3685032" y="1042416"/>
+            <a:ext cx="5166360" cy="256032"/>
           </a:xfrm>
           <a:prstGeom prst="rect">
             <a:avLst/>
@@ -9375,7 +10956,7 @@
                 <a:ea typeface="Arial" pitchFamily="34" charset="-122"/>
                 <a:cs typeface="Arial" pitchFamily="34" charset="-120"/>
               </a:rPr>
-              <a:t>Deployed on the development instance; role-filtered sections fully operational</a:t>
+              <a:t>Core portal deployed on the development instance; role-filtered sections accessible</a:t>
             </a:r>
             <a:endParaRPr lang="en-US" sz="950" dirty="0"/>
           </a:p>
@@ -9389,13 +10970,92 @@
         </p:nvSpPr>
         <p:spPr>
           <a:xfrm>
-            <a:off x="3648456" y="1408176"/>
+            <a:off x="3557016" y="1426464"/>
             <a:ext cx="73152" cy="73152"/>
           </a:xfrm>
           <a:prstGeom prst="ellipse">
             <a:avLst/>
           </a:prstGeom>
           <a:solidFill>
+            <a:srgbClr val="B8B8B8"/>
+          </a:solidFill>
+          <a:ln/>
+        </p:spPr>
+      </p:sp>
+      <p:sp>
+        <p:nvSpPr>
+          <p:cNvPr id="15" name="Text 13"/>
+          <p:cNvSpPr/>
+          <p:nvPr/>
+        </p:nvSpPr>
+        <p:spPr>
+          <a:xfrm>
+            <a:off x="3685032" y="1371600"/>
+            <a:ext cx="5166360" cy="256032"/>
+          </a:xfrm>
+          <a:prstGeom prst="rect">
+            <a:avLst/>
+          </a:prstGeom>
+          <a:noFill/>
+          <a:ln/>
+        </p:spPr>
+        <p:txBody>
+          <a:bodyPr wrap="square" rtlCol="0" anchor="ctr"/>
+          <a:lstStyle/>
+          <a:p>
+            <a:pPr indent="0" marL="0">
+              <a:buNone/>
+            </a:pPr>
+            <a:r>
+              <a:rPr lang="en-US" sz="950" dirty="0">
+                <a:solidFill>
+                  <a:srgbClr val="7F7F7F"/>
+                </a:solidFill>
+                <a:latin typeface="Arial" pitchFamily="34" charset="0"/>
+                <a:ea typeface="Arial" pitchFamily="34" charset="-122"/>
+                <a:cs typeface="Arial" pitchFamily="34" charset="-120"/>
+              </a:rPr>
+              <a:t>UI refinements and end-to-end workflow validation are ongoing</a:t>
+            </a:r>
+            <a:endParaRPr lang="en-US" sz="950" dirty="0"/>
+          </a:p>
+        </p:txBody>
+      </p:sp>
+      <p:sp>
+        <p:nvSpPr>
+          <p:cNvPr id="16" name="Shape 14"/>
+          <p:cNvSpPr/>
+          <p:nvPr/>
+        </p:nvSpPr>
+        <p:spPr>
+          <a:xfrm>
+            <a:off x="201168" y="1810512"/>
+            <a:ext cx="8741664" cy="786384"/>
+          </a:xfrm>
+          <a:prstGeom prst="rect">
+            <a:avLst/>
+          </a:prstGeom>
+          <a:solidFill>
+            <a:srgbClr val="EBF4FB"/>
+          </a:solidFill>
+          <a:ln/>
+        </p:spPr>
+      </p:sp>
+      <p:sp>
+        <p:nvSpPr>
+          <p:cNvPr id="17" name="Shape 15"/>
+          <p:cNvSpPr/>
+          <p:nvPr/>
+        </p:nvSpPr>
+        <p:spPr>
+          <a:xfrm>
+            <a:off x="201168" y="1810512"/>
+            <a:ext cx="64008" cy="786384"/>
+          </a:xfrm>
+          <a:prstGeom prst="rect">
+            <a:avLst/>
+          </a:prstGeom>
+          <a:solidFill>
             <a:srgbClr val="007CC3"/>
           </a:solidFill>
           <a:ln/>
@@ -9403,14 +11063,152 @@
       </p:sp>
       <p:sp>
         <p:nvSpPr>
-          <p:cNvPr id="15" name="Text 13"/>
-          <p:cNvSpPr/>
-          <p:nvPr/>
-        </p:nvSpPr>
-        <p:spPr>
-          <a:xfrm>
-            <a:off x="3776472" y="1353312"/>
-            <a:ext cx="5093208" cy="256032"/>
+          <p:cNvPr id="18" name="Text 16"/>
+          <p:cNvSpPr/>
+          <p:nvPr/>
+        </p:nvSpPr>
+        <p:spPr>
+          <a:xfrm>
+            <a:off x="301752" y="1810512"/>
+            <a:ext cx="786384" cy="786384"/>
+          </a:xfrm>
+          <a:prstGeom prst="rect">
+            <a:avLst/>
+          </a:prstGeom>
+          <a:noFill/>
+          <a:ln/>
+        </p:spPr>
+        <p:txBody>
+          <a:bodyPr wrap="square" rtlCol="0" anchor="ctr"/>
+          <a:lstStyle/>
+          <a:p>
+            <a:pPr algn="ctr" indent="0" marL="0">
+              <a:buNone/>
+            </a:pPr>
+            <a:r>
+              <a:rPr lang="en-US" sz="2400" b="1" dirty="0">
+                <a:solidFill>
+                  <a:srgbClr val="007CC3"/>
+                </a:solidFill>
+                <a:latin typeface="Arial" pitchFamily="34" charset="0"/>
+                <a:ea typeface="Arial" pitchFamily="34" charset="-122"/>
+                <a:cs typeface="Arial" pitchFamily="34" charset="-120"/>
+              </a:rPr>
+              <a:t>02</a:t>
+            </a:r>
+            <a:endParaRPr lang="en-US" sz="2400" dirty="0"/>
+          </a:p>
+        </p:txBody>
+      </p:sp>
+      <p:sp>
+        <p:nvSpPr>
+          <p:cNvPr id="19" name="Shape 17"/>
+          <p:cNvSpPr/>
+          <p:nvPr/>
+        </p:nvSpPr>
+        <p:spPr>
+          <a:xfrm>
+            <a:off x="1124712" y="1920240"/>
+            <a:ext cx="10973" cy="566928"/>
+          </a:xfrm>
+          <a:prstGeom prst="rect">
+            <a:avLst/>
+          </a:prstGeom>
+          <a:solidFill>
+            <a:srgbClr val="D9D9D9"/>
+          </a:solidFill>
+          <a:ln/>
+        </p:spPr>
+      </p:sp>
+      <p:sp>
+        <p:nvSpPr>
+          <p:cNvPr id="20" name="Text 18"/>
+          <p:cNvSpPr/>
+          <p:nvPr/>
+        </p:nvSpPr>
+        <p:spPr>
+          <a:xfrm>
+            <a:off x="1161288" y="1920240"/>
+            <a:ext cx="2286000" cy="256032"/>
+          </a:xfrm>
+          <a:prstGeom prst="rect">
+            <a:avLst/>
+          </a:prstGeom>
+          <a:noFill/>
+          <a:ln/>
+        </p:spPr>
+        <p:txBody>
+          <a:bodyPr wrap="square" rtlCol="0" anchor="ctr"/>
+          <a:lstStyle/>
+          <a:p>
+            <a:pPr indent="0" marL="0">
+              <a:buNone/>
+            </a:pPr>
+            <a:r>
+              <a:rPr lang="en-US" sz="1100" b="1" dirty="0">
+                <a:solidFill>
+                  <a:srgbClr val="2670C3"/>
+                </a:solidFill>
+                <a:latin typeface="Arial" pitchFamily="34" charset="0"/>
+                <a:ea typeface="Arial" pitchFamily="34" charset="-122"/>
+                <a:cs typeface="Arial" pitchFamily="34" charset="-120"/>
+              </a:rPr>
+              <a:t>Governance Module</a:t>
+            </a:r>
+            <a:endParaRPr lang="en-US" sz="1100" dirty="0"/>
+          </a:p>
+        </p:txBody>
+      </p:sp>
+      <p:sp>
+        <p:nvSpPr>
+          <p:cNvPr id="21" name="Shape 19"/>
+          <p:cNvSpPr/>
+          <p:nvPr/>
+        </p:nvSpPr>
+        <p:spPr>
+          <a:xfrm>
+            <a:off x="3520440" y="1920240"/>
+            <a:ext cx="10973" cy="566928"/>
+          </a:xfrm>
+          <a:prstGeom prst="rect">
+            <a:avLst/>
+          </a:prstGeom>
+          <a:solidFill>
+            <a:srgbClr val="D9D9D9"/>
+          </a:solidFill>
+          <a:ln/>
+        </p:spPr>
+      </p:sp>
+      <p:sp>
+        <p:nvSpPr>
+          <p:cNvPr id="22" name="Shape 20"/>
+          <p:cNvSpPr/>
+          <p:nvPr/>
+        </p:nvSpPr>
+        <p:spPr>
+          <a:xfrm>
+            <a:off x="3557016" y="1956816"/>
+            <a:ext cx="73152" cy="73152"/>
+          </a:xfrm>
+          <a:prstGeom prst="ellipse">
+            <a:avLst/>
+          </a:prstGeom>
+          <a:solidFill>
+            <a:srgbClr val="007CC3"/>
+          </a:solidFill>
+          <a:ln/>
+        </p:spPr>
+      </p:sp>
+      <p:sp>
+        <p:nvSpPr>
+          <p:cNvPr id="23" name="Text 21"/>
+          <p:cNvSpPr/>
+          <p:nvPr/>
+        </p:nvSpPr>
+        <p:spPr>
+          <a:xfrm>
+            <a:off x="3685032" y="1901952"/>
+            <a:ext cx="5166360" cy="256032"/>
           </a:xfrm>
           <a:prstGeom prst="rect">
             <a:avLst/>
@@ -9434,7 +11232,7 @@
                 <a:ea typeface="Arial" pitchFamily="34" charset="-122"/>
                 <a:cs typeface="Arial" pitchFamily="34" charset="-120"/>
               </a:rPr>
-              <a:t>Server-side role enforcement and modal-based workflows active across all sections</a:t>
+              <a:t>Access, Users, Groups, and Pending Actions tabs accessible with initial support</a:t>
             </a:r>
             <a:endParaRPr lang="en-US" sz="950" dirty="0"/>
           </a:p>
@@ -9442,19 +11240,354 @@
       </p:sp>
       <p:sp>
         <p:nvSpPr>
-          <p:cNvPr id="16" name="Shape 14"/>
-          <p:cNvSpPr/>
-          <p:nvPr/>
-        </p:nvSpPr>
-        <p:spPr>
-          <a:xfrm>
-            <a:off x="201168" y="1773936"/>
+          <p:cNvPr id="24" name="Shape 22"/>
+          <p:cNvSpPr/>
+          <p:nvPr/>
+        </p:nvSpPr>
+        <p:spPr>
+          <a:xfrm>
+            <a:off x="3557016" y="2286000"/>
+            <a:ext cx="73152" cy="73152"/>
+          </a:xfrm>
+          <a:prstGeom prst="ellipse">
+            <a:avLst/>
+          </a:prstGeom>
+          <a:solidFill>
+            <a:srgbClr val="B8B8B8"/>
+          </a:solidFill>
+          <a:ln/>
+        </p:spPr>
+      </p:sp>
+      <p:sp>
+        <p:nvSpPr>
+          <p:cNvPr id="25" name="Text 23"/>
+          <p:cNvSpPr/>
+          <p:nvPr/>
+        </p:nvSpPr>
+        <p:spPr>
+          <a:xfrm>
+            <a:off x="3685032" y="2231136"/>
+            <a:ext cx="5166360" cy="256032"/>
+          </a:xfrm>
+          <a:prstGeom prst="rect">
+            <a:avLst/>
+          </a:prstGeom>
+          <a:noFill/>
+          <a:ln/>
+        </p:spPr>
+        <p:txBody>
+          <a:bodyPr wrap="square" rtlCol="0" anchor="ctr"/>
+          <a:lstStyle/>
+          <a:p>
+            <a:pPr indent="0" marL="0">
+              <a:buNone/>
+            </a:pPr>
+            <a:r>
+              <a:rPr lang="en-US" sz="950" dirty="0">
+                <a:solidFill>
+                  <a:srgbClr val="7F7F7F"/>
+                </a:solidFill>
+                <a:latin typeface="Arial" pitchFamily="34" charset="0"/>
+                <a:ea typeface="Arial" pitchFamily="34" charset="-122"/>
+                <a:cs typeface="Arial" pitchFamily="34" charset="-120"/>
+              </a:rPr>
+              <a:t>Approval routing and escalation logic initialised; stress-testing in progress</a:t>
+            </a:r>
+            <a:endParaRPr lang="en-US" sz="950" dirty="0"/>
+          </a:p>
+        </p:txBody>
+      </p:sp>
+      <p:sp>
+        <p:nvSpPr>
+          <p:cNvPr id="26" name="Shape 24"/>
+          <p:cNvSpPr/>
+          <p:nvPr/>
+        </p:nvSpPr>
+        <p:spPr>
+          <a:xfrm>
+            <a:off x="201168" y="2670048"/>
             <a:ext cx="8741664" cy="786384"/>
           </a:xfrm>
           <a:prstGeom prst="rect">
             <a:avLst/>
           </a:prstGeom>
           <a:solidFill>
+            <a:srgbClr val="F5FAFF"/>
+          </a:solidFill>
+          <a:ln/>
+        </p:spPr>
+      </p:sp>
+      <p:sp>
+        <p:nvSpPr>
+          <p:cNvPr id="27" name="Shape 25"/>
+          <p:cNvSpPr/>
+          <p:nvPr/>
+        </p:nvSpPr>
+        <p:spPr>
+          <a:xfrm>
+            <a:off x="201168" y="2670048"/>
+            <a:ext cx="64008" cy="786384"/>
+          </a:xfrm>
+          <a:prstGeom prst="rect">
+            <a:avLst/>
+          </a:prstGeom>
+          <a:solidFill>
+            <a:srgbClr val="007CC3"/>
+          </a:solidFill>
+          <a:ln/>
+        </p:spPr>
+      </p:sp>
+      <p:sp>
+        <p:nvSpPr>
+          <p:cNvPr id="28" name="Text 26"/>
+          <p:cNvSpPr/>
+          <p:nvPr/>
+        </p:nvSpPr>
+        <p:spPr>
+          <a:xfrm>
+            <a:off x="301752" y="2670048"/>
+            <a:ext cx="786384" cy="786384"/>
+          </a:xfrm>
+          <a:prstGeom prst="rect">
+            <a:avLst/>
+          </a:prstGeom>
+          <a:noFill/>
+          <a:ln/>
+        </p:spPr>
+        <p:txBody>
+          <a:bodyPr wrap="square" rtlCol="0" anchor="ctr"/>
+          <a:lstStyle/>
+          <a:p>
+            <a:pPr algn="ctr" indent="0" marL="0">
+              <a:buNone/>
+            </a:pPr>
+            <a:r>
+              <a:rPr lang="en-US" sz="2400" b="1" dirty="0">
+                <a:solidFill>
+                  <a:srgbClr val="007CC3"/>
+                </a:solidFill>
+                <a:latin typeface="Arial" pitchFamily="34" charset="0"/>
+                <a:ea typeface="Arial" pitchFamily="34" charset="-122"/>
+                <a:cs typeface="Arial" pitchFamily="34" charset="-120"/>
+              </a:rPr>
+              <a:t>03</a:t>
+            </a:r>
+            <a:endParaRPr lang="en-US" sz="2400" dirty="0"/>
+          </a:p>
+        </p:txBody>
+      </p:sp>
+      <p:sp>
+        <p:nvSpPr>
+          <p:cNvPr id="29" name="Shape 27"/>
+          <p:cNvSpPr/>
+          <p:nvPr/>
+        </p:nvSpPr>
+        <p:spPr>
+          <a:xfrm>
+            <a:off x="1124712" y="2779776"/>
+            <a:ext cx="10973" cy="566928"/>
+          </a:xfrm>
+          <a:prstGeom prst="rect">
+            <a:avLst/>
+          </a:prstGeom>
+          <a:solidFill>
+            <a:srgbClr val="D9D9D9"/>
+          </a:solidFill>
+          <a:ln/>
+        </p:spPr>
+      </p:sp>
+      <p:sp>
+        <p:nvSpPr>
+          <p:cNvPr id="30" name="Text 28"/>
+          <p:cNvSpPr/>
+          <p:nvPr/>
+        </p:nvSpPr>
+        <p:spPr>
+          <a:xfrm>
+            <a:off x="1161288" y="2779776"/>
+            <a:ext cx="2286000" cy="256032"/>
+          </a:xfrm>
+          <a:prstGeom prst="rect">
+            <a:avLst/>
+          </a:prstGeom>
+          <a:noFill/>
+          <a:ln/>
+        </p:spPr>
+        <p:txBody>
+          <a:bodyPr wrap="square" rtlCol="0" anchor="ctr"/>
+          <a:lstStyle/>
+          <a:p>
+            <a:pPr indent="0" marL="0">
+              <a:buNone/>
+            </a:pPr>
+            <a:r>
+              <a:rPr lang="en-US" sz="1100" b="1" dirty="0">
+                <a:solidFill>
+                  <a:srgbClr val="2670C3"/>
+                </a:solidFill>
+                <a:latin typeface="Arial" pitchFamily="34" charset="0"/>
+                <a:ea typeface="Arial" pitchFamily="34" charset="-122"/>
+                <a:cs typeface="Arial" pitchFamily="34" charset="-120"/>
+              </a:rPr>
+              <a:t>Studio Module</a:t>
+            </a:r>
+            <a:endParaRPr lang="en-US" sz="1100" dirty="0"/>
+          </a:p>
+        </p:txBody>
+      </p:sp>
+      <p:sp>
+        <p:nvSpPr>
+          <p:cNvPr id="31" name="Shape 29"/>
+          <p:cNvSpPr/>
+          <p:nvPr/>
+        </p:nvSpPr>
+        <p:spPr>
+          <a:xfrm>
+            <a:off x="3520440" y="2779776"/>
+            <a:ext cx="10973" cy="566928"/>
+          </a:xfrm>
+          <a:prstGeom prst="rect">
+            <a:avLst/>
+          </a:prstGeom>
+          <a:solidFill>
+            <a:srgbClr val="D9D9D9"/>
+          </a:solidFill>
+          <a:ln/>
+        </p:spPr>
+      </p:sp>
+      <p:sp>
+        <p:nvSpPr>
+          <p:cNvPr id="32" name="Shape 30"/>
+          <p:cNvSpPr/>
+          <p:nvPr/>
+        </p:nvSpPr>
+        <p:spPr>
+          <a:xfrm>
+            <a:off x="3557016" y="2816352"/>
+            <a:ext cx="73152" cy="73152"/>
+          </a:xfrm>
+          <a:prstGeom prst="ellipse">
+            <a:avLst/>
+          </a:prstGeom>
+          <a:solidFill>
+            <a:srgbClr val="007CC3"/>
+          </a:solidFill>
+          <a:ln/>
+        </p:spPr>
+      </p:sp>
+      <p:sp>
+        <p:nvSpPr>
+          <p:cNvPr id="33" name="Text 31"/>
+          <p:cNvSpPr/>
+          <p:nvPr/>
+        </p:nvSpPr>
+        <p:spPr>
+          <a:xfrm>
+            <a:off x="3685032" y="2761488"/>
+            <a:ext cx="5166360" cy="256032"/>
+          </a:xfrm>
+          <a:prstGeom prst="rect">
+            <a:avLst/>
+          </a:prstGeom>
+          <a:noFill/>
+          <a:ln/>
+        </p:spPr>
+        <p:txBody>
+          <a:bodyPr wrap="square" rtlCol="0" anchor="ctr"/>
+          <a:lstStyle/>
+          <a:p>
+            <a:pPr indent="0" marL="0">
+              <a:buNone/>
+            </a:pPr>
+            <a:r>
+              <a:rPr lang="en-US" sz="950" dirty="0">
+                <a:solidFill>
+                  <a:srgbClr val="595959"/>
+                </a:solidFill>
+                <a:latin typeface="Arial" pitchFamily="34" charset="0"/>
+                <a:ea typeface="Arial" pitchFamily="34" charset="-122"/>
+                <a:cs typeface="Arial" pitchFamily="34" charset="-120"/>
+              </a:rPr>
+              <a:t>Automations and Deliverables tabs accessible; create-and-publish flow initialised</a:t>
+            </a:r>
+            <a:endParaRPr lang="en-US" sz="950" dirty="0"/>
+          </a:p>
+        </p:txBody>
+      </p:sp>
+      <p:sp>
+        <p:nvSpPr>
+          <p:cNvPr id="34" name="Shape 32"/>
+          <p:cNvSpPr/>
+          <p:nvPr/>
+        </p:nvSpPr>
+        <p:spPr>
+          <a:xfrm>
+            <a:off x="3557016" y="3145536"/>
+            <a:ext cx="73152" cy="73152"/>
+          </a:xfrm>
+          <a:prstGeom prst="ellipse">
+            <a:avLst/>
+          </a:prstGeom>
+          <a:solidFill>
+            <a:srgbClr val="B8B8B8"/>
+          </a:solidFill>
+          <a:ln/>
+        </p:spPr>
+      </p:sp>
+      <p:sp>
+        <p:nvSpPr>
+          <p:cNvPr id="35" name="Text 33"/>
+          <p:cNvSpPr/>
+          <p:nvPr/>
+        </p:nvSpPr>
+        <p:spPr>
+          <a:xfrm>
+            <a:off x="3685032" y="3090672"/>
+            <a:ext cx="5166360" cy="256032"/>
+          </a:xfrm>
+          <a:prstGeom prst="rect">
+            <a:avLst/>
+          </a:prstGeom>
+          <a:noFill/>
+          <a:ln/>
+        </p:spPr>
+        <p:txBody>
+          <a:bodyPr wrap="square" rtlCol="0" anchor="ctr"/>
+          <a:lstStyle/>
+          <a:p>
+            <a:pPr indent="0" marL="0">
+              <a:buNone/>
+            </a:pPr>
+            <a:r>
+              <a:rPr lang="en-US" sz="950" dirty="0">
+                <a:solidFill>
+                  <a:srgbClr val="7F7F7F"/>
+                </a:solidFill>
+                <a:latin typeface="Arial" pitchFamily="34" charset="0"/>
+                <a:ea typeface="Arial" pitchFamily="34" charset="-122"/>
+                <a:cs typeface="Arial" pitchFamily="34" charset="-120"/>
+              </a:rPr>
+              <a:t>Creator role scoping and group-level workflows being validated iteratively</a:t>
+            </a:r>
+            <a:endParaRPr lang="en-US" sz="950" dirty="0"/>
+          </a:p>
+        </p:txBody>
+      </p:sp>
+      <p:sp>
+        <p:nvSpPr>
+          <p:cNvPr id="36" name="Shape 34"/>
+          <p:cNvSpPr/>
+          <p:nvPr/>
+        </p:nvSpPr>
+        <p:spPr>
+          <a:xfrm>
+            <a:off x="201168" y="3529584"/>
+            <a:ext cx="8741664" cy="786384"/>
+          </a:xfrm>
+          <a:prstGeom prst="rect">
+            <a:avLst/>
+          </a:prstGeom>
+          <a:solidFill>
             <a:srgbClr val="EBF4FB"/>
           </a:solidFill>
           <a:ln/>
@@ -9462,13 +11595,13 @@
       </p:sp>
       <p:sp>
         <p:nvSpPr>
-          <p:cNvPr id="17" name="Shape 15"/>
-          <p:cNvSpPr/>
-          <p:nvPr/>
-        </p:nvSpPr>
-        <p:spPr>
-          <a:xfrm>
-            <a:off x="201168" y="1773936"/>
+          <p:cNvPr id="37" name="Shape 35"/>
+          <p:cNvSpPr/>
+          <p:nvPr/>
+        </p:nvSpPr>
+        <p:spPr>
+          <a:xfrm>
+            <a:off x="201168" y="3529584"/>
             <a:ext cx="64008" cy="786384"/>
           </a:xfrm>
           <a:prstGeom prst="rect">
@@ -9482,13 +11615,13 @@
       </p:sp>
       <p:sp>
         <p:nvSpPr>
-          <p:cNvPr id="18" name="Text 16"/>
-          <p:cNvSpPr/>
-          <p:nvPr/>
-        </p:nvSpPr>
-        <p:spPr>
-          <a:xfrm>
-            <a:off x="301752" y="1773936"/>
+          <p:cNvPr id="38" name="Text 36"/>
+          <p:cNvSpPr/>
+          <p:nvPr/>
+        </p:nvSpPr>
+        <p:spPr>
+          <a:xfrm>
+            <a:off x="301752" y="3529584"/>
             <a:ext cx="786384" cy="786384"/>
           </a:xfrm>
           <a:prstGeom prst="rect">
@@ -9505,7 +11638,7 @@
               <a:buNone/>
             </a:pPr>
             <a:r>
-              <a:rPr lang="en-US" sz="2600" b="1" dirty="0">
+              <a:rPr lang="en-US" sz="2400" b="1" dirty="0">
                 <a:solidFill>
                   <a:srgbClr val="007CC3"/>
                 </a:solidFill>
@@ -9513,22 +11646,22 @@
                 <a:ea typeface="Arial" pitchFamily="34" charset="-122"/>
                 <a:cs typeface="Arial" pitchFamily="34" charset="-120"/>
               </a:rPr>
-              <a:t>02</a:t>
-            </a:r>
-            <a:endParaRPr lang="en-US" sz="2600" dirty="0"/>
-          </a:p>
-        </p:txBody>
-      </p:sp>
-      <p:sp>
-        <p:nvSpPr>
-          <p:cNvPr id="19" name="Shape 17"/>
-          <p:cNvSpPr/>
-          <p:nvPr/>
-        </p:nvSpPr>
-        <p:spPr>
-          <a:xfrm>
-            <a:off x="1124712" y="1865376"/>
-            <a:ext cx="10973" cy="603504"/>
+              <a:t>04</a:t>
+            </a:r>
+            <a:endParaRPr lang="en-US" sz="2400" dirty="0"/>
+          </a:p>
+        </p:txBody>
+      </p:sp>
+      <p:sp>
+        <p:nvSpPr>
+          <p:cNvPr id="39" name="Shape 37"/>
+          <p:cNvSpPr/>
+          <p:nvPr/>
+        </p:nvSpPr>
+        <p:spPr>
+          <a:xfrm>
+            <a:off x="1124712" y="3639312"/>
+            <a:ext cx="10973" cy="566928"/>
           </a:xfrm>
           <a:prstGeom prst="rect">
             <a:avLst/>
@@ -9541,14 +11674,14 @@
       </p:sp>
       <p:sp>
         <p:nvSpPr>
-          <p:cNvPr id="20" name="Text 18"/>
-          <p:cNvSpPr/>
-          <p:nvPr/>
-        </p:nvSpPr>
-        <p:spPr>
-          <a:xfrm>
-            <a:off x="1161288" y="1865376"/>
-            <a:ext cx="2377440" cy="274320"/>
+          <p:cNvPr id="40" name="Text 38"/>
+          <p:cNvSpPr/>
+          <p:nvPr/>
+        </p:nvSpPr>
+        <p:spPr>
+          <a:xfrm>
+            <a:off x="1161288" y="3639312"/>
+            <a:ext cx="2286000" cy="256032"/>
           </a:xfrm>
           <a:prstGeom prst="rect">
             <a:avLst/>
@@ -9572,7 +11705,7 @@
                 <a:ea typeface="Arial" pitchFamily="34" charset="-122"/>
                 <a:cs typeface="Arial" pitchFamily="34" charset="-120"/>
               </a:rPr>
-              <a:t>Governance Module</a:t>
+              <a:t>Operations Assistant</a:t>
             </a:r>
             <a:endParaRPr lang="en-US" sz="1100" dirty="0"/>
           </a:p>
@@ -9580,14 +11713,14 @@
       </p:sp>
       <p:sp>
         <p:nvSpPr>
-          <p:cNvPr id="21" name="Shape 19"/>
-          <p:cNvSpPr/>
-          <p:nvPr/>
-        </p:nvSpPr>
-        <p:spPr>
-          <a:xfrm>
-            <a:off x="3611880" y="1865376"/>
-            <a:ext cx="10973" cy="603504"/>
+          <p:cNvPr id="41" name="Shape 39"/>
+          <p:cNvSpPr/>
+          <p:nvPr/>
+        </p:nvSpPr>
+        <p:spPr>
+          <a:xfrm>
+            <a:off x="3520440" y="3639312"/>
+            <a:ext cx="10973" cy="566928"/>
           </a:xfrm>
           <a:prstGeom prst="rect">
             <a:avLst/>
@@ -9600,13 +11733,13 @@
       </p:sp>
       <p:sp>
         <p:nvSpPr>
-          <p:cNvPr id="22" name="Shape 20"/>
-          <p:cNvSpPr/>
-          <p:nvPr/>
-        </p:nvSpPr>
-        <p:spPr>
-          <a:xfrm>
-            <a:off x="3648456" y="1920240"/>
+          <p:cNvPr id="42" name="Shape 40"/>
+          <p:cNvSpPr/>
+          <p:nvPr/>
+        </p:nvSpPr>
+        <p:spPr>
+          <a:xfrm>
+            <a:off x="3557016" y="3675888"/>
             <a:ext cx="73152" cy="73152"/>
           </a:xfrm>
           <a:prstGeom prst="ellipse">
@@ -9620,14 +11753,14 @@
       </p:sp>
       <p:sp>
         <p:nvSpPr>
-          <p:cNvPr id="23" name="Text 21"/>
-          <p:cNvSpPr/>
-          <p:nvPr/>
-        </p:nvSpPr>
-        <p:spPr>
-          <a:xfrm>
-            <a:off x="3776472" y="1865376"/>
-            <a:ext cx="5093208" cy="256032"/>
+          <p:cNvPr id="43" name="Text 41"/>
+          <p:cNvSpPr/>
+          <p:nvPr/>
+        </p:nvSpPr>
+        <p:spPr>
+          <a:xfrm>
+            <a:off x="3685032" y="3621024"/>
+            <a:ext cx="5166360" cy="256032"/>
           </a:xfrm>
           <a:prstGeom prst="rect">
             <a:avLst/>
@@ -9651,7 +11784,7 @@
                 <a:ea typeface="Arial" pitchFamily="34" charset="-122"/>
                 <a:cs typeface="Arial" pitchFamily="34" charset="-120"/>
               </a:rPr>
-              <a:t>Access, Users, Groups, and Pending Actions tabs live with full workflow support</a:t>
+              <a:t>Three-layer NLU active across 50+ ServiceNow domains; advisor mode available</a:t>
             </a:r>
             <a:endParaRPr lang="en-US" sz="950" dirty="0"/>
           </a:p>
@@ -9659,34 +11792,34 @@
       </p:sp>
       <p:sp>
         <p:nvSpPr>
-          <p:cNvPr id="24" name="Shape 22"/>
-          <p:cNvSpPr/>
-          <p:nvPr/>
-        </p:nvSpPr>
-        <p:spPr>
-          <a:xfrm>
-            <a:off x="3648456" y="2249424"/>
+          <p:cNvPr id="44" name="Shape 42"/>
+          <p:cNvSpPr/>
+          <p:nvPr/>
+        </p:nvSpPr>
+        <p:spPr>
+          <a:xfrm>
+            <a:off x="3557016" y="4005072"/>
             <a:ext cx="73152" cy="73152"/>
           </a:xfrm>
           <a:prstGeom prst="ellipse">
             <a:avLst/>
           </a:prstGeom>
           <a:solidFill>
-            <a:srgbClr val="007CC3"/>
-          </a:solidFill>
-          <a:ln/>
-        </p:spPr>
-      </p:sp>
-      <p:sp>
-        <p:nvSpPr>
-          <p:cNvPr id="25" name="Text 23"/>
-          <p:cNvSpPr/>
-          <p:nvPr/>
-        </p:nvSpPr>
-        <p:spPr>
-          <a:xfrm>
-            <a:off x="3776472" y="2194560"/>
-            <a:ext cx="5093208" cy="256032"/>
+            <a:srgbClr val="B8B8B8"/>
+          </a:solidFill>
+          <a:ln/>
+        </p:spPr>
+      </p:sp>
+      <p:sp>
+        <p:nvSpPr>
+          <p:cNvPr id="45" name="Text 43"/>
+          <p:cNvSpPr/>
+          <p:nvPr/>
+        </p:nvSpPr>
+        <p:spPr>
+          <a:xfrm>
+            <a:off x="3685032" y="3950208"/>
+            <a:ext cx="5166360" cy="256032"/>
           </a:xfrm>
           <a:prstGeom prst="rect">
             <a:avLst/>
@@ -9704,565 +11837,13 @@
             <a:r>
               <a:rPr lang="en-US" sz="950" dirty="0">
                 <a:solidFill>
-                  <a:srgbClr val="595959"/>
-                </a:solidFill>
-                <a:latin typeface="Arial" pitchFamily="34" charset="0"/>
-                <a:ea typeface="Arial" pitchFamily="34" charset="-122"/>
-                <a:cs typeface="Arial" pitchFamily="34" charset="-120"/>
-              </a:rPr>
-              <a:t>Approval routing, deadline management, and escalation automated end-to-end</a:t>
-            </a:r>
-            <a:endParaRPr lang="en-US" sz="950" dirty="0"/>
-          </a:p>
-        </p:txBody>
-      </p:sp>
-      <p:sp>
-        <p:nvSpPr>
-          <p:cNvPr id="26" name="Shape 24"/>
-          <p:cNvSpPr/>
-          <p:nvPr/>
-        </p:nvSpPr>
-        <p:spPr>
-          <a:xfrm>
-            <a:off x="201168" y="2615184"/>
-            <a:ext cx="8741664" cy="786384"/>
-          </a:xfrm>
-          <a:prstGeom prst="rect">
-            <a:avLst/>
-          </a:prstGeom>
-          <a:solidFill>
-            <a:srgbClr val="F5FAFF"/>
-          </a:solidFill>
-          <a:ln/>
-        </p:spPr>
-      </p:sp>
-      <p:sp>
-        <p:nvSpPr>
-          <p:cNvPr id="27" name="Shape 25"/>
-          <p:cNvSpPr/>
-          <p:nvPr/>
-        </p:nvSpPr>
-        <p:spPr>
-          <a:xfrm>
-            <a:off x="201168" y="2615184"/>
-            <a:ext cx="64008" cy="786384"/>
-          </a:xfrm>
-          <a:prstGeom prst="rect">
-            <a:avLst/>
-          </a:prstGeom>
-          <a:solidFill>
-            <a:srgbClr val="007CC3"/>
-          </a:solidFill>
-          <a:ln/>
-        </p:spPr>
-      </p:sp>
-      <p:sp>
-        <p:nvSpPr>
-          <p:cNvPr id="28" name="Text 26"/>
-          <p:cNvSpPr/>
-          <p:nvPr/>
-        </p:nvSpPr>
-        <p:spPr>
-          <a:xfrm>
-            <a:off x="301752" y="2615184"/>
-            <a:ext cx="786384" cy="786384"/>
-          </a:xfrm>
-          <a:prstGeom prst="rect">
-            <a:avLst/>
-          </a:prstGeom>
-          <a:noFill/>
-          <a:ln/>
-        </p:spPr>
-        <p:txBody>
-          <a:bodyPr wrap="square" rtlCol="0" anchor="ctr"/>
-          <a:lstStyle/>
-          <a:p>
-            <a:pPr algn="ctr" indent="0" marL="0">
-              <a:buNone/>
-            </a:pPr>
-            <a:r>
-              <a:rPr lang="en-US" sz="2600" b="1" dirty="0">
-                <a:solidFill>
-                  <a:srgbClr val="007CC3"/>
-                </a:solidFill>
-                <a:latin typeface="Arial" pitchFamily="34" charset="0"/>
-                <a:ea typeface="Arial" pitchFamily="34" charset="-122"/>
-                <a:cs typeface="Arial" pitchFamily="34" charset="-120"/>
-              </a:rPr>
-              <a:t>03</a:t>
-            </a:r>
-            <a:endParaRPr lang="en-US" sz="2600" dirty="0"/>
-          </a:p>
-        </p:txBody>
-      </p:sp>
-      <p:sp>
-        <p:nvSpPr>
-          <p:cNvPr id="29" name="Shape 27"/>
-          <p:cNvSpPr/>
-          <p:nvPr/>
-        </p:nvSpPr>
-        <p:spPr>
-          <a:xfrm>
-            <a:off x="1124712" y="2706624"/>
-            <a:ext cx="10973" cy="603504"/>
-          </a:xfrm>
-          <a:prstGeom prst="rect">
-            <a:avLst/>
-          </a:prstGeom>
-          <a:solidFill>
-            <a:srgbClr val="D9D9D9"/>
-          </a:solidFill>
-          <a:ln/>
-        </p:spPr>
-      </p:sp>
-      <p:sp>
-        <p:nvSpPr>
-          <p:cNvPr id="30" name="Text 28"/>
-          <p:cNvSpPr/>
-          <p:nvPr/>
-        </p:nvSpPr>
-        <p:spPr>
-          <a:xfrm>
-            <a:off x="1161288" y="2706624"/>
-            <a:ext cx="2377440" cy="274320"/>
-          </a:xfrm>
-          <a:prstGeom prst="rect">
-            <a:avLst/>
-          </a:prstGeom>
-          <a:noFill/>
-          <a:ln/>
-        </p:spPr>
-        <p:txBody>
-          <a:bodyPr wrap="square" rtlCol="0" anchor="ctr"/>
-          <a:lstStyle/>
-          <a:p>
-            <a:pPr indent="0" marL="0">
-              <a:buNone/>
-            </a:pPr>
-            <a:r>
-              <a:rPr lang="en-US" sz="1100" b="1" dirty="0">
-                <a:solidFill>
-                  <a:srgbClr val="2670C3"/>
-                </a:solidFill>
-                <a:latin typeface="Arial" pitchFamily="34" charset="0"/>
-                <a:ea typeface="Arial" pitchFamily="34" charset="-122"/>
-                <a:cs typeface="Arial" pitchFamily="34" charset="-120"/>
-              </a:rPr>
-              <a:t>Studio Module</a:t>
-            </a:r>
-            <a:endParaRPr lang="en-US" sz="1100" dirty="0"/>
-          </a:p>
-        </p:txBody>
-      </p:sp>
-      <p:sp>
-        <p:nvSpPr>
-          <p:cNvPr id="31" name="Shape 29"/>
-          <p:cNvSpPr/>
-          <p:nvPr/>
-        </p:nvSpPr>
-        <p:spPr>
-          <a:xfrm>
-            <a:off x="3611880" y="2706624"/>
-            <a:ext cx="10973" cy="603504"/>
-          </a:xfrm>
-          <a:prstGeom prst="rect">
-            <a:avLst/>
-          </a:prstGeom>
-          <a:solidFill>
-            <a:srgbClr val="D9D9D9"/>
-          </a:solidFill>
-          <a:ln/>
-        </p:spPr>
-      </p:sp>
-      <p:sp>
-        <p:nvSpPr>
-          <p:cNvPr id="32" name="Shape 30"/>
-          <p:cNvSpPr/>
-          <p:nvPr/>
-        </p:nvSpPr>
-        <p:spPr>
-          <a:xfrm>
-            <a:off x="3648456" y="2761488"/>
-            <a:ext cx="73152" cy="73152"/>
-          </a:xfrm>
-          <a:prstGeom prst="ellipse">
-            <a:avLst/>
-          </a:prstGeom>
-          <a:solidFill>
-            <a:srgbClr val="007CC3"/>
-          </a:solidFill>
-          <a:ln/>
-        </p:spPr>
-      </p:sp>
-      <p:sp>
-        <p:nvSpPr>
-          <p:cNvPr id="33" name="Text 31"/>
-          <p:cNvSpPr/>
-          <p:nvPr/>
-        </p:nvSpPr>
-        <p:spPr>
-          <a:xfrm>
-            <a:off x="3776472" y="2706624"/>
-            <a:ext cx="5093208" cy="256032"/>
-          </a:xfrm>
-          <a:prstGeom prst="rect">
-            <a:avLst/>
-          </a:prstGeom>
-          <a:noFill/>
-          <a:ln/>
-        </p:spPr>
-        <p:txBody>
-          <a:bodyPr wrap="square" rtlCol="0" anchor="ctr"/>
-          <a:lstStyle/>
-          <a:p>
-            <a:pPr indent="0" marL="0">
-              <a:buNone/>
-            </a:pPr>
-            <a:r>
-              <a:rPr lang="en-US" sz="950" dirty="0">
-                <a:solidFill>
-                  <a:srgbClr val="595959"/>
-                </a:solidFill>
-                <a:latin typeface="Arial" pitchFamily="34" charset="0"/>
-                <a:ea typeface="Arial" pitchFamily="34" charset="-122"/>
-                <a:cs typeface="Arial" pitchFamily="34" charset="-120"/>
-              </a:rPr>
-              <a:t>Automations and Deliverables tabs operational with create-and-publish workflow</a:t>
-            </a:r>
-            <a:endParaRPr lang="en-US" sz="950" dirty="0"/>
-          </a:p>
-        </p:txBody>
-      </p:sp>
-      <p:sp>
-        <p:nvSpPr>
-          <p:cNvPr id="34" name="Shape 32"/>
-          <p:cNvSpPr/>
-          <p:nvPr/>
-        </p:nvSpPr>
-        <p:spPr>
-          <a:xfrm>
-            <a:off x="3648456" y="3090672"/>
-            <a:ext cx="73152" cy="73152"/>
-          </a:xfrm>
-          <a:prstGeom prst="ellipse">
-            <a:avLst/>
-          </a:prstGeom>
-          <a:solidFill>
-            <a:srgbClr val="007CC3"/>
-          </a:solidFill>
-          <a:ln/>
-        </p:spPr>
-      </p:sp>
-      <p:sp>
-        <p:nvSpPr>
-          <p:cNvPr id="35" name="Text 33"/>
-          <p:cNvSpPr/>
-          <p:nvPr/>
-        </p:nvSpPr>
-        <p:spPr>
-          <a:xfrm>
-            <a:off x="3776472" y="3035808"/>
-            <a:ext cx="5093208" cy="256032"/>
-          </a:xfrm>
-          <a:prstGeom prst="rect">
-            <a:avLst/>
-          </a:prstGeom>
-          <a:noFill/>
-          <a:ln/>
-        </p:spPr>
-        <p:txBody>
-          <a:bodyPr wrap="square" rtlCol="0" anchor="ctr"/>
-          <a:lstStyle/>
-          <a:p>
-            <a:pPr indent="0" marL="0">
-              <a:buNone/>
-            </a:pPr>
-            <a:r>
-              <a:rPr lang="en-US" sz="950" dirty="0">
-                <a:solidFill>
-                  <a:srgbClr val="595959"/>
-                </a:solidFill>
-                <a:latin typeface="Arial" pitchFamily="34" charset="0"/>
-                <a:ea typeface="Arial" pitchFamily="34" charset="-122"/>
-                <a:cs typeface="Arial" pitchFamily="34" charset="-120"/>
-              </a:rPr>
-              <a:t>Group scope enforced per creator role; approval routing active on every publish</a:t>
-            </a:r>
-            <a:endParaRPr lang="en-US" sz="950" dirty="0"/>
-          </a:p>
-        </p:txBody>
-      </p:sp>
-      <p:sp>
-        <p:nvSpPr>
-          <p:cNvPr id="36" name="Shape 34"/>
-          <p:cNvSpPr/>
-          <p:nvPr/>
-        </p:nvSpPr>
-        <p:spPr>
-          <a:xfrm>
-            <a:off x="201168" y="3456432"/>
-            <a:ext cx="8741664" cy="786384"/>
-          </a:xfrm>
-          <a:prstGeom prst="rect">
-            <a:avLst/>
-          </a:prstGeom>
-          <a:solidFill>
-            <a:srgbClr val="EBF4FB"/>
-          </a:solidFill>
-          <a:ln/>
-        </p:spPr>
-      </p:sp>
-      <p:sp>
-        <p:nvSpPr>
-          <p:cNvPr id="37" name="Shape 35"/>
-          <p:cNvSpPr/>
-          <p:nvPr/>
-        </p:nvSpPr>
-        <p:spPr>
-          <a:xfrm>
-            <a:off x="201168" y="3456432"/>
-            <a:ext cx="64008" cy="786384"/>
-          </a:xfrm>
-          <a:prstGeom prst="rect">
-            <a:avLst/>
-          </a:prstGeom>
-          <a:solidFill>
-            <a:srgbClr val="007CC3"/>
-          </a:solidFill>
-          <a:ln/>
-        </p:spPr>
-      </p:sp>
-      <p:sp>
-        <p:nvSpPr>
-          <p:cNvPr id="38" name="Text 36"/>
-          <p:cNvSpPr/>
-          <p:nvPr/>
-        </p:nvSpPr>
-        <p:spPr>
-          <a:xfrm>
-            <a:off x="301752" y="3456432"/>
-            <a:ext cx="786384" cy="786384"/>
-          </a:xfrm>
-          <a:prstGeom prst="rect">
-            <a:avLst/>
-          </a:prstGeom>
-          <a:noFill/>
-          <a:ln/>
-        </p:spPr>
-        <p:txBody>
-          <a:bodyPr wrap="square" rtlCol="0" anchor="ctr"/>
-          <a:lstStyle/>
-          <a:p>
-            <a:pPr algn="ctr" indent="0" marL="0">
-              <a:buNone/>
-            </a:pPr>
-            <a:r>
-              <a:rPr lang="en-US" sz="2600" b="1" dirty="0">
-                <a:solidFill>
-                  <a:srgbClr val="007CC3"/>
-                </a:solidFill>
-                <a:latin typeface="Arial" pitchFamily="34" charset="0"/>
-                <a:ea typeface="Arial" pitchFamily="34" charset="-122"/>
-                <a:cs typeface="Arial" pitchFamily="34" charset="-120"/>
-              </a:rPr>
-              <a:t>04</a:t>
-            </a:r>
-            <a:endParaRPr lang="en-US" sz="2600" dirty="0"/>
-          </a:p>
-        </p:txBody>
-      </p:sp>
-      <p:sp>
-        <p:nvSpPr>
-          <p:cNvPr id="39" name="Shape 37"/>
-          <p:cNvSpPr/>
-          <p:nvPr/>
-        </p:nvSpPr>
-        <p:spPr>
-          <a:xfrm>
-            <a:off x="1124712" y="3547872"/>
-            <a:ext cx="10973" cy="603504"/>
-          </a:xfrm>
-          <a:prstGeom prst="rect">
-            <a:avLst/>
-          </a:prstGeom>
-          <a:solidFill>
-            <a:srgbClr val="D9D9D9"/>
-          </a:solidFill>
-          <a:ln/>
-        </p:spPr>
-      </p:sp>
-      <p:sp>
-        <p:nvSpPr>
-          <p:cNvPr id="40" name="Text 38"/>
-          <p:cNvSpPr/>
-          <p:nvPr/>
-        </p:nvSpPr>
-        <p:spPr>
-          <a:xfrm>
-            <a:off x="1161288" y="3547872"/>
-            <a:ext cx="2377440" cy="274320"/>
-          </a:xfrm>
-          <a:prstGeom prst="rect">
-            <a:avLst/>
-          </a:prstGeom>
-          <a:noFill/>
-          <a:ln/>
-        </p:spPr>
-        <p:txBody>
-          <a:bodyPr wrap="square" rtlCol="0" anchor="ctr"/>
-          <a:lstStyle/>
-          <a:p>
-            <a:pPr indent="0" marL="0">
-              <a:buNone/>
-            </a:pPr>
-            <a:r>
-              <a:rPr lang="en-US" sz="1100" b="1" dirty="0">
-                <a:solidFill>
-                  <a:srgbClr val="2670C3"/>
-                </a:solidFill>
-                <a:latin typeface="Arial" pitchFamily="34" charset="0"/>
-                <a:ea typeface="Arial" pitchFamily="34" charset="-122"/>
-                <a:cs typeface="Arial" pitchFamily="34" charset="-120"/>
-              </a:rPr>
-              <a:t>Operations Assistant</a:t>
-            </a:r>
-            <a:endParaRPr lang="en-US" sz="1100" dirty="0"/>
-          </a:p>
-        </p:txBody>
-      </p:sp>
-      <p:sp>
-        <p:nvSpPr>
-          <p:cNvPr id="41" name="Shape 39"/>
-          <p:cNvSpPr/>
-          <p:nvPr/>
-        </p:nvSpPr>
-        <p:spPr>
-          <a:xfrm>
-            <a:off x="3611880" y="3547872"/>
-            <a:ext cx="10973" cy="603504"/>
-          </a:xfrm>
-          <a:prstGeom prst="rect">
-            <a:avLst/>
-          </a:prstGeom>
-          <a:solidFill>
-            <a:srgbClr val="D9D9D9"/>
-          </a:solidFill>
-          <a:ln/>
-        </p:spPr>
-      </p:sp>
-      <p:sp>
-        <p:nvSpPr>
-          <p:cNvPr id="42" name="Shape 40"/>
-          <p:cNvSpPr/>
-          <p:nvPr/>
-        </p:nvSpPr>
-        <p:spPr>
-          <a:xfrm>
-            <a:off x="3648456" y="3602736"/>
-            <a:ext cx="73152" cy="73152"/>
-          </a:xfrm>
-          <a:prstGeom prst="ellipse">
-            <a:avLst/>
-          </a:prstGeom>
-          <a:solidFill>
-            <a:srgbClr val="007CC3"/>
-          </a:solidFill>
-          <a:ln/>
-        </p:spPr>
-      </p:sp>
-      <p:sp>
-        <p:nvSpPr>
-          <p:cNvPr id="43" name="Text 41"/>
-          <p:cNvSpPr/>
-          <p:nvPr/>
-        </p:nvSpPr>
-        <p:spPr>
-          <a:xfrm>
-            <a:off x="3776472" y="3547872"/>
-            <a:ext cx="5093208" cy="256032"/>
-          </a:xfrm>
-          <a:prstGeom prst="rect">
-            <a:avLst/>
-          </a:prstGeom>
-          <a:noFill/>
-          <a:ln/>
-        </p:spPr>
-        <p:txBody>
-          <a:bodyPr wrap="square" rtlCol="0" anchor="ctr"/>
-          <a:lstStyle/>
-          <a:p>
-            <a:pPr indent="0" marL="0">
-              <a:buNone/>
-            </a:pPr>
-            <a:r>
-              <a:rPr lang="en-US" sz="950" dirty="0">
-                <a:solidFill>
-                  <a:srgbClr val="595959"/>
-                </a:solidFill>
-                <a:latin typeface="Arial" pitchFamily="34" charset="0"/>
-                <a:ea typeface="Arial" pitchFamily="34" charset="-122"/>
-                <a:cs typeface="Arial" pitchFamily="34" charset="-120"/>
-              </a:rPr>
-              <a:t>Knowledge base spanning 50+ ServiceNow domains with three-layer NLU processing</a:t>
-            </a:r>
-            <a:endParaRPr lang="en-US" sz="950" dirty="0"/>
-          </a:p>
-        </p:txBody>
-      </p:sp>
-      <p:sp>
-        <p:nvSpPr>
-          <p:cNvPr id="44" name="Shape 42"/>
-          <p:cNvSpPr/>
-          <p:nvPr/>
-        </p:nvSpPr>
-        <p:spPr>
-          <a:xfrm>
-            <a:off x="3648456" y="3931920"/>
-            <a:ext cx="73152" cy="73152"/>
-          </a:xfrm>
-          <a:prstGeom prst="ellipse">
-            <a:avLst/>
-          </a:prstGeom>
-          <a:solidFill>
-            <a:srgbClr val="007CC3"/>
-          </a:solidFill>
-          <a:ln/>
-        </p:spPr>
-      </p:sp>
-      <p:sp>
-        <p:nvSpPr>
-          <p:cNvPr id="45" name="Text 43"/>
-          <p:cNvSpPr/>
-          <p:nvPr/>
-        </p:nvSpPr>
-        <p:spPr>
-          <a:xfrm>
-            <a:off x="3776472" y="3877056"/>
-            <a:ext cx="5093208" cy="256032"/>
-          </a:xfrm>
-          <a:prstGeom prst="rect">
-            <a:avLst/>
-          </a:prstGeom>
-          <a:noFill/>
-          <a:ln/>
-        </p:spPr>
-        <p:txBody>
-          <a:bodyPr wrap="square" rtlCol="0" anchor="ctr"/>
-          <a:lstStyle/>
-          <a:p>
-            <a:pPr indent="0" marL="0">
-              <a:buNone/>
-            </a:pPr>
-            <a:r>
-              <a:rPr lang="en-US" sz="950" dirty="0">
-                <a:solidFill>
-                  <a:srgbClr val="595959"/>
-                </a:solidFill>
-                <a:latin typeface="Arial" pitchFamily="34" charset="0"/>
-                <a:ea typeface="Arial" pitchFamily="34" charset="-122"/>
-                <a:cs typeface="Arial" pitchFamily="34" charset="-120"/>
-              </a:rPr>
-              <a:t>Advisory mode active; single-term and phrase-level queries answered immediately</a:t>
+                  <a:srgbClr val="7F7F7F"/>
+                </a:solidFill>
+                <a:latin typeface="Arial" pitchFamily="34" charset="0"/>
+                <a:ea typeface="Arial" pitchFamily="34" charset="-122"/>
+                <a:cs typeface="Arial" pitchFamily="34" charset="-120"/>
+              </a:rPr>
+              <a:t>Response accuracy and edge case coverage being refined continuously</a:t>
             </a:r>
             <a:endParaRPr lang="en-US" sz="950" dirty="0"/>
           </a:p>
@@ -10365,7 +11946,47 @@
       </p:grpSpPr>
       <p:sp>
         <p:nvSpPr>
-          <p:cNvPr id="2" name="Text 0"/>
+          <p:cNvPr id="2" name="Shape 0"/>
+          <p:cNvSpPr/>
+          <p:nvPr/>
+        </p:nvSpPr>
+        <p:spPr>
+          <a:xfrm>
+            <a:off x="-8961" y="2123968"/>
+            <a:ext cx="104242" cy="865388"/>
+          </a:xfrm>
+          <a:prstGeom prst="rect">
+            <a:avLst/>
+          </a:prstGeom>
+          <a:solidFill>
+            <a:srgbClr val="007CC3"/>
+          </a:solidFill>
+          <a:ln/>
+        </p:spPr>
+      </p:sp>
+      <p:sp>
+        <p:nvSpPr>
+          <p:cNvPr id="3" name="Shape 1"/>
+          <p:cNvSpPr/>
+          <p:nvPr/>
+        </p:nvSpPr>
+        <p:spPr>
+          <a:xfrm>
+            <a:off x="9048720" y="2123968"/>
+            <a:ext cx="104242" cy="865388"/>
+          </a:xfrm>
+          <a:prstGeom prst="rect">
+            <a:avLst/>
+          </a:prstGeom>
+          <a:solidFill>
+            <a:srgbClr val="007CC3"/>
+          </a:solidFill>
+          <a:ln/>
+        </p:spPr>
+      </p:sp>
+      <p:sp>
+        <p:nvSpPr>
+          <p:cNvPr id="4" name="Text 2"/>
           <p:cNvSpPr/>
           <p:nvPr/>
         </p:nvSpPr>
@@ -10396,7 +12017,7 @@
                 <a:ea typeface="Arial" pitchFamily="34" charset="-122"/>
                 <a:cs typeface="Arial" pitchFamily="34" charset="-120"/>
               </a:rPr>
-              <a:t>Source Repository</a:t>
+              <a:t>Development Roadmap</a:t>
             </a:r>
             <a:endParaRPr lang="en-US" sz="2000" dirty="0"/>
           </a:p>
@@ -10404,14 +12025,53 @@
       </p:sp>
       <p:sp>
         <p:nvSpPr>
-          <p:cNvPr id="3" name="Shape 1"/>
-          <p:cNvSpPr/>
-          <p:nvPr/>
-        </p:nvSpPr>
-        <p:spPr>
-          <a:xfrm>
-            <a:off x="-8961" y="2123968"/>
-            <a:ext cx="104242" cy="865388"/>
+          <p:cNvPr id="5" name="Text 3"/>
+          <p:cNvSpPr/>
+          <p:nvPr/>
+        </p:nvSpPr>
+        <p:spPr>
+          <a:xfrm>
+            <a:off x="201168" y="621792"/>
+            <a:ext cx="8741664" cy="256032"/>
+          </a:xfrm>
+          <a:prstGeom prst="rect">
+            <a:avLst/>
+          </a:prstGeom>
+          <a:noFill/>
+          <a:ln/>
+        </p:spPr>
+        <p:txBody>
+          <a:bodyPr wrap="square" rtlCol="0" anchor="ctr"/>
+          <a:lstStyle/>
+          <a:p>
+            <a:pPr indent="0" marL="0">
+              <a:buNone/>
+            </a:pPr>
+            <a:r>
+              <a:rPr lang="en-US" sz="1050" dirty="0">
+                <a:solidFill>
+                  <a:srgbClr val="007CC3"/>
+                </a:solidFill>
+                <a:latin typeface="Arial" pitchFamily="34" charset="0"/>
+                <a:ea typeface="Arial" pitchFamily="34" charset="-122"/>
+                <a:cs typeface="Arial" pitchFamily="34" charset="-120"/>
+              </a:rPr>
+              <a:t>Phased enhancement approach following initial prototype deployment</a:t>
+            </a:r>
+            <a:endParaRPr lang="en-US" sz="1050" dirty="0"/>
+          </a:p>
+        </p:txBody>
+      </p:sp>
+      <p:sp>
+        <p:nvSpPr>
+          <p:cNvPr id="6" name="Shape 4"/>
+          <p:cNvSpPr/>
+          <p:nvPr/>
+        </p:nvSpPr>
+        <p:spPr>
+          <a:xfrm>
+            <a:off x="201168" y="932688"/>
+            <a:ext cx="2066544" cy="457200"/>
           </a:xfrm>
           <a:prstGeom prst="rect">
             <a:avLst/>
@@ -10424,16 +12084,193 @@
       </p:sp>
       <p:sp>
         <p:nvSpPr>
-          <p:cNvPr id="4" name="Shape 2"/>
-          <p:cNvSpPr/>
-          <p:nvPr/>
-        </p:nvSpPr>
-        <p:spPr>
-          <a:xfrm>
-            <a:off x="9048720" y="2123968"/>
-            <a:ext cx="104242" cy="865388"/>
-          </a:xfrm>
-          <a:prstGeom prst="rect">
+          <p:cNvPr id="7" name="Text 5"/>
+          <p:cNvSpPr/>
+          <p:nvPr/>
+        </p:nvSpPr>
+        <p:spPr>
+          <a:xfrm>
+            <a:off x="292608" y="932688"/>
+            <a:ext cx="493776" cy="457200"/>
+          </a:xfrm>
+          <a:prstGeom prst="rect">
+            <a:avLst/>
+          </a:prstGeom>
+          <a:noFill/>
+          <a:ln/>
+        </p:spPr>
+        <p:txBody>
+          <a:bodyPr wrap="square" rtlCol="0" anchor="ctr"/>
+          <a:lstStyle/>
+          <a:p>
+            <a:pPr algn="ctr" indent="0" marL="0">
+              <a:buNone/>
+            </a:pPr>
+            <a:r>
+              <a:rPr lang="en-US" sz="2000" b="1" dirty="0">
+                <a:solidFill>
+                  <a:srgbClr val="FFFFFF"/>
+                </a:solidFill>
+                <a:latin typeface="Arial" pitchFamily="34" charset="0"/>
+                <a:ea typeface="Arial" pitchFamily="34" charset="-122"/>
+                <a:cs typeface="Arial" pitchFamily="34" charset="-120"/>
+              </a:rPr>
+              <a:t>01</a:t>
+            </a:r>
+            <a:endParaRPr lang="en-US" sz="2000" dirty="0"/>
+          </a:p>
+        </p:txBody>
+      </p:sp>
+      <p:sp>
+        <p:nvSpPr>
+          <p:cNvPr id="8" name="Shape 6"/>
+          <p:cNvSpPr/>
+          <p:nvPr/>
+        </p:nvSpPr>
+        <p:spPr>
+          <a:xfrm>
+            <a:off x="822960" y="1005840"/>
+            <a:ext cx="10973" cy="310896"/>
+          </a:xfrm>
+          <a:prstGeom prst="rect">
+            <a:avLst/>
+          </a:prstGeom>
+          <a:solidFill>
+            <a:srgbClr val="FFFFFF"/>
+          </a:solidFill>
+          <a:ln/>
+        </p:spPr>
+      </p:sp>
+      <p:sp>
+        <p:nvSpPr>
+          <p:cNvPr id="9" name="Text 7"/>
+          <p:cNvSpPr/>
+          <p:nvPr/>
+        </p:nvSpPr>
+        <p:spPr>
+          <a:xfrm>
+            <a:off x="877824" y="950976"/>
+            <a:ext cx="1316736" cy="420624"/>
+          </a:xfrm>
+          <a:prstGeom prst="rect">
+            <a:avLst/>
+          </a:prstGeom>
+          <a:noFill/>
+          <a:ln/>
+        </p:spPr>
+        <p:txBody>
+          <a:bodyPr wrap="square" rtlCol="0" anchor="ctr"/>
+          <a:lstStyle/>
+          <a:p>
+            <a:pPr indent="0" marL="0">
+              <a:buNone/>
+            </a:pPr>
+            <a:r>
+              <a:rPr lang="en-US" sz="900" b="1" dirty="0">
+                <a:solidFill>
+                  <a:srgbClr val="FFFFFF"/>
+                </a:solidFill>
+                <a:latin typeface="Arial" pitchFamily="34" charset="0"/>
+                <a:ea typeface="Arial" pitchFamily="34" charset="-122"/>
+                <a:cs typeface="Arial" pitchFamily="34" charset="-120"/>
+              </a:rPr>
+              <a:t>FOUNDATION</a:t>
+            </a:r>
+            <a:endParaRPr lang="en-US" sz="900" dirty="0"/>
+          </a:p>
+        </p:txBody>
+      </p:sp>
+      <p:sp>
+        <p:nvSpPr>
+          <p:cNvPr id="10" name="Shape 8"/>
+          <p:cNvSpPr/>
+          <p:nvPr/>
+        </p:nvSpPr>
+        <p:spPr>
+          <a:xfrm>
+            <a:off x="877824" y="1207008"/>
+            <a:ext cx="566928" cy="146304"/>
+          </a:xfrm>
+          <a:prstGeom prst="rect">
+            <a:avLst/>
+          </a:prstGeom>
+          <a:solidFill>
+            <a:srgbClr val="FFFFFF"/>
+          </a:solidFill>
+          <a:ln/>
+        </p:spPr>
+      </p:sp>
+      <p:sp>
+        <p:nvSpPr>
+          <p:cNvPr id="11" name="Text 9"/>
+          <p:cNvSpPr/>
+          <p:nvPr/>
+        </p:nvSpPr>
+        <p:spPr>
+          <a:xfrm>
+            <a:off x="877824" y="1207008"/>
+            <a:ext cx="566928" cy="146304"/>
+          </a:xfrm>
+          <a:prstGeom prst="rect">
+            <a:avLst/>
+          </a:prstGeom>
+          <a:noFill/>
+          <a:ln/>
+        </p:spPr>
+        <p:txBody>
+          <a:bodyPr wrap="square" rtlCol="0" anchor="ctr"/>
+          <a:lstStyle/>
+          <a:p>
+            <a:pPr algn="ctr" indent="0" marL="0">
+              <a:buNone/>
+            </a:pPr>
+            <a:r>
+              <a:rPr lang="en-US" sz="700" b="1" dirty="0">
+                <a:solidFill>
+                  <a:srgbClr val="007CC3"/>
+                </a:solidFill>
+                <a:latin typeface="Arial" pitchFamily="34" charset="0"/>
+                <a:ea typeface="Arial" pitchFamily="34" charset="-122"/>
+                <a:cs typeface="Arial" pitchFamily="34" charset="-120"/>
+              </a:rPr>
+              <a:t>ACTIVE</a:t>
+            </a:r>
+            <a:endParaRPr lang="en-US" sz="700" dirty="0"/>
+          </a:p>
+        </p:txBody>
+      </p:sp>
+      <p:sp>
+        <p:nvSpPr>
+          <p:cNvPr id="12" name="Shape 10"/>
+          <p:cNvSpPr/>
+          <p:nvPr/>
+        </p:nvSpPr>
+        <p:spPr>
+          <a:xfrm>
+            <a:off x="201168" y="1389888"/>
+            <a:ext cx="2066544" cy="2377440"/>
+          </a:xfrm>
+          <a:prstGeom prst="rect">
+            <a:avLst/>
+          </a:prstGeom>
+          <a:solidFill>
+            <a:srgbClr val="F5FAFF"/>
+          </a:solidFill>
+          <a:ln/>
+        </p:spPr>
+      </p:sp>
+      <p:sp>
+        <p:nvSpPr>
+          <p:cNvPr id="13" name="Shape 11"/>
+          <p:cNvSpPr/>
+          <p:nvPr/>
+        </p:nvSpPr>
+        <p:spPr>
+          <a:xfrm>
+            <a:off x="329184" y="1719072"/>
+            <a:ext cx="73152" cy="73152"/>
+          </a:xfrm>
+          <a:prstGeom prst="ellipse">
             <a:avLst/>
           </a:prstGeom>
           <a:solidFill>
@@ -10444,55 +12281,58 @@
       </p:sp>
       <p:sp>
         <p:nvSpPr>
-          <p:cNvPr id="5" name="Text 3"/>
-          <p:cNvSpPr/>
-          <p:nvPr/>
-        </p:nvSpPr>
-        <p:spPr>
-          <a:xfrm>
-            <a:off x="201168" y="640080"/>
-            <a:ext cx="8741664" cy="310896"/>
-          </a:xfrm>
-          <a:prstGeom prst="rect">
-            <a:avLst/>
-          </a:prstGeom>
-          <a:noFill/>
-          <a:ln/>
-        </p:spPr>
-        <p:txBody>
-          <a:bodyPr wrap="square" rtlCol="0" anchor="ctr"/>
-          <a:lstStyle/>
-          <a:p>
-            <a:pPr indent="0" marL="0">
-              <a:buNone/>
-            </a:pPr>
-            <a:r>
-              <a:rPr lang="en-US" sz="1100" dirty="0">
-                <a:solidFill>
-                  <a:srgbClr val="007CC3"/>
-                </a:solidFill>
-                <a:latin typeface="Arial" pitchFamily="34" charset="0"/>
-                <a:ea typeface="Arial" pitchFamily="34" charset="-122"/>
-                <a:cs typeface="Arial" pitchFamily="34" charset="-120"/>
-              </a:rPr>
-              <a:t>Single source of truth — all implementation documentation, source code, and AI instructions</a:t>
-            </a:r>
-            <a:endParaRPr lang="en-US" sz="1100" dirty="0"/>
-          </a:p>
-        </p:txBody>
-      </p:sp>
-      <p:sp>
-        <p:nvSpPr>
-          <p:cNvPr id="6" name="Shape 4"/>
-          <p:cNvSpPr/>
-          <p:nvPr/>
-        </p:nvSpPr>
-        <p:spPr>
-          <a:xfrm>
-            <a:off x="201168" y="1005840"/>
-            <a:ext cx="8741664" cy="347472"/>
-          </a:xfrm>
-          <a:prstGeom prst="rect">
+          <p:cNvPr id="14" name="Text 12"/>
+          <p:cNvSpPr/>
+          <p:nvPr/>
+        </p:nvSpPr>
+        <p:spPr>
+          <a:xfrm>
+            <a:off x="457200" y="1536192"/>
+            <a:ext cx="1737360" cy="512064"/>
+          </a:xfrm>
+          <a:prstGeom prst="rect">
+            <a:avLst/>
+          </a:prstGeom>
+          <a:noFill/>
+          <a:ln/>
+        </p:spPr>
+        <p:txBody>
+          <a:bodyPr wrap="square" rtlCol="0" anchor="ctr"/>
+          <a:lstStyle/>
+          <a:p>
+            <a:pPr indent="0" marL="0">
+              <a:lnSpc>
+                <a:spcPct val="118000"/>
+              </a:lnSpc>
+              <a:buNone/>
+            </a:pPr>
+            <a:r>
+              <a:rPr lang="en-US" sz="850" dirty="0">
+                <a:solidFill>
+                  <a:srgbClr val="595959"/>
+                </a:solidFill>
+                <a:latin typeface="Arial" pitchFamily="34" charset="0"/>
+                <a:ea typeface="Arial" pitchFamily="34" charset="-122"/>
+                <a:cs typeface="Arial" pitchFamily="34" charset="-120"/>
+              </a:rPr>
+              <a:t>Portal, governance, studio, and assistant deployed on development instance</a:t>
+            </a:r>
+            <a:endParaRPr lang="en-US" sz="850" dirty="0"/>
+          </a:p>
+        </p:txBody>
+      </p:sp>
+      <p:sp>
+        <p:nvSpPr>
+          <p:cNvPr id="15" name="Shape 13"/>
+          <p:cNvSpPr/>
+          <p:nvPr/>
+        </p:nvSpPr>
+        <p:spPr>
+          <a:xfrm>
+            <a:off x="329184" y="2414016"/>
+            <a:ext cx="73152" cy="73152"/>
+          </a:xfrm>
+          <a:prstGeom prst="ellipse">
             <a:avLst/>
           </a:prstGeom>
           <a:solidFill>
@@ -10503,30 +12343,193 @@
       </p:sp>
       <p:sp>
         <p:nvSpPr>
-          <p:cNvPr id="7" name="Text 5"/>
-          <p:cNvSpPr/>
-          <p:nvPr/>
-        </p:nvSpPr>
-        <p:spPr>
-          <a:xfrm>
-            <a:off x="329184" y="1005840"/>
-            <a:ext cx="8613648" cy="347472"/>
-          </a:xfrm>
-          <a:prstGeom prst="rect">
-            <a:avLst/>
-          </a:prstGeom>
-          <a:noFill/>
-          <a:ln/>
-        </p:spPr>
-        <p:txBody>
-          <a:bodyPr wrap="square" rtlCol="0" anchor="ctr"/>
-          <a:lstStyle/>
-          <a:p>
-            <a:pPr indent="0" marL="0">
-              <a:buNone/>
-            </a:pPr>
-            <a:r>
-              <a:rPr lang="en-US" sz="1100" b="1" dirty="0">
+          <p:cNvPr id="16" name="Text 14"/>
+          <p:cNvSpPr/>
+          <p:nvPr/>
+        </p:nvSpPr>
+        <p:spPr>
+          <a:xfrm>
+            <a:off x="457200" y="2231136"/>
+            <a:ext cx="1737360" cy="512064"/>
+          </a:xfrm>
+          <a:prstGeom prst="rect">
+            <a:avLst/>
+          </a:prstGeom>
+          <a:noFill/>
+          <a:ln/>
+        </p:spPr>
+        <p:txBody>
+          <a:bodyPr wrap="square" rtlCol="0" anchor="ctr"/>
+          <a:lstStyle/>
+          <a:p>
+            <a:pPr indent="0" marL="0">
+              <a:lnSpc>
+                <a:spcPct val="118000"/>
+              </a:lnSpc>
+              <a:buNone/>
+            </a:pPr>
+            <a:r>
+              <a:rPr lang="en-US" sz="850" dirty="0">
+                <a:solidFill>
+                  <a:srgbClr val="595959"/>
+                </a:solidFill>
+                <a:latin typeface="Arial" pitchFamily="34" charset="0"/>
+                <a:ea typeface="Arial" pitchFamily="34" charset="-122"/>
+                <a:cs typeface="Arial" pitchFamily="34" charset="-120"/>
+              </a:rPr>
+              <a:t>Role-based access control and audit logging active</a:t>
+            </a:r>
+            <a:endParaRPr lang="en-US" sz="850" dirty="0"/>
+          </a:p>
+        </p:txBody>
+      </p:sp>
+      <p:sp>
+        <p:nvSpPr>
+          <p:cNvPr id="17" name="Shape 15"/>
+          <p:cNvSpPr/>
+          <p:nvPr/>
+        </p:nvSpPr>
+        <p:spPr>
+          <a:xfrm>
+            <a:off x="329184" y="3108960"/>
+            <a:ext cx="73152" cy="73152"/>
+          </a:xfrm>
+          <a:prstGeom prst="ellipse">
+            <a:avLst/>
+          </a:prstGeom>
+          <a:solidFill>
+            <a:srgbClr val="007CC3"/>
+          </a:solidFill>
+          <a:ln/>
+        </p:spPr>
+      </p:sp>
+      <p:sp>
+        <p:nvSpPr>
+          <p:cNvPr id="18" name="Text 16"/>
+          <p:cNvSpPr/>
+          <p:nvPr/>
+        </p:nvSpPr>
+        <p:spPr>
+          <a:xfrm>
+            <a:off x="457200" y="2926080"/>
+            <a:ext cx="1737360" cy="512064"/>
+          </a:xfrm>
+          <a:prstGeom prst="rect">
+            <a:avLst/>
+          </a:prstGeom>
+          <a:noFill/>
+          <a:ln/>
+        </p:spPr>
+        <p:txBody>
+          <a:bodyPr wrap="square" rtlCol="0" anchor="ctr"/>
+          <a:lstStyle/>
+          <a:p>
+            <a:pPr indent="0" marL="0">
+              <a:lnSpc>
+                <a:spcPct val="118000"/>
+              </a:lnSpc>
+              <a:buNone/>
+            </a:pPr>
+            <a:r>
+              <a:rPr lang="en-US" sz="850" dirty="0">
+                <a:solidFill>
+                  <a:srgbClr val="595959"/>
+                </a:solidFill>
+                <a:latin typeface="Arial" pitchFamily="34" charset="0"/>
+                <a:ea typeface="Arial" pitchFamily="34" charset="-122"/>
+                <a:cs typeface="Arial" pitchFamily="34" charset="-120"/>
+              </a:rPr>
+              <a:t>Three-layer NLU and 50+ domain knowledge base in place</a:t>
+            </a:r>
+            <a:endParaRPr lang="en-US" sz="850" dirty="0"/>
+          </a:p>
+        </p:txBody>
+      </p:sp>
+      <p:sp>
+        <p:nvSpPr>
+          <p:cNvPr id="19" name="Text 17"/>
+          <p:cNvSpPr/>
+          <p:nvPr/>
+        </p:nvSpPr>
+        <p:spPr>
+          <a:xfrm>
+            <a:off x="2249424" y="1024128"/>
+            <a:ext cx="146304" cy="274320"/>
+          </a:xfrm>
+          <a:prstGeom prst="rect">
+            <a:avLst/>
+          </a:prstGeom>
+          <a:noFill/>
+          <a:ln/>
+        </p:spPr>
+        <p:txBody>
+          <a:bodyPr wrap="square" rtlCol="0" anchor="ctr"/>
+          <a:lstStyle/>
+          <a:p>
+            <a:pPr algn="ctr" indent="0" marL="0">
+              <a:buNone/>
+            </a:pPr>
+            <a:r>
+              <a:rPr lang="en-US" sz="1600" dirty="0">
+                <a:solidFill>
+                  <a:srgbClr val="B8B8B8"/>
+                </a:solidFill>
+                <a:latin typeface="Arial" pitchFamily="34" charset="0"/>
+                <a:ea typeface="Arial" pitchFamily="34" charset="-122"/>
+                <a:cs typeface="Arial" pitchFamily="34" charset="-120"/>
+              </a:rPr>
+              <a:t>›</a:t>
+            </a:r>
+            <a:endParaRPr lang="en-US" sz="1600" dirty="0"/>
+          </a:p>
+        </p:txBody>
+      </p:sp>
+      <p:sp>
+        <p:nvSpPr>
+          <p:cNvPr id="20" name="Shape 18"/>
+          <p:cNvSpPr/>
+          <p:nvPr/>
+        </p:nvSpPr>
+        <p:spPr>
+          <a:xfrm>
+            <a:off x="2377440" y="932688"/>
+            <a:ext cx="2066544" cy="457200"/>
+          </a:xfrm>
+          <a:prstGeom prst="rect">
+            <a:avLst/>
+          </a:prstGeom>
+          <a:solidFill>
+            <a:srgbClr val="2670C3"/>
+          </a:solidFill>
+          <a:ln/>
+        </p:spPr>
+      </p:sp>
+      <p:sp>
+        <p:nvSpPr>
+          <p:cNvPr id="21" name="Text 19"/>
+          <p:cNvSpPr/>
+          <p:nvPr/>
+        </p:nvSpPr>
+        <p:spPr>
+          <a:xfrm>
+            <a:off x="2468880" y="932688"/>
+            <a:ext cx="493776" cy="457200"/>
+          </a:xfrm>
+          <a:prstGeom prst="rect">
+            <a:avLst/>
+          </a:prstGeom>
+          <a:noFill/>
+          <a:ln/>
+        </p:spPr>
+        <p:txBody>
+          <a:bodyPr wrap="square" rtlCol="0" anchor="ctr"/>
+          <a:lstStyle/>
+          <a:p>
+            <a:pPr algn="ctr" indent="0" marL="0">
+              <a:buNone/>
+            </a:pPr>
+            <a:r>
+              <a:rPr lang="en-US" sz="2000" b="1" dirty="0">
                 <a:solidFill>
                   <a:srgbClr val="FFFFFF"/>
                 </a:solidFill>
@@ -10534,38 +12537,140 @@
                 <a:ea typeface="Arial" pitchFamily="34" charset="-122"/>
                 <a:cs typeface="Arial" pitchFamily="34" charset="-120"/>
               </a:rPr>
-              <a:t>GitHub Repository</a:t>
-            </a:r>
-            <a:endParaRPr lang="en-US" sz="1100" dirty="0"/>
-          </a:p>
-        </p:txBody>
-      </p:sp>
-      <p:sp>
-        <p:nvSpPr>
-          <p:cNvPr id="8" name="Text 6"/>
-          <p:cNvSpPr/>
-          <p:nvPr/>
-        </p:nvSpPr>
-        <p:spPr>
-          <a:xfrm>
-            <a:off x="201168" y="1389888"/>
-            <a:ext cx="8741664" cy="292608"/>
-          </a:xfrm>
-          <a:prstGeom prst="rect">
-            <a:avLst/>
-          </a:prstGeom>
-          <a:noFill/>
-          <a:ln/>
-        </p:spPr>
-        <p:txBody>
-          <a:bodyPr wrap="square" rtlCol="0" anchor="ctr"/>
-          <a:lstStyle/>
-          <a:p>
-            <a:pPr indent="0" marL="0">
-              <a:buNone/>
-            </a:pPr>
-            <a:r>
-              <a:rPr lang="en-US" sz="1000" dirty="0">
+              <a:t>02</a:t>
+            </a:r>
+            <a:endParaRPr lang="en-US" sz="2000" dirty="0"/>
+          </a:p>
+        </p:txBody>
+      </p:sp>
+      <p:sp>
+        <p:nvSpPr>
+          <p:cNvPr id="22" name="Shape 20"/>
+          <p:cNvSpPr/>
+          <p:nvPr/>
+        </p:nvSpPr>
+        <p:spPr>
+          <a:xfrm>
+            <a:off x="2999232" y="1005840"/>
+            <a:ext cx="10973" cy="310896"/>
+          </a:xfrm>
+          <a:prstGeom prst="rect">
+            <a:avLst/>
+          </a:prstGeom>
+          <a:solidFill>
+            <a:srgbClr val="FFFFFF"/>
+          </a:solidFill>
+          <a:ln/>
+        </p:spPr>
+      </p:sp>
+      <p:sp>
+        <p:nvSpPr>
+          <p:cNvPr id="23" name="Text 21"/>
+          <p:cNvSpPr/>
+          <p:nvPr/>
+        </p:nvSpPr>
+        <p:spPr>
+          <a:xfrm>
+            <a:off x="3054096" y="950976"/>
+            <a:ext cx="1316736" cy="420624"/>
+          </a:xfrm>
+          <a:prstGeom prst="rect">
+            <a:avLst/>
+          </a:prstGeom>
+          <a:noFill/>
+          <a:ln/>
+        </p:spPr>
+        <p:txBody>
+          <a:bodyPr wrap="square" rtlCol="0" anchor="ctr"/>
+          <a:lstStyle/>
+          <a:p>
+            <a:pPr indent="0" marL="0">
+              <a:buNone/>
+            </a:pPr>
+            <a:r>
+              <a:rPr lang="en-US" sz="900" b="1" dirty="0">
+                <a:solidFill>
+                  <a:srgbClr val="FFFFFF"/>
+                </a:solidFill>
+                <a:latin typeface="Arial" pitchFamily="34" charset="0"/>
+                <a:ea typeface="Arial" pitchFamily="34" charset="-122"/>
+                <a:cs typeface="Arial" pitchFamily="34" charset="-120"/>
+              </a:rPr>
+              <a:t>STABILITY</a:t>
+            </a:r>
+            <a:endParaRPr lang="en-US" sz="900" dirty="0"/>
+          </a:p>
+        </p:txBody>
+      </p:sp>
+      <p:sp>
+        <p:nvSpPr>
+          <p:cNvPr id="24" name="Shape 22"/>
+          <p:cNvSpPr/>
+          <p:nvPr/>
+        </p:nvSpPr>
+        <p:spPr>
+          <a:xfrm>
+            <a:off x="2377440" y="1389888"/>
+            <a:ext cx="2066544" cy="2377440"/>
+          </a:xfrm>
+          <a:prstGeom prst="rect">
+            <a:avLst/>
+          </a:prstGeom>
+          <a:solidFill>
+            <a:srgbClr val="F5FAFF"/>
+          </a:solidFill>
+          <a:ln/>
+        </p:spPr>
+      </p:sp>
+      <p:sp>
+        <p:nvSpPr>
+          <p:cNvPr id="25" name="Shape 23"/>
+          <p:cNvSpPr/>
+          <p:nvPr/>
+        </p:nvSpPr>
+        <p:spPr>
+          <a:xfrm>
+            <a:off x="2505456" y="1719072"/>
+            <a:ext cx="73152" cy="73152"/>
+          </a:xfrm>
+          <a:prstGeom prst="ellipse">
+            <a:avLst/>
+          </a:prstGeom>
+          <a:solidFill>
+            <a:srgbClr val="2670C3"/>
+          </a:solidFill>
+          <a:ln/>
+        </p:spPr>
+      </p:sp>
+      <p:sp>
+        <p:nvSpPr>
+          <p:cNvPr id="26" name="Text 24"/>
+          <p:cNvSpPr/>
+          <p:nvPr/>
+        </p:nvSpPr>
+        <p:spPr>
+          <a:xfrm>
+            <a:off x="2633472" y="1536192"/>
+            <a:ext cx="1737360" cy="512064"/>
+          </a:xfrm>
+          <a:prstGeom prst="rect">
+            <a:avLst/>
+          </a:prstGeom>
+          <a:noFill/>
+          <a:ln/>
+        </p:spPr>
+        <p:txBody>
+          <a:bodyPr wrap="square" rtlCol="0" anchor="ctr"/>
+          <a:lstStyle/>
+          <a:p>
+            <a:pPr indent="0" marL="0">
+              <a:lnSpc>
+                <a:spcPct val="118000"/>
+              </a:lnSpc>
+              <a:buNone/>
+            </a:pPr>
+            <a:r>
+              <a:rPr lang="en-US" sz="850" dirty="0">
                 <a:solidFill>
                   <a:srgbClr val="595959"/>
                 </a:solidFill>
@@ -10573,47 +12678,146 @@
                 <a:ea typeface="Arial" pitchFamily="34" charset="-122"/>
                 <a:cs typeface="Arial" pitchFamily="34" charset="-120"/>
               </a:rPr>
-              <a:t>https://github.com/nassim-louzaoui/servicenow-solutions</a:t>
-            </a:r>
-            <a:endParaRPr lang="en-US" sz="1000" dirty="0"/>
-          </a:p>
-        </p:txBody>
-      </p:sp>
-      <p:sp>
-        <p:nvSpPr>
-          <p:cNvPr id="9" name="Shape 7"/>
-          <p:cNvSpPr/>
-          <p:nvPr/>
-        </p:nvSpPr>
-        <p:spPr>
-          <a:xfrm>
-            <a:off x="201168" y="1737360"/>
-            <a:ext cx="6144768" cy="2889504"/>
-          </a:xfrm>
-          <a:prstGeom prst="rect">
-            <a:avLst/>
-          </a:prstGeom>
-          <a:solidFill>
-            <a:srgbClr val="EBF4FB"/>
-          </a:solidFill>
-          <a:ln w="9525">
-            <a:solidFill>
-              <a:srgbClr val="D9D9D9"/>
-            </a:solidFill>
-            <a:prstDash val="solid"/>
-          </a:ln>
-        </p:spPr>
-      </p:sp>
-      <p:sp>
-        <p:nvSpPr>
-          <p:cNvPr id="10" name="Text 8"/>
-          <p:cNvSpPr/>
-          <p:nvPr/>
-        </p:nvSpPr>
-        <p:spPr>
-          <a:xfrm>
-            <a:off x="201168" y="2999232"/>
-            <a:ext cx="6144768" cy="329184"/>
+              <a:t>End-to-end workflow validation and defect resolution</a:t>
+            </a:r>
+            <a:endParaRPr lang="en-US" sz="850" dirty="0"/>
+          </a:p>
+        </p:txBody>
+      </p:sp>
+      <p:sp>
+        <p:nvSpPr>
+          <p:cNvPr id="27" name="Shape 25"/>
+          <p:cNvSpPr/>
+          <p:nvPr/>
+        </p:nvSpPr>
+        <p:spPr>
+          <a:xfrm>
+            <a:off x="2505456" y="2414016"/>
+            <a:ext cx="73152" cy="73152"/>
+          </a:xfrm>
+          <a:prstGeom prst="ellipse">
+            <a:avLst/>
+          </a:prstGeom>
+          <a:solidFill>
+            <a:srgbClr val="2670C3"/>
+          </a:solidFill>
+          <a:ln/>
+        </p:spPr>
+      </p:sp>
+      <p:sp>
+        <p:nvSpPr>
+          <p:cNvPr id="28" name="Text 26"/>
+          <p:cNvSpPr/>
+          <p:nvPr/>
+        </p:nvSpPr>
+        <p:spPr>
+          <a:xfrm>
+            <a:off x="2633472" y="2231136"/>
+            <a:ext cx="1737360" cy="512064"/>
+          </a:xfrm>
+          <a:prstGeom prst="rect">
+            <a:avLst/>
+          </a:prstGeom>
+          <a:noFill/>
+          <a:ln/>
+        </p:spPr>
+        <p:txBody>
+          <a:bodyPr wrap="square" rtlCol="0" anchor="ctr"/>
+          <a:lstStyle/>
+          <a:p>
+            <a:pPr indent="0" marL="0">
+              <a:lnSpc>
+                <a:spcPct val="118000"/>
+              </a:lnSpc>
+              <a:buNone/>
+            </a:pPr>
+            <a:r>
+              <a:rPr lang="en-US" sz="850" dirty="0">
+                <a:solidFill>
+                  <a:srgbClr val="595959"/>
+                </a:solidFill>
+                <a:latin typeface="Arial" pitchFamily="34" charset="0"/>
+                <a:ea typeface="Arial" pitchFamily="34" charset="-122"/>
+                <a:cs typeface="Arial" pitchFamily="34" charset="-120"/>
+              </a:rPr>
+              <a:t>UI consistency, accessibility, and performance improvements</a:t>
+            </a:r>
+            <a:endParaRPr lang="en-US" sz="850" dirty="0"/>
+          </a:p>
+        </p:txBody>
+      </p:sp>
+      <p:sp>
+        <p:nvSpPr>
+          <p:cNvPr id="29" name="Shape 27"/>
+          <p:cNvSpPr/>
+          <p:nvPr/>
+        </p:nvSpPr>
+        <p:spPr>
+          <a:xfrm>
+            <a:off x="2505456" y="3108960"/>
+            <a:ext cx="73152" cy="73152"/>
+          </a:xfrm>
+          <a:prstGeom prst="ellipse">
+            <a:avLst/>
+          </a:prstGeom>
+          <a:solidFill>
+            <a:srgbClr val="2670C3"/>
+          </a:solidFill>
+          <a:ln/>
+        </p:spPr>
+      </p:sp>
+      <p:sp>
+        <p:nvSpPr>
+          <p:cNvPr id="30" name="Text 28"/>
+          <p:cNvSpPr/>
+          <p:nvPr/>
+        </p:nvSpPr>
+        <p:spPr>
+          <a:xfrm>
+            <a:off x="2633472" y="2926080"/>
+            <a:ext cx="1737360" cy="512064"/>
+          </a:xfrm>
+          <a:prstGeom prst="rect">
+            <a:avLst/>
+          </a:prstGeom>
+          <a:noFill/>
+          <a:ln/>
+        </p:spPr>
+        <p:txBody>
+          <a:bodyPr wrap="square" rtlCol="0" anchor="ctr"/>
+          <a:lstStyle/>
+          <a:p>
+            <a:pPr indent="0" marL="0">
+              <a:lnSpc>
+                <a:spcPct val="118000"/>
+              </a:lnSpc>
+              <a:buNone/>
+            </a:pPr>
+            <a:r>
+              <a:rPr lang="en-US" sz="850" dirty="0">
+                <a:solidFill>
+                  <a:srgbClr val="595959"/>
+                </a:solidFill>
+                <a:latin typeface="Arial" pitchFamily="34" charset="0"/>
+                <a:ea typeface="Arial" pitchFamily="34" charset="-122"/>
+                <a:cs typeface="Arial" pitchFamily="34" charset="-120"/>
+              </a:rPr>
+              <a:t>Governance approval flow and escalation stress-tested</a:t>
+            </a:r>
+            <a:endParaRPr lang="en-US" sz="850" dirty="0"/>
+          </a:p>
+        </p:txBody>
+      </p:sp>
+      <p:sp>
+        <p:nvSpPr>
+          <p:cNvPr id="31" name="Text 29"/>
+          <p:cNvSpPr/>
+          <p:nvPr/>
+        </p:nvSpPr>
+        <p:spPr>
+          <a:xfrm>
+            <a:off x="4425696" y="1024128"/>
+            <a:ext cx="146304" cy="274320"/>
           </a:xfrm>
           <a:prstGeom prst="rect">
             <a:avLst/>
@@ -10629,105 +12833,207 @@
               <a:buNone/>
             </a:pPr>
             <a:r>
-              <a:rPr lang="en-US" sz="1000" dirty="0">
-                <a:solidFill>
-                  <a:srgbClr val="7F7F7F"/>
-                </a:solidFill>
-                <a:latin typeface="Arial" pitchFamily="34" charset="0"/>
-                <a:ea typeface="Arial" pitchFamily="34" charset="-122"/>
-                <a:cs typeface="Arial" pitchFamily="34" charset="-120"/>
-              </a:rPr>
-              <a:t>[ Repository Screenshot ]</a:t>
-            </a:r>
-            <a:endParaRPr lang="en-US" sz="1000" dirty="0"/>
-          </a:p>
-        </p:txBody>
-      </p:sp>
-      <p:sp>
-        <p:nvSpPr>
-          <p:cNvPr id="11" name="Shape 9"/>
-          <p:cNvSpPr/>
-          <p:nvPr/>
-        </p:nvSpPr>
-        <p:spPr>
-          <a:xfrm>
-            <a:off x="6510528" y="1737360"/>
-            <a:ext cx="2432304" cy="1408176"/>
-          </a:xfrm>
-          <a:prstGeom prst="rect">
-            <a:avLst/>
-          </a:prstGeom>
-          <a:solidFill>
-            <a:srgbClr val="EBF4FB"/>
-          </a:solidFill>
-          <a:ln/>
-        </p:spPr>
-      </p:sp>
-      <p:sp>
-        <p:nvSpPr>
-          <p:cNvPr id="12" name="Text 10"/>
-          <p:cNvSpPr/>
-          <p:nvPr/>
-        </p:nvSpPr>
-        <p:spPr>
-          <a:xfrm>
-            <a:off x="6583680" y="1792224"/>
-            <a:ext cx="2286000" cy="256032"/>
-          </a:xfrm>
-          <a:prstGeom prst="rect">
-            <a:avLst/>
-          </a:prstGeom>
-          <a:noFill/>
-          <a:ln/>
-        </p:spPr>
-        <p:txBody>
-          <a:bodyPr wrap="square" rtlCol="0" anchor="ctr"/>
-          <a:lstStyle/>
-          <a:p>
-            <a:pPr indent="0" marL="0">
-              <a:buNone/>
-            </a:pPr>
-            <a:r>
-              <a:rPr lang="en-US" sz="950" b="1" dirty="0">
-                <a:solidFill>
-                  <a:srgbClr val="007CC3"/>
-                </a:solidFill>
-                <a:latin typeface="Arial" pitchFamily="34" charset="0"/>
-                <a:ea typeface="Arial" pitchFamily="34" charset="-122"/>
-                <a:cs typeface="Arial" pitchFamily="34" charset="-120"/>
-              </a:rPr>
-              <a:t>REPOSITORY STRUCTURE</a:t>
-            </a:r>
-            <a:endParaRPr lang="en-US" sz="950" dirty="0"/>
-          </a:p>
-        </p:txBody>
-      </p:sp>
-      <p:sp>
-        <p:nvSpPr>
-          <p:cNvPr id="13" name="Text 11"/>
-          <p:cNvSpPr/>
-          <p:nvPr/>
-        </p:nvSpPr>
-        <p:spPr>
-          <a:xfrm>
-            <a:off x="6583680" y="2084832"/>
-            <a:ext cx="2286000" cy="201168"/>
-          </a:xfrm>
-          <a:prstGeom prst="rect">
-            <a:avLst/>
-          </a:prstGeom>
-          <a:noFill/>
-          <a:ln/>
-        </p:spPr>
-        <p:txBody>
-          <a:bodyPr wrap="square" rtlCol="0" anchor="ctr"/>
-          <a:lstStyle/>
-          <a:p>
-            <a:pPr indent="0" marL="0">
-              <a:buNone/>
-            </a:pPr>
-            <a:r>
-              <a:rPr lang="en-US" sz="900" dirty="0">
+              <a:rPr lang="en-US" sz="1600" dirty="0">
+                <a:solidFill>
+                  <a:srgbClr val="B8B8B8"/>
+                </a:solidFill>
+                <a:latin typeface="Arial" pitchFamily="34" charset="0"/>
+                <a:ea typeface="Arial" pitchFamily="34" charset="-122"/>
+                <a:cs typeface="Arial" pitchFamily="34" charset="-120"/>
+              </a:rPr>
+              <a:t>›</a:t>
+            </a:r>
+            <a:endParaRPr lang="en-US" sz="1600" dirty="0"/>
+          </a:p>
+        </p:txBody>
+      </p:sp>
+      <p:sp>
+        <p:nvSpPr>
+          <p:cNvPr id="32" name="Shape 30"/>
+          <p:cNvSpPr/>
+          <p:nvPr/>
+        </p:nvSpPr>
+        <p:spPr>
+          <a:xfrm>
+            <a:off x="4553712" y="932688"/>
+            <a:ext cx="2066544" cy="457200"/>
+          </a:xfrm>
+          <a:prstGeom prst="rect">
+            <a:avLst/>
+          </a:prstGeom>
+          <a:solidFill>
+            <a:srgbClr val="007CC3"/>
+          </a:solidFill>
+          <a:ln/>
+        </p:spPr>
+      </p:sp>
+      <p:sp>
+        <p:nvSpPr>
+          <p:cNvPr id="33" name="Text 31"/>
+          <p:cNvSpPr/>
+          <p:nvPr/>
+        </p:nvSpPr>
+        <p:spPr>
+          <a:xfrm>
+            <a:off x="4645152" y="932688"/>
+            <a:ext cx="493776" cy="457200"/>
+          </a:xfrm>
+          <a:prstGeom prst="rect">
+            <a:avLst/>
+          </a:prstGeom>
+          <a:noFill/>
+          <a:ln/>
+        </p:spPr>
+        <p:txBody>
+          <a:bodyPr wrap="square" rtlCol="0" anchor="ctr"/>
+          <a:lstStyle/>
+          <a:p>
+            <a:pPr algn="ctr" indent="0" marL="0">
+              <a:buNone/>
+            </a:pPr>
+            <a:r>
+              <a:rPr lang="en-US" sz="2000" b="1" dirty="0">
+                <a:solidFill>
+                  <a:srgbClr val="FFFFFF"/>
+                </a:solidFill>
+                <a:latin typeface="Arial" pitchFamily="34" charset="0"/>
+                <a:ea typeface="Arial" pitchFamily="34" charset="-122"/>
+                <a:cs typeface="Arial" pitchFamily="34" charset="-120"/>
+              </a:rPr>
+              <a:t>03</a:t>
+            </a:r>
+            <a:endParaRPr lang="en-US" sz="2000" dirty="0"/>
+          </a:p>
+        </p:txBody>
+      </p:sp>
+      <p:sp>
+        <p:nvSpPr>
+          <p:cNvPr id="34" name="Shape 32"/>
+          <p:cNvSpPr/>
+          <p:nvPr/>
+        </p:nvSpPr>
+        <p:spPr>
+          <a:xfrm>
+            <a:off x="5175504" y="1005840"/>
+            <a:ext cx="10973" cy="310896"/>
+          </a:xfrm>
+          <a:prstGeom prst="rect">
+            <a:avLst/>
+          </a:prstGeom>
+          <a:solidFill>
+            <a:srgbClr val="FFFFFF"/>
+          </a:solidFill>
+          <a:ln/>
+        </p:spPr>
+      </p:sp>
+      <p:sp>
+        <p:nvSpPr>
+          <p:cNvPr id="35" name="Text 33"/>
+          <p:cNvSpPr/>
+          <p:nvPr/>
+        </p:nvSpPr>
+        <p:spPr>
+          <a:xfrm>
+            <a:off x="5230368" y="950976"/>
+            <a:ext cx="1316736" cy="420624"/>
+          </a:xfrm>
+          <a:prstGeom prst="rect">
+            <a:avLst/>
+          </a:prstGeom>
+          <a:noFill/>
+          <a:ln/>
+        </p:spPr>
+        <p:txBody>
+          <a:bodyPr wrap="square" rtlCol="0" anchor="ctr"/>
+          <a:lstStyle/>
+          <a:p>
+            <a:pPr indent="0" marL="0">
+              <a:buNone/>
+            </a:pPr>
+            <a:r>
+              <a:rPr lang="en-US" sz="900" b="1" dirty="0">
+                <a:solidFill>
+                  <a:srgbClr val="FFFFFF"/>
+                </a:solidFill>
+                <a:latin typeface="Arial" pitchFamily="34" charset="0"/>
+                <a:ea typeface="Arial" pitchFamily="34" charset="-122"/>
+                <a:cs typeface="Arial" pitchFamily="34" charset="-120"/>
+              </a:rPr>
+              <a:t>ENHANCEMENT</a:t>
+            </a:r>
+            <a:endParaRPr lang="en-US" sz="900" dirty="0"/>
+          </a:p>
+        </p:txBody>
+      </p:sp>
+      <p:sp>
+        <p:nvSpPr>
+          <p:cNvPr id="36" name="Shape 34"/>
+          <p:cNvSpPr/>
+          <p:nvPr/>
+        </p:nvSpPr>
+        <p:spPr>
+          <a:xfrm>
+            <a:off x="4553712" y="1389888"/>
+            <a:ext cx="2066544" cy="2377440"/>
+          </a:xfrm>
+          <a:prstGeom prst="rect">
+            <a:avLst/>
+          </a:prstGeom>
+          <a:solidFill>
+            <a:srgbClr val="F5FAFF"/>
+          </a:solidFill>
+          <a:ln/>
+        </p:spPr>
+      </p:sp>
+      <p:sp>
+        <p:nvSpPr>
+          <p:cNvPr id="37" name="Shape 35"/>
+          <p:cNvSpPr/>
+          <p:nvPr/>
+        </p:nvSpPr>
+        <p:spPr>
+          <a:xfrm>
+            <a:off x="4681728" y="1719072"/>
+            <a:ext cx="73152" cy="73152"/>
+          </a:xfrm>
+          <a:prstGeom prst="ellipse">
+            <a:avLst/>
+          </a:prstGeom>
+          <a:solidFill>
+            <a:srgbClr val="007CC3"/>
+          </a:solidFill>
+          <a:ln/>
+        </p:spPr>
+      </p:sp>
+      <p:sp>
+        <p:nvSpPr>
+          <p:cNvPr id="38" name="Text 36"/>
+          <p:cNvSpPr/>
+          <p:nvPr/>
+        </p:nvSpPr>
+        <p:spPr>
+          <a:xfrm>
+            <a:off x="4809744" y="1536192"/>
+            <a:ext cx="1737360" cy="512064"/>
+          </a:xfrm>
+          <a:prstGeom prst="rect">
+            <a:avLst/>
+          </a:prstGeom>
+          <a:noFill/>
+          <a:ln/>
+        </p:spPr>
+        <p:txBody>
+          <a:bodyPr wrap="square" rtlCol="0" anchor="ctr"/>
+          <a:lstStyle/>
+          <a:p>
+            <a:pPr indent="0" marL="0">
+              <a:lnSpc>
+                <a:spcPct val="118000"/>
+              </a:lnSpc>
+              <a:buNone/>
+            </a:pPr>
+            <a:r>
+              <a:rPr lang="en-US" sz="850" dirty="0">
                 <a:solidFill>
                   <a:srgbClr val="595959"/>
                 </a:solidFill>
@@ -10735,7 +13041,288 @@
                 <a:ea typeface="Arial" pitchFamily="34" charset="-122"/>
                 <a:cs typeface="Arial" pitchFamily="34" charset="-120"/>
               </a:rPr>
-              <a:t>.github/copilot-instructions.md</a:t>
+              <a:t>Expanded NLU coverage and additional deliverable builder types</a:t>
+            </a:r>
+            <a:endParaRPr lang="en-US" sz="850" dirty="0"/>
+          </a:p>
+        </p:txBody>
+      </p:sp>
+      <p:sp>
+        <p:nvSpPr>
+          <p:cNvPr id="39" name="Shape 37"/>
+          <p:cNvSpPr/>
+          <p:nvPr/>
+        </p:nvSpPr>
+        <p:spPr>
+          <a:xfrm>
+            <a:off x="4681728" y="2414016"/>
+            <a:ext cx="73152" cy="73152"/>
+          </a:xfrm>
+          <a:prstGeom prst="ellipse">
+            <a:avLst/>
+          </a:prstGeom>
+          <a:solidFill>
+            <a:srgbClr val="007CC3"/>
+          </a:solidFill>
+          <a:ln/>
+        </p:spPr>
+      </p:sp>
+      <p:sp>
+        <p:nvSpPr>
+          <p:cNvPr id="40" name="Text 38"/>
+          <p:cNvSpPr/>
+          <p:nvPr/>
+        </p:nvSpPr>
+        <p:spPr>
+          <a:xfrm>
+            <a:off x="4809744" y="2231136"/>
+            <a:ext cx="1737360" cy="512064"/>
+          </a:xfrm>
+          <a:prstGeom prst="rect">
+            <a:avLst/>
+          </a:prstGeom>
+          <a:noFill/>
+          <a:ln/>
+        </p:spPr>
+        <p:txBody>
+          <a:bodyPr wrap="square" rtlCol="0" anchor="ctr"/>
+          <a:lstStyle/>
+          <a:p>
+            <a:pPr indent="0" marL="0">
+              <a:lnSpc>
+                <a:spcPct val="118000"/>
+              </a:lnSpc>
+              <a:buNone/>
+            </a:pPr>
+            <a:r>
+              <a:rPr lang="en-US" sz="850" dirty="0">
+                <a:solidFill>
+                  <a:srgbClr val="595959"/>
+                </a:solidFill>
+                <a:latin typeface="Arial" pitchFamily="34" charset="0"/>
+                <a:ea typeface="Arial" pitchFamily="34" charset="-122"/>
+                <a:cs typeface="Arial" pitchFamily="34" charset="-120"/>
+              </a:rPr>
+              <a:t>Creator tooling and use case guidance refinements</a:t>
+            </a:r>
+            <a:endParaRPr lang="en-US" sz="850" dirty="0"/>
+          </a:p>
+        </p:txBody>
+      </p:sp>
+      <p:sp>
+        <p:nvSpPr>
+          <p:cNvPr id="41" name="Shape 39"/>
+          <p:cNvSpPr/>
+          <p:nvPr/>
+        </p:nvSpPr>
+        <p:spPr>
+          <a:xfrm>
+            <a:off x="4681728" y="3108960"/>
+            <a:ext cx="73152" cy="73152"/>
+          </a:xfrm>
+          <a:prstGeom prst="ellipse">
+            <a:avLst/>
+          </a:prstGeom>
+          <a:solidFill>
+            <a:srgbClr val="007CC3"/>
+          </a:solidFill>
+          <a:ln/>
+        </p:spPr>
+      </p:sp>
+      <p:sp>
+        <p:nvSpPr>
+          <p:cNvPr id="42" name="Text 40"/>
+          <p:cNvSpPr/>
+          <p:nvPr/>
+        </p:nvSpPr>
+        <p:spPr>
+          <a:xfrm>
+            <a:off x="4809744" y="2926080"/>
+            <a:ext cx="1737360" cy="512064"/>
+          </a:xfrm>
+          <a:prstGeom prst="rect">
+            <a:avLst/>
+          </a:prstGeom>
+          <a:noFill/>
+          <a:ln/>
+        </p:spPr>
+        <p:txBody>
+          <a:bodyPr wrap="square" rtlCol="0" anchor="ctr"/>
+          <a:lstStyle/>
+          <a:p>
+            <a:pPr indent="0" marL="0">
+              <a:lnSpc>
+                <a:spcPct val="118000"/>
+              </a:lnSpc>
+              <a:buNone/>
+            </a:pPr>
+            <a:r>
+              <a:rPr lang="en-US" sz="850" dirty="0">
+                <a:solidFill>
+                  <a:srgbClr val="595959"/>
+                </a:solidFill>
+                <a:latin typeface="Arial" pitchFamily="34" charset="0"/>
+                <a:ea typeface="Arial" pitchFamily="34" charset="-122"/>
+                <a:cs typeface="Arial" pitchFamily="34" charset="-120"/>
+              </a:rPr>
+              <a:t>Improved contextual accuracy and response quality</a:t>
+            </a:r>
+            <a:endParaRPr lang="en-US" sz="850" dirty="0"/>
+          </a:p>
+        </p:txBody>
+      </p:sp>
+      <p:sp>
+        <p:nvSpPr>
+          <p:cNvPr id="43" name="Text 41"/>
+          <p:cNvSpPr/>
+          <p:nvPr/>
+        </p:nvSpPr>
+        <p:spPr>
+          <a:xfrm>
+            <a:off x="6601968" y="1024128"/>
+            <a:ext cx="146304" cy="274320"/>
+          </a:xfrm>
+          <a:prstGeom prst="rect">
+            <a:avLst/>
+          </a:prstGeom>
+          <a:noFill/>
+          <a:ln/>
+        </p:spPr>
+        <p:txBody>
+          <a:bodyPr wrap="square" rtlCol="0" anchor="ctr"/>
+          <a:lstStyle/>
+          <a:p>
+            <a:pPr algn="ctr" indent="0" marL="0">
+              <a:buNone/>
+            </a:pPr>
+            <a:r>
+              <a:rPr lang="en-US" sz="1600" dirty="0">
+                <a:solidFill>
+                  <a:srgbClr val="B8B8B8"/>
+                </a:solidFill>
+                <a:latin typeface="Arial" pitchFamily="34" charset="0"/>
+                <a:ea typeface="Arial" pitchFamily="34" charset="-122"/>
+                <a:cs typeface="Arial" pitchFamily="34" charset="-120"/>
+              </a:rPr>
+              <a:t>›</a:t>
+            </a:r>
+            <a:endParaRPr lang="en-US" sz="1600" dirty="0"/>
+          </a:p>
+        </p:txBody>
+      </p:sp>
+      <p:sp>
+        <p:nvSpPr>
+          <p:cNvPr id="44" name="Shape 42"/>
+          <p:cNvSpPr/>
+          <p:nvPr/>
+        </p:nvSpPr>
+        <p:spPr>
+          <a:xfrm>
+            <a:off x="6729984" y="932688"/>
+            <a:ext cx="2066544" cy="457200"/>
+          </a:xfrm>
+          <a:prstGeom prst="rect">
+            <a:avLst/>
+          </a:prstGeom>
+          <a:solidFill>
+            <a:srgbClr val="595959"/>
+          </a:solidFill>
+          <a:ln/>
+        </p:spPr>
+      </p:sp>
+      <p:sp>
+        <p:nvSpPr>
+          <p:cNvPr id="45" name="Text 43"/>
+          <p:cNvSpPr/>
+          <p:nvPr/>
+        </p:nvSpPr>
+        <p:spPr>
+          <a:xfrm>
+            <a:off x="6821424" y="932688"/>
+            <a:ext cx="493776" cy="457200"/>
+          </a:xfrm>
+          <a:prstGeom prst="rect">
+            <a:avLst/>
+          </a:prstGeom>
+          <a:noFill/>
+          <a:ln/>
+        </p:spPr>
+        <p:txBody>
+          <a:bodyPr wrap="square" rtlCol="0" anchor="ctr"/>
+          <a:lstStyle/>
+          <a:p>
+            <a:pPr algn="ctr" indent="0" marL="0">
+              <a:buNone/>
+            </a:pPr>
+            <a:r>
+              <a:rPr lang="en-US" sz="2000" b="1" dirty="0">
+                <a:solidFill>
+                  <a:srgbClr val="FFFFFF"/>
+                </a:solidFill>
+                <a:latin typeface="Arial" pitchFamily="34" charset="0"/>
+                <a:ea typeface="Arial" pitchFamily="34" charset="-122"/>
+                <a:cs typeface="Arial" pitchFamily="34" charset="-120"/>
+              </a:rPr>
+              <a:t>04</a:t>
+            </a:r>
+            <a:endParaRPr lang="en-US" sz="2000" dirty="0"/>
+          </a:p>
+        </p:txBody>
+      </p:sp>
+      <p:sp>
+        <p:nvSpPr>
+          <p:cNvPr id="46" name="Shape 44"/>
+          <p:cNvSpPr/>
+          <p:nvPr/>
+        </p:nvSpPr>
+        <p:spPr>
+          <a:xfrm>
+            <a:off x="7351776" y="1005840"/>
+            <a:ext cx="10973" cy="310896"/>
+          </a:xfrm>
+          <a:prstGeom prst="rect">
+            <a:avLst/>
+          </a:prstGeom>
+          <a:solidFill>
+            <a:srgbClr val="FFFFFF"/>
+          </a:solidFill>
+          <a:ln/>
+        </p:spPr>
+      </p:sp>
+      <p:sp>
+        <p:nvSpPr>
+          <p:cNvPr id="47" name="Text 45"/>
+          <p:cNvSpPr/>
+          <p:nvPr/>
+        </p:nvSpPr>
+        <p:spPr>
+          <a:xfrm>
+            <a:off x="7406640" y="950976"/>
+            <a:ext cx="1316736" cy="420624"/>
+          </a:xfrm>
+          <a:prstGeom prst="rect">
+            <a:avLst/>
+          </a:prstGeom>
+          <a:noFill/>
+          <a:ln/>
+        </p:spPr>
+        <p:txBody>
+          <a:bodyPr wrap="square" rtlCol="0" anchor="ctr"/>
+          <a:lstStyle/>
+          <a:p>
+            <a:pPr indent="0" marL="0">
+              <a:buNone/>
+            </a:pPr>
+            <a:r>
+              <a:rPr lang="en-US" sz="900" b="1" dirty="0">
+                <a:solidFill>
+                  <a:srgbClr val="FFFFFF"/>
+                </a:solidFill>
+                <a:latin typeface="Arial" pitchFamily="34" charset="0"/>
+                <a:ea typeface="Arial" pitchFamily="34" charset="-122"/>
+                <a:cs typeface="Arial" pitchFamily="34" charset="-120"/>
+              </a:rPr>
+              <a:t>SCALE</a:t>
             </a:r>
             <a:endParaRPr lang="en-US" sz="900" dirty="0"/>
           </a:p>
@@ -10743,30 +13330,73 @@
       </p:sp>
       <p:sp>
         <p:nvSpPr>
-          <p:cNvPr id="14" name="Text 12"/>
-          <p:cNvSpPr/>
-          <p:nvPr/>
-        </p:nvSpPr>
-        <p:spPr>
-          <a:xfrm>
-            <a:off x="6583680" y="2286000"/>
-            <a:ext cx="2286000" cy="201168"/>
-          </a:xfrm>
-          <a:prstGeom prst="rect">
-            <a:avLst/>
-          </a:prstGeom>
-          <a:noFill/>
-          <a:ln/>
-        </p:spPr>
-        <p:txBody>
-          <a:bodyPr wrap="square" rtlCol="0" anchor="ctr"/>
-          <a:lstStyle/>
-          <a:p>
-            <a:pPr indent="0" marL="0">
-              <a:buNone/>
-            </a:pPr>
-            <a:r>
-              <a:rPr lang="en-US" sz="900" dirty="0">
+          <p:cNvPr id="48" name="Shape 46"/>
+          <p:cNvSpPr/>
+          <p:nvPr/>
+        </p:nvSpPr>
+        <p:spPr>
+          <a:xfrm>
+            <a:off x="6729984" y="1389888"/>
+            <a:ext cx="2066544" cy="2377440"/>
+          </a:xfrm>
+          <a:prstGeom prst="rect">
+            <a:avLst/>
+          </a:prstGeom>
+          <a:solidFill>
+            <a:srgbClr val="F5FAFF"/>
+          </a:solidFill>
+          <a:ln/>
+        </p:spPr>
+      </p:sp>
+      <p:sp>
+        <p:nvSpPr>
+          <p:cNvPr id="49" name="Shape 47"/>
+          <p:cNvSpPr/>
+          <p:nvPr/>
+        </p:nvSpPr>
+        <p:spPr>
+          <a:xfrm>
+            <a:off x="6858000" y="1719072"/>
+            <a:ext cx="73152" cy="73152"/>
+          </a:xfrm>
+          <a:prstGeom prst="ellipse">
+            <a:avLst/>
+          </a:prstGeom>
+          <a:solidFill>
+            <a:srgbClr val="595959"/>
+          </a:solidFill>
+          <a:ln/>
+        </p:spPr>
+      </p:sp>
+      <p:sp>
+        <p:nvSpPr>
+          <p:cNvPr id="50" name="Text 48"/>
+          <p:cNvSpPr/>
+          <p:nvPr/>
+        </p:nvSpPr>
+        <p:spPr>
+          <a:xfrm>
+            <a:off x="6986016" y="1536192"/>
+            <a:ext cx="1737360" cy="512064"/>
+          </a:xfrm>
+          <a:prstGeom prst="rect">
+            <a:avLst/>
+          </a:prstGeom>
+          <a:noFill/>
+          <a:ln/>
+        </p:spPr>
+        <p:txBody>
+          <a:bodyPr wrap="square" rtlCol="0" anchor="ctr"/>
+          <a:lstStyle/>
+          <a:p>
+            <a:pPr indent="0" marL="0">
+              <a:lnSpc>
+                <a:spcPct val="118000"/>
+              </a:lnSpc>
+              <a:buNone/>
+            </a:pPr>
+            <a:r>
+              <a:rPr lang="en-US" sz="850" dirty="0">
                 <a:solidFill>
                   <a:srgbClr val="595959"/>
                 </a:solidFill>
@@ -10774,38 +13404,61 @@
                 <a:ea typeface="Arial" pitchFamily="34" charset="-122"/>
                 <a:cs typeface="Arial" pitchFamily="34" charset="-120"/>
               </a:rPr>
-              <a:t>architecture/</a:t>
-            </a:r>
-            <a:endParaRPr lang="en-US" sz="900" dirty="0"/>
-          </a:p>
-        </p:txBody>
-      </p:sp>
-      <p:sp>
-        <p:nvSpPr>
-          <p:cNvPr id="15" name="Text 13"/>
-          <p:cNvSpPr/>
-          <p:nvPr/>
-        </p:nvSpPr>
-        <p:spPr>
-          <a:xfrm>
-            <a:off x="6583680" y="2487168"/>
-            <a:ext cx="2286000" cy="201168"/>
-          </a:xfrm>
-          <a:prstGeom prst="rect">
-            <a:avLst/>
-          </a:prstGeom>
-          <a:noFill/>
-          <a:ln/>
-        </p:spPr>
-        <p:txBody>
-          <a:bodyPr wrap="square" rtlCol="0" anchor="ctr"/>
-          <a:lstStyle/>
-          <a:p>
-            <a:pPr indent="0" marL="0">
-              <a:buNone/>
-            </a:pPr>
-            <a:r>
-              <a:rPr lang="en-US" sz="900" dirty="0">
+              <a:t>Multi-group automation sharing and cross-team governance</a:t>
+            </a:r>
+            <a:endParaRPr lang="en-US" sz="850" dirty="0"/>
+          </a:p>
+        </p:txBody>
+      </p:sp>
+      <p:sp>
+        <p:nvSpPr>
+          <p:cNvPr id="51" name="Shape 49"/>
+          <p:cNvSpPr/>
+          <p:nvPr/>
+        </p:nvSpPr>
+        <p:spPr>
+          <a:xfrm>
+            <a:off x="6858000" y="2414016"/>
+            <a:ext cx="73152" cy="73152"/>
+          </a:xfrm>
+          <a:prstGeom prst="ellipse">
+            <a:avLst/>
+          </a:prstGeom>
+          <a:solidFill>
+            <a:srgbClr val="595959"/>
+          </a:solidFill>
+          <a:ln/>
+        </p:spPr>
+      </p:sp>
+      <p:sp>
+        <p:nvSpPr>
+          <p:cNvPr id="52" name="Text 50"/>
+          <p:cNvSpPr/>
+          <p:nvPr/>
+        </p:nvSpPr>
+        <p:spPr>
+          <a:xfrm>
+            <a:off x="6986016" y="2231136"/>
+            <a:ext cx="1737360" cy="512064"/>
+          </a:xfrm>
+          <a:prstGeom prst="rect">
+            <a:avLst/>
+          </a:prstGeom>
+          <a:noFill/>
+          <a:ln/>
+        </p:spPr>
+        <p:txBody>
+          <a:bodyPr wrap="square" rtlCol="0" anchor="ctr"/>
+          <a:lstStyle/>
+          <a:p>
+            <a:pPr indent="0" marL="0">
+              <a:lnSpc>
+                <a:spcPct val="118000"/>
+              </a:lnSpc>
+              <a:buNone/>
+            </a:pPr>
+            <a:r>
+              <a:rPr lang="en-US" sz="850" dirty="0">
                 <a:solidFill>
                   <a:srgbClr val="595959"/>
                 </a:solidFill>
@@ -10813,38 +13466,61 @@
                 <a:ea typeface="Arial" pitchFamily="34" charset="-122"/>
                 <a:cs typeface="Arial" pitchFamily="34" charset="-120"/>
               </a:rPr>
-              <a:t>context/ (01–05)</a:t>
-            </a:r>
-            <a:endParaRPr lang="en-US" sz="900" dirty="0"/>
-          </a:p>
-        </p:txBody>
-      </p:sp>
-      <p:sp>
-        <p:nvSpPr>
-          <p:cNvPr id="16" name="Text 14"/>
-          <p:cNvSpPr/>
-          <p:nvPr/>
-        </p:nvSpPr>
-        <p:spPr>
-          <a:xfrm>
-            <a:off x="6583680" y="2688336"/>
-            <a:ext cx="2286000" cy="201168"/>
-          </a:xfrm>
-          <a:prstGeom prst="rect">
-            <a:avLst/>
-          </a:prstGeom>
-          <a:noFill/>
-          <a:ln/>
-        </p:spPr>
-        <p:txBody>
-          <a:bodyPr wrap="square" rtlCol="0" anchor="ctr"/>
-          <a:lstStyle/>
-          <a:p>
-            <a:pPr indent="0" marL="0">
-              <a:buNone/>
-            </a:pPr>
-            <a:r>
-              <a:rPr lang="en-US" sz="900" dirty="0">
+              <a:t>Analytics dashboard for operations and governance insights</a:t>
+            </a:r>
+            <a:endParaRPr lang="en-US" sz="850" dirty="0"/>
+          </a:p>
+        </p:txBody>
+      </p:sp>
+      <p:sp>
+        <p:nvSpPr>
+          <p:cNvPr id="53" name="Shape 51"/>
+          <p:cNvSpPr/>
+          <p:nvPr/>
+        </p:nvSpPr>
+        <p:spPr>
+          <a:xfrm>
+            <a:off x="6858000" y="3108960"/>
+            <a:ext cx="73152" cy="73152"/>
+          </a:xfrm>
+          <a:prstGeom prst="ellipse">
+            <a:avLst/>
+          </a:prstGeom>
+          <a:solidFill>
+            <a:srgbClr val="595959"/>
+          </a:solidFill>
+          <a:ln/>
+        </p:spPr>
+      </p:sp>
+      <p:sp>
+        <p:nvSpPr>
+          <p:cNvPr id="54" name="Text 52"/>
+          <p:cNvSpPr/>
+          <p:nvPr/>
+        </p:nvSpPr>
+        <p:spPr>
+          <a:xfrm>
+            <a:off x="6986016" y="2926080"/>
+            <a:ext cx="1737360" cy="512064"/>
+          </a:xfrm>
+          <a:prstGeom prst="rect">
+            <a:avLst/>
+          </a:prstGeom>
+          <a:noFill/>
+          <a:ln/>
+        </p:spPr>
+        <p:txBody>
+          <a:bodyPr wrap="square" rtlCol="0" anchor="ctr"/>
+          <a:lstStyle/>
+          <a:p>
+            <a:pPr indent="0" marL="0">
+              <a:lnSpc>
+                <a:spcPct val="118000"/>
+              </a:lnSpc>
+              <a:buNone/>
+            </a:pPr>
+            <a:r>
+              <a:rPr lang="en-US" sz="850" dirty="0">
                 <a:solidFill>
                   <a:srgbClr val="595959"/>
                 </a:solidFill>
@@ -10852,269 +13528,15 @@
                 <a:ea typeface="Arial" pitchFamily="34" charset="-122"/>
                 <a:cs typeface="Arial" pitchFamily="34" charset="-120"/>
               </a:rPr>
-              <a:t>implementation/source/</a:t>
-            </a:r>
-            <a:endParaRPr lang="en-US" sz="900" dirty="0"/>
-          </a:p>
-        </p:txBody>
-      </p:sp>
-      <p:sp>
-        <p:nvSpPr>
-          <p:cNvPr id="17" name="Text 15"/>
-          <p:cNvSpPr/>
-          <p:nvPr/>
-        </p:nvSpPr>
-        <p:spPr>
-          <a:xfrm>
-            <a:off x="6583680" y="2889504"/>
-            <a:ext cx="2286000" cy="201168"/>
-          </a:xfrm>
-          <a:prstGeom prst="rect">
-            <a:avLst/>
-          </a:prstGeom>
-          <a:noFill/>
-          <a:ln/>
-        </p:spPr>
-        <p:txBody>
-          <a:bodyPr wrap="square" rtlCol="0" anchor="ctr"/>
-          <a:lstStyle/>
-          <a:p>
-            <a:pPr indent="0" marL="0">
-              <a:buNone/>
-            </a:pPr>
-            <a:r>
-              <a:rPr lang="en-US" sz="900" dirty="0">
-                <a:solidFill>
-                  <a:srgbClr val="595959"/>
-                </a:solidFill>
-                <a:latin typeface="Arial" pitchFamily="34" charset="0"/>
-                <a:ea typeface="Arial" pitchFamily="34" charset="-122"/>
-                <a:cs typeface="Arial" pitchFamily="34" charset="-120"/>
-              </a:rPr>
-              <a:t>reference/glossary.md</a:t>
-            </a:r>
-            <a:endParaRPr lang="en-US" sz="900" dirty="0"/>
-          </a:p>
-        </p:txBody>
-      </p:sp>
-      <p:sp>
-        <p:nvSpPr>
-          <p:cNvPr id="18" name="Shape 16"/>
-          <p:cNvSpPr/>
-          <p:nvPr/>
-        </p:nvSpPr>
-        <p:spPr>
-          <a:xfrm>
-            <a:off x="6510528" y="3218688"/>
-            <a:ext cx="2432304" cy="1408176"/>
-          </a:xfrm>
-          <a:prstGeom prst="rect">
-            <a:avLst/>
-          </a:prstGeom>
-          <a:solidFill>
-            <a:srgbClr val="F5FAFF"/>
-          </a:solidFill>
-          <a:ln/>
-        </p:spPr>
-      </p:sp>
-      <p:sp>
-        <p:nvSpPr>
-          <p:cNvPr id="19" name="Text 17"/>
-          <p:cNvSpPr/>
-          <p:nvPr/>
-        </p:nvSpPr>
-        <p:spPr>
-          <a:xfrm>
-            <a:off x="6583680" y="3273552"/>
-            <a:ext cx="2286000" cy="256032"/>
-          </a:xfrm>
-          <a:prstGeom prst="rect">
-            <a:avLst/>
-          </a:prstGeom>
-          <a:noFill/>
-          <a:ln/>
-        </p:spPr>
-        <p:txBody>
-          <a:bodyPr wrap="square" rtlCol="0" anchor="ctr"/>
-          <a:lstStyle/>
-          <a:p>
-            <a:pPr indent="0" marL="0">
-              <a:buNone/>
-            </a:pPr>
-            <a:r>
-              <a:rPr lang="en-US" sz="950" b="1" dirty="0">
-                <a:solidFill>
-                  <a:srgbClr val="007CC3"/>
-                </a:solidFill>
-                <a:latin typeface="Arial" pitchFamily="34" charset="0"/>
-                <a:ea typeface="Arial" pitchFamily="34" charset="-122"/>
-                <a:cs typeface="Arial" pitchFamily="34" charset="-120"/>
-              </a:rPr>
-              <a:t>FOR COPILOT USERS</a:t>
-            </a:r>
-            <a:endParaRPr lang="en-US" sz="950" dirty="0"/>
-          </a:p>
-        </p:txBody>
-      </p:sp>
-      <p:sp>
-        <p:nvSpPr>
-          <p:cNvPr id="20" name="Text 18"/>
-          <p:cNvSpPr/>
-          <p:nvPr/>
-        </p:nvSpPr>
-        <p:spPr>
-          <a:xfrm>
-            <a:off x="6583680" y="3566160"/>
-            <a:ext cx="2286000" cy="201168"/>
-          </a:xfrm>
-          <a:prstGeom prst="rect">
-            <a:avLst/>
-          </a:prstGeom>
-          <a:noFill/>
-          <a:ln/>
-        </p:spPr>
-        <p:txBody>
-          <a:bodyPr wrap="square" rtlCol="0" anchor="ctr"/>
-          <a:lstStyle/>
-          <a:p>
-            <a:pPr indent="0" marL="0">
-              <a:buNone/>
-            </a:pPr>
-            <a:r>
-              <a:rPr lang="en-US" sz="900" dirty="0">
-                <a:solidFill>
-                  <a:srgbClr val="595959"/>
-                </a:solidFill>
-                <a:latin typeface="Arial" pitchFamily="34" charset="0"/>
-                <a:ea typeface="Arial" pitchFamily="34" charset="-122"/>
-                <a:cs typeface="Arial" pitchFamily="34" charset="-120"/>
-              </a:rPr>
-              <a:t>Auto-loaded AI instructions</a:t>
-            </a:r>
-            <a:endParaRPr lang="en-US" sz="900" dirty="0"/>
-          </a:p>
-        </p:txBody>
-      </p:sp>
-      <p:sp>
-        <p:nvSpPr>
-          <p:cNvPr id="21" name="Text 19"/>
-          <p:cNvSpPr/>
-          <p:nvPr/>
-        </p:nvSpPr>
-        <p:spPr>
-          <a:xfrm>
-            <a:off x="6583680" y="3767328"/>
-            <a:ext cx="2286000" cy="201168"/>
-          </a:xfrm>
-          <a:prstGeom prst="rect">
-            <a:avLst/>
-          </a:prstGeom>
-          <a:noFill/>
-          <a:ln/>
-        </p:spPr>
-        <p:txBody>
-          <a:bodyPr wrap="square" rtlCol="0" anchor="ctr"/>
-          <a:lstStyle/>
-          <a:p>
-            <a:pPr indent="0" marL="0">
-              <a:buNone/>
-            </a:pPr>
-            <a:r>
-              <a:rPr lang="en-US" sz="900" dirty="0">
-                <a:solidFill>
-                  <a:srgbClr val="595959"/>
-                </a:solidFill>
-                <a:latin typeface="Arial" pitchFamily="34" charset="0"/>
-                <a:ea typeface="Arial" pitchFamily="34" charset="-122"/>
-                <a:cs typeface="Arial" pitchFamily="34" charset="-120"/>
-              </a:rPr>
-              <a:t>Full engine API reference</a:t>
-            </a:r>
-            <a:endParaRPr lang="en-US" sz="900" dirty="0"/>
-          </a:p>
-        </p:txBody>
-      </p:sp>
-      <p:sp>
-        <p:nvSpPr>
-          <p:cNvPr id="22" name="Text 20"/>
-          <p:cNvSpPr/>
-          <p:nvPr/>
-        </p:nvSpPr>
-        <p:spPr>
-          <a:xfrm>
-            <a:off x="6583680" y="3968496"/>
-            <a:ext cx="2286000" cy="201168"/>
-          </a:xfrm>
-          <a:prstGeom prst="rect">
-            <a:avLst/>
-          </a:prstGeom>
-          <a:noFill/>
-          <a:ln/>
-        </p:spPr>
-        <p:txBody>
-          <a:bodyPr wrap="square" rtlCol="0" anchor="ctr"/>
-          <a:lstStyle/>
-          <a:p>
-            <a:pPr indent="0" marL="0">
-              <a:buNone/>
-            </a:pPr>
-            <a:r>
-              <a:rPr lang="en-US" sz="900" dirty="0">
-                <a:solidFill>
-                  <a:srgbClr val="595959"/>
-                </a:solidFill>
-                <a:latin typeface="Arial" pitchFamily="34" charset="0"/>
-                <a:ea typeface="Arial" pitchFamily="34" charset="-122"/>
-                <a:cs typeface="Arial" pitchFamily="34" charset="-120"/>
-              </a:rPr>
-              <a:t>All 50+ knowledge topics</a:t>
-            </a:r>
-            <a:endParaRPr lang="en-US" sz="900" dirty="0"/>
-          </a:p>
-        </p:txBody>
-      </p:sp>
-      <p:sp>
-        <p:nvSpPr>
-          <p:cNvPr id="23" name="Text 21"/>
-          <p:cNvSpPr/>
-          <p:nvPr/>
-        </p:nvSpPr>
-        <p:spPr>
-          <a:xfrm>
-            <a:off x="6583680" y="4169664"/>
-            <a:ext cx="2286000" cy="201168"/>
-          </a:xfrm>
-          <a:prstGeom prst="rect">
-            <a:avLst/>
-          </a:prstGeom>
-          <a:noFill/>
-          <a:ln/>
-        </p:spPr>
-        <p:txBody>
-          <a:bodyPr wrap="square" rtlCol="0" anchor="ctr"/>
-          <a:lstStyle/>
-          <a:p>
-            <a:pPr indent="0" marL="0">
-              <a:buNone/>
-            </a:pPr>
-            <a:r>
-              <a:rPr lang="en-US" sz="900" dirty="0">
-                <a:solidFill>
-                  <a:srgbClr val="595959"/>
-                </a:solidFill>
-                <a:latin typeface="Arial" pitchFamily="34" charset="0"/>
-                <a:ea typeface="Arial" pitchFamily="34" charset="-122"/>
-                <a:cs typeface="Arial" pitchFamily="34" charset="-120"/>
-              </a:rPr>
-              <a:t>Architecture and data model</a:t>
-            </a:r>
-            <a:endParaRPr lang="en-US" sz="900" dirty="0"/>
+              <a:t>Broader onboarding programmes and adoption tracking</a:t>
+            </a:r>
+            <a:endParaRPr lang="en-US" sz="850" dirty="0"/>
           </a:p>
         </p:txBody>
       </p:sp>
       <p:pic>
         <p:nvPicPr>
-          <p:cNvPr id="24" name="Image 0" descr="preencoded.png">    </p:cNvPr>
+          <p:cNvPr id="55" name="Image 0" descr="preencoded.png">    </p:cNvPr>
           <p:cNvPicPr>
             <a:picLocks noChangeAspect="1"/>
           </p:cNvPicPr>
@@ -11138,7 +13560,7 @@
       </p:pic>
       <p:sp>
         <p:nvSpPr>
-          <p:cNvPr id="25" name="Text 22"/>
+          <p:cNvPr id="56" name="Text 53"/>
           <p:cNvSpPr/>
           <p:nvPr/>
         </p:nvSpPr>
